--- a/顧問簡報_升級版.pptx
+++ b/顧問簡報_升級版.pptx
@@ -8,6 +8,7 @@
     <p:sldId id="256" r:id="rId7"/>
     <p:sldId id="257" r:id="rId8"/>
     <p:sldId id="258" r:id="rId9"/>
+    <p:sldId id="266" r:id="rId17"/>
     <p:sldId id="259" r:id="rId10"/>
     <p:sldId id="260" r:id="rId11"/>
     <p:sldId id="261" r:id="rId12"/>
@@ -3664,6 +3665,1231 @@
     <p:bg>
       <p:bgPr>
         <a:solidFill>
+          <a:srgbClr val="FFFFFF"/>
+        </a:solidFill>
+        <a:effectLst/>
+      </p:bgPr>
+    </p:bg>
+    <p:spTree>
+      <p:nvGrpSpPr>
+        <p:cNvPr id="1" name=""/>
+        <p:cNvGrpSpPr/>
+        <p:nvPr/>
+      </p:nvGrpSpPr>
+      <p:grpSpPr/>
+      <p:sp>
+        <p:nvSpPr>
+          <p:cNvPr id="2" name="Rectangle 1"/>
+          <p:cNvSpPr/>
+          <p:nvPr/>
+        </p:nvSpPr>
+        <p:spPr>
+          <a:xfrm rot="1080000">
+            <a:off x="10972800" y="-548640"/>
+            <a:ext cx="22860" cy="2926080"/>
+          </a:xfrm>
+          <a:prstGeom prst="rect">
+            <a:avLst/>
+          </a:prstGeom>
+          <a:solidFill>
+            <a:srgbClr val="F3D9D2"/>
+          </a:solidFill>
+          <a:ln>
+            <a:noFill/>
+          </a:ln>
+          <a:effectLst/>
+        </p:spPr>
+        <p:style>
+          <a:lnRef idx="1">
+            <a:schemeClr val="accent1"/>
+          </a:lnRef>
+          <a:fillRef idx="3">
+            <a:schemeClr val="accent1"/>
+          </a:fillRef>
+          <a:effectRef idx="2">
+            <a:schemeClr val="accent1"/>
+          </a:effectRef>
+          <a:fontRef idx="minor">
+            <a:schemeClr val="lt1"/>
+          </a:fontRef>
+        </p:style>
+        <p:txBody>
+          <a:bodyPr rtlCol="0" anchor="ctr"/>
+          <a:lstStyle/>
+          <a:p>
+            <a:pPr algn="ctr"/>
+          </a:p>
+        </p:txBody>
+      </p:sp>
+      <p:sp>
+        <p:nvSpPr>
+          <p:cNvPr id="3" name="Rectangle 2"/>
+          <p:cNvSpPr/>
+          <p:nvPr/>
+        </p:nvSpPr>
+        <p:spPr>
+          <a:xfrm rot="1800000">
+            <a:off x="10991088" y="-548640"/>
+            <a:ext cx="22860" cy="3063240"/>
+          </a:xfrm>
+          <a:prstGeom prst="rect">
+            <a:avLst/>
+          </a:prstGeom>
+          <a:solidFill>
+            <a:srgbClr val="F3D9D2"/>
+          </a:solidFill>
+          <a:ln>
+            <a:noFill/>
+          </a:ln>
+          <a:effectLst/>
+        </p:spPr>
+        <p:style>
+          <a:lnRef idx="1">
+            <a:schemeClr val="accent1"/>
+          </a:lnRef>
+          <a:fillRef idx="3">
+            <a:schemeClr val="accent1"/>
+          </a:fillRef>
+          <a:effectRef idx="2">
+            <a:schemeClr val="accent1"/>
+          </a:effectRef>
+          <a:fontRef idx="minor">
+            <a:schemeClr val="lt1"/>
+          </a:fontRef>
+        </p:style>
+        <p:txBody>
+          <a:bodyPr rtlCol="0" anchor="ctr"/>
+          <a:lstStyle/>
+          <a:p>
+            <a:pPr algn="ctr"/>
+          </a:p>
+        </p:txBody>
+      </p:sp>
+      <p:sp>
+        <p:nvSpPr>
+          <p:cNvPr id="4" name="Rectangle 3"/>
+          <p:cNvSpPr/>
+          <p:nvPr/>
+        </p:nvSpPr>
+        <p:spPr>
+          <a:xfrm rot="2520000">
+            <a:off x="11009376" y="-548640"/>
+            <a:ext cx="22860" cy="3200400"/>
+          </a:xfrm>
+          <a:prstGeom prst="rect">
+            <a:avLst/>
+          </a:prstGeom>
+          <a:solidFill>
+            <a:srgbClr val="F3D9D2"/>
+          </a:solidFill>
+          <a:ln>
+            <a:noFill/>
+          </a:ln>
+          <a:effectLst/>
+        </p:spPr>
+        <p:style>
+          <a:lnRef idx="1">
+            <a:schemeClr val="accent1"/>
+          </a:lnRef>
+          <a:fillRef idx="3">
+            <a:schemeClr val="accent1"/>
+          </a:fillRef>
+          <a:effectRef idx="2">
+            <a:schemeClr val="accent1"/>
+          </a:effectRef>
+          <a:fontRef idx="minor">
+            <a:schemeClr val="lt1"/>
+          </a:fontRef>
+        </p:style>
+        <p:txBody>
+          <a:bodyPr rtlCol="0" anchor="ctr"/>
+          <a:lstStyle/>
+          <a:p>
+            <a:pPr algn="ctr"/>
+          </a:p>
+        </p:txBody>
+      </p:sp>
+      <p:sp>
+        <p:nvSpPr>
+          <p:cNvPr id="5" name="Rectangle 4"/>
+          <p:cNvSpPr/>
+          <p:nvPr/>
+        </p:nvSpPr>
+        <p:spPr>
+          <a:xfrm rot="3240000">
+            <a:off x="11027664" y="-548640"/>
+            <a:ext cx="22860" cy="3337560"/>
+          </a:xfrm>
+          <a:prstGeom prst="rect">
+            <a:avLst/>
+          </a:prstGeom>
+          <a:solidFill>
+            <a:srgbClr val="F3D9D2"/>
+          </a:solidFill>
+          <a:ln>
+            <a:noFill/>
+          </a:ln>
+          <a:effectLst/>
+        </p:spPr>
+        <p:style>
+          <a:lnRef idx="1">
+            <a:schemeClr val="accent1"/>
+          </a:lnRef>
+          <a:fillRef idx="3">
+            <a:schemeClr val="accent1"/>
+          </a:fillRef>
+          <a:effectRef idx="2">
+            <a:schemeClr val="accent1"/>
+          </a:effectRef>
+          <a:fontRef idx="minor">
+            <a:schemeClr val="lt1"/>
+          </a:fontRef>
+        </p:style>
+        <p:txBody>
+          <a:bodyPr rtlCol="0" anchor="ctr"/>
+          <a:lstStyle/>
+          <a:p>
+            <a:pPr algn="ctr"/>
+          </a:p>
+        </p:txBody>
+      </p:sp>
+      <p:sp>
+        <p:nvSpPr>
+          <p:cNvPr id="6" name="Rectangle 5"/>
+          <p:cNvSpPr/>
+          <p:nvPr/>
+        </p:nvSpPr>
+        <p:spPr>
+          <a:xfrm rot="3960000">
+            <a:off x="11045952" y="-548640"/>
+            <a:ext cx="22860" cy="3474720"/>
+          </a:xfrm>
+          <a:prstGeom prst="rect">
+            <a:avLst/>
+          </a:prstGeom>
+          <a:solidFill>
+            <a:srgbClr val="F3D9D2"/>
+          </a:solidFill>
+          <a:ln>
+            <a:noFill/>
+          </a:ln>
+          <a:effectLst/>
+        </p:spPr>
+        <p:style>
+          <a:lnRef idx="1">
+            <a:schemeClr val="accent1"/>
+          </a:lnRef>
+          <a:fillRef idx="3">
+            <a:schemeClr val="accent1"/>
+          </a:fillRef>
+          <a:effectRef idx="2">
+            <a:schemeClr val="accent1"/>
+          </a:effectRef>
+          <a:fontRef idx="minor">
+            <a:schemeClr val="lt1"/>
+          </a:fontRef>
+        </p:style>
+        <p:txBody>
+          <a:bodyPr rtlCol="0" anchor="ctr"/>
+          <a:lstStyle/>
+          <a:p>
+            <a:pPr algn="ctr"/>
+          </a:p>
+        </p:txBody>
+      </p:sp>
+      <p:sp>
+        <p:nvSpPr>
+          <p:cNvPr id="7" name="TextBox 6"/>
+          <p:cNvSpPr txBox="1"/>
+          <p:nvPr/>
+        </p:nvSpPr>
+        <p:spPr>
+          <a:xfrm>
+            <a:off x="640080" y="457200"/>
+            <a:ext cx="10515600" cy="365760"/>
+          </a:xfrm>
+          <a:prstGeom prst="rect">
+            <a:avLst/>
+          </a:prstGeom>
+          <a:noFill/>
+        </p:spPr>
+        <p:txBody>
+          <a:bodyPr wrap="square" anchor="t" lIns="0" rIns="0" tIns="0" bIns="0">
+            <a:spAutoFit/>
+          </a:bodyPr>
+          <a:lstStyle/>
+          <a:p>
+            <a:pPr algn="l">
+              <a:lnSpc>
+                <a:spcPct val="100000"/>
+              </a:lnSpc>
+              <a:spcBef>
+                <a:spcPts val="0"/>
+              </a:spcBef>
+              <a:spcAft>
+                <a:spcPts val="400"/>
+              </a:spcAft>
+            </a:pPr>
+            <a:r>
+              <a:rPr sz="1350" b="1">
+                <a:solidFill>
+                  <a:srgbClr val="E8654E"/>
+                </a:solidFill>
+                <a:latin typeface="Microsoft JhengHei"/>
+                <a:ea typeface="Microsoft JhengHei"/>
+                <a:cs typeface="Microsoft JhengHei"/>
+              </a:rPr>
+              <a:t>第二次諮詢重點 ③ · 產品／應用介面 Demo</a:t>
+            </a:r>
+          </a:p>
+        </p:txBody>
+      </p:sp>
+      <p:sp>
+        <p:nvSpPr>
+          <p:cNvPr id="8" name="TextBox 7"/>
+          <p:cNvSpPr txBox="1"/>
+          <p:nvPr/>
+        </p:nvSpPr>
+        <p:spPr>
+          <a:xfrm>
+            <a:off x="640080" y="804672"/>
+            <a:ext cx="10789920" cy="640080"/>
+          </a:xfrm>
+          <a:prstGeom prst="rect">
+            <a:avLst/>
+          </a:prstGeom>
+          <a:noFill/>
+        </p:spPr>
+        <p:txBody>
+          <a:bodyPr wrap="square" anchor="t" lIns="0" rIns="0" tIns="0" bIns="0">
+            <a:spAutoFit/>
+          </a:bodyPr>
+          <a:lstStyle/>
+          <a:p>
+            <a:pPr algn="l">
+              <a:lnSpc>
+                <a:spcPct val="100000"/>
+              </a:lnSpc>
+              <a:spcBef>
+                <a:spcPts val="0"/>
+              </a:spcBef>
+              <a:spcAft>
+                <a:spcPts val="400"/>
+              </a:spcAft>
+            </a:pPr>
+            <a:r>
+              <a:rPr sz="2900" b="1">
+                <a:solidFill>
+                  <a:srgbClr val="1E3A5F"/>
+                </a:solidFill>
+                <a:latin typeface="Microsoft JhengHei"/>
+                <a:ea typeface="Microsoft JhengHei"/>
+                <a:cs typeface="Microsoft JhengHei"/>
+              </a:rPr>
+              <a:t>產品／應用介面 Demo</a:t>
+            </a:r>
+          </a:p>
+        </p:txBody>
+      </p:sp>
+      <p:sp>
+        <p:nvSpPr>
+          <p:cNvPr id="9" name="TextBox 8"/>
+          <p:cNvSpPr txBox="1"/>
+          <p:nvPr/>
+        </p:nvSpPr>
+        <p:spPr>
+          <a:xfrm>
+            <a:off x="640080" y="1463040"/>
+            <a:ext cx="11155680" cy="457200"/>
+          </a:xfrm>
+          <a:prstGeom prst="rect">
+            <a:avLst/>
+          </a:prstGeom>
+          <a:noFill/>
+        </p:spPr>
+        <p:txBody>
+          <a:bodyPr wrap="square" anchor="t" lIns="0" rIns="0" tIns="0" bIns="0">
+            <a:spAutoFit/>
+          </a:bodyPr>
+          <a:lstStyle/>
+          <a:p>
+            <a:pPr algn="l">
+              <a:lnSpc>
+                <a:spcPct val="100000"/>
+              </a:lnSpc>
+              <a:spcBef>
+                <a:spcPts val="0"/>
+              </a:spcBef>
+              <a:spcAft>
+                <a:spcPts val="400"/>
+              </a:spcAft>
+            </a:pPr>
+            <a:r>
+              <a:rPr sz="1450" b="0">
+                <a:solidFill>
+                  <a:srgbClr val="767C87"/>
+                </a:solidFill>
+                <a:latin typeface="Microsoft JhengHei"/>
+                <a:ea typeface="Microsoft JhengHei"/>
+                <a:cs typeface="Microsoft JhengHei"/>
+              </a:rPr>
+              <a:t>專為目標受眾設計的最終互動畫面</a:t>
+            </a:r>
+          </a:p>
+        </p:txBody>
+      </p:sp>
+      <p:sp>
+        <p:nvSpPr>
+          <p:cNvPr id="10" name="Rounded Rectangle 9"/>
+          <p:cNvSpPr/>
+          <p:nvPr/>
+        </p:nvSpPr>
+        <p:spPr>
+          <a:xfrm>
+            <a:off x="640080" y="2103120"/>
+            <a:ext cx="5349240" cy="1417320"/>
+          </a:xfrm>
+          <a:prstGeom prst="roundRect">
+            <a:avLst>
+              <a:gd name="adj" fmla="val 8000"/>
+            </a:avLst>
+          </a:prstGeom>
+          <a:solidFill>
+            <a:srgbClr val="F6F8FB"/>
+          </a:solidFill>
+          <a:ln w="12700">
+            <a:solidFill>
+              <a:srgbClr val="D8DEE6"/>
+            </a:solidFill>
+          </a:ln>
+          <a:effectLst/>
+        </p:spPr>
+        <p:style>
+          <a:lnRef idx="1">
+            <a:schemeClr val="accent1"/>
+          </a:lnRef>
+          <a:fillRef idx="3">
+            <a:schemeClr val="accent1"/>
+          </a:fillRef>
+          <a:effectRef idx="2">
+            <a:schemeClr val="accent1"/>
+          </a:effectRef>
+          <a:fontRef idx="minor">
+            <a:schemeClr val="lt1"/>
+          </a:fontRef>
+        </p:style>
+        <p:txBody>
+          <a:bodyPr rtlCol="0" anchor="ctr"/>
+          <a:lstStyle/>
+          <a:p>
+            <a:pPr algn="ctr"/>
+          </a:p>
+        </p:txBody>
+      </p:sp>
+      <p:sp>
+        <p:nvSpPr>
+          <p:cNvPr id="11" name="Rectangle 10"/>
+          <p:cNvSpPr/>
+          <p:nvPr/>
+        </p:nvSpPr>
+        <p:spPr>
+          <a:xfrm>
+            <a:off x="640080" y="2103120"/>
+            <a:ext cx="109728" cy="1417320"/>
+          </a:xfrm>
+          <a:prstGeom prst="rect">
+            <a:avLst/>
+          </a:prstGeom>
+          <a:solidFill>
+            <a:srgbClr val="E8654E"/>
+          </a:solidFill>
+          <a:ln>
+            <a:noFill/>
+          </a:ln>
+          <a:effectLst/>
+        </p:spPr>
+        <p:style>
+          <a:lnRef idx="1">
+            <a:schemeClr val="accent1"/>
+          </a:lnRef>
+          <a:fillRef idx="3">
+            <a:schemeClr val="accent1"/>
+          </a:fillRef>
+          <a:effectRef idx="2">
+            <a:schemeClr val="accent1"/>
+          </a:effectRef>
+          <a:fontRef idx="minor">
+            <a:schemeClr val="lt1"/>
+          </a:fontRef>
+        </p:style>
+        <p:txBody>
+          <a:bodyPr rtlCol="0" anchor="ctr"/>
+          <a:lstStyle/>
+          <a:p>
+            <a:pPr algn="ctr"/>
+          </a:p>
+        </p:txBody>
+      </p:sp>
+      <p:sp>
+        <p:nvSpPr>
+          <p:cNvPr id="12" name="TextBox 11"/>
+          <p:cNvSpPr txBox="1"/>
+          <p:nvPr/>
+        </p:nvSpPr>
+        <p:spPr>
+          <a:xfrm>
+            <a:off x="960119" y="2359152"/>
+            <a:ext cx="4846320" cy="457200"/>
+          </a:xfrm>
+          <a:prstGeom prst="rect">
+            <a:avLst/>
+          </a:prstGeom>
+          <a:noFill/>
+        </p:spPr>
+        <p:txBody>
+          <a:bodyPr wrap="square" anchor="t" lIns="0" rIns="0" tIns="0" bIns="0">
+            <a:spAutoFit/>
+          </a:bodyPr>
+          <a:lstStyle/>
+          <a:p>
+            <a:pPr algn="l">
+              <a:lnSpc>
+                <a:spcPct val="100000"/>
+              </a:lnSpc>
+              <a:spcBef>
+                <a:spcPts val="0"/>
+              </a:spcBef>
+              <a:spcAft>
+                <a:spcPts val="400"/>
+              </a:spcAft>
+            </a:pPr>
+            <a:r>
+              <a:rPr sz="1600" b="1">
+                <a:solidFill>
+                  <a:srgbClr val="1E3A5F"/>
+                </a:solidFill>
+                <a:latin typeface="Microsoft JhengHei"/>
+                <a:ea typeface="Microsoft JhengHei"/>
+                <a:cs typeface="Microsoft JhengHei"/>
+              </a:rPr>
+              <a:t>分析儀表板　</a:t>
+            </a:r>
+          </a:p>
+        </p:txBody>
+      </p:sp>
+      <p:sp>
+        <p:nvSpPr>
+          <p:cNvPr id="13" name="TextBox 12"/>
+          <p:cNvSpPr txBox="1"/>
+          <p:nvPr/>
+        </p:nvSpPr>
+        <p:spPr>
+          <a:xfrm>
+            <a:off x="960119" y="2852927"/>
+            <a:ext cx="4846320" cy="548640"/>
+          </a:xfrm>
+          <a:prstGeom prst="rect">
+            <a:avLst/>
+          </a:prstGeom>
+          <a:noFill/>
+        </p:spPr>
+        <p:txBody>
+          <a:bodyPr wrap="square" anchor="t" lIns="0" rIns="0" tIns="0" bIns="0">
+            <a:spAutoFit/>
+          </a:bodyPr>
+          <a:lstStyle/>
+          <a:p>
+            <a:pPr algn="l">
+              <a:lnSpc>
+                <a:spcPct val="115000"/>
+              </a:lnSpc>
+              <a:spcBef>
+                <a:spcPts val="0"/>
+              </a:spcBef>
+              <a:spcAft>
+                <a:spcPts val="400"/>
+              </a:spcAft>
+            </a:pPr>
+            <a:r>
+              <a:rPr sz="1350" b="0">
+                <a:solidFill>
+                  <a:srgbClr val="434343"/>
+                </a:solidFill>
+                <a:latin typeface="Microsoft JhengHei"/>
+                <a:ea typeface="Microsoft JhengHei"/>
+                <a:cs typeface="Microsoft JhengHei"/>
+              </a:rPr>
+              <a:t>核心指標、分組、趨勢、AI 觀點總結</a:t>
+            </a:r>
+          </a:p>
+        </p:txBody>
+      </p:sp>
+      <p:sp>
+        <p:nvSpPr>
+          <p:cNvPr id="14" name="Rounded Rectangle 13"/>
+          <p:cNvSpPr/>
+          <p:nvPr/>
+        </p:nvSpPr>
+        <p:spPr>
+          <a:xfrm>
+            <a:off x="6172200" y="2103120"/>
+            <a:ext cx="5349240" cy="1417320"/>
+          </a:xfrm>
+          <a:prstGeom prst="roundRect">
+            <a:avLst>
+              <a:gd name="adj" fmla="val 8000"/>
+            </a:avLst>
+          </a:prstGeom>
+          <a:solidFill>
+            <a:srgbClr val="F6F8FB"/>
+          </a:solidFill>
+          <a:ln w="12700">
+            <a:solidFill>
+              <a:srgbClr val="D8DEE6"/>
+            </a:solidFill>
+          </a:ln>
+          <a:effectLst/>
+        </p:spPr>
+        <p:style>
+          <a:lnRef idx="1">
+            <a:schemeClr val="accent1"/>
+          </a:lnRef>
+          <a:fillRef idx="3">
+            <a:schemeClr val="accent1"/>
+          </a:fillRef>
+          <a:effectRef idx="2">
+            <a:schemeClr val="accent1"/>
+          </a:effectRef>
+          <a:fontRef idx="minor">
+            <a:schemeClr val="lt1"/>
+          </a:fontRef>
+        </p:style>
+        <p:txBody>
+          <a:bodyPr rtlCol="0" anchor="ctr"/>
+          <a:lstStyle/>
+          <a:p>
+            <a:pPr algn="ctr"/>
+          </a:p>
+        </p:txBody>
+      </p:sp>
+      <p:sp>
+        <p:nvSpPr>
+          <p:cNvPr id="15" name="Rectangle 14"/>
+          <p:cNvSpPr/>
+          <p:nvPr/>
+        </p:nvSpPr>
+        <p:spPr>
+          <a:xfrm>
+            <a:off x="6172200" y="2103120"/>
+            <a:ext cx="109728" cy="1417320"/>
+          </a:xfrm>
+          <a:prstGeom prst="rect">
+            <a:avLst/>
+          </a:prstGeom>
+          <a:solidFill>
+            <a:srgbClr val="E8654E"/>
+          </a:solidFill>
+          <a:ln>
+            <a:noFill/>
+          </a:ln>
+          <a:effectLst/>
+        </p:spPr>
+        <p:style>
+          <a:lnRef idx="1">
+            <a:schemeClr val="accent1"/>
+          </a:lnRef>
+          <a:fillRef idx="3">
+            <a:schemeClr val="accent1"/>
+          </a:fillRef>
+          <a:effectRef idx="2">
+            <a:schemeClr val="accent1"/>
+          </a:effectRef>
+          <a:fontRef idx="minor">
+            <a:schemeClr val="lt1"/>
+          </a:fontRef>
+        </p:style>
+        <p:txBody>
+          <a:bodyPr rtlCol="0" anchor="ctr"/>
+          <a:lstStyle/>
+          <a:p>
+            <a:pPr algn="ctr"/>
+          </a:p>
+        </p:txBody>
+      </p:sp>
+      <p:sp>
+        <p:nvSpPr>
+          <p:cNvPr id="16" name="TextBox 15"/>
+          <p:cNvSpPr txBox="1"/>
+          <p:nvPr/>
+        </p:nvSpPr>
+        <p:spPr>
+          <a:xfrm>
+            <a:off x="6492240" y="2359152"/>
+            <a:ext cx="4846320" cy="457200"/>
+          </a:xfrm>
+          <a:prstGeom prst="rect">
+            <a:avLst/>
+          </a:prstGeom>
+          <a:noFill/>
+        </p:spPr>
+        <p:txBody>
+          <a:bodyPr wrap="square" anchor="t" lIns="0" rIns="0" tIns="0" bIns="0">
+            <a:spAutoFit/>
+          </a:bodyPr>
+          <a:lstStyle/>
+          <a:p>
+            <a:pPr algn="l">
+              <a:lnSpc>
+                <a:spcPct val="100000"/>
+              </a:lnSpc>
+              <a:spcBef>
+                <a:spcPts val="0"/>
+              </a:spcBef>
+              <a:spcAft>
+                <a:spcPts val="400"/>
+              </a:spcAft>
+            </a:pPr>
+            <a:r>
+              <a:rPr sz="1600" b="1">
+                <a:solidFill>
+                  <a:srgbClr val="1E3A5F"/>
+                </a:solidFill>
+                <a:latin typeface="Microsoft JhengHei"/>
+                <a:ea typeface="Microsoft JhengHei"/>
+                <a:cs typeface="Microsoft JhengHei"/>
+              </a:rPr>
+              <a:t>跨機構比較　</a:t>
+            </a:r>
+          </a:p>
+        </p:txBody>
+      </p:sp>
+      <p:sp>
+        <p:nvSpPr>
+          <p:cNvPr id="17" name="TextBox 16"/>
+          <p:cNvSpPr txBox="1"/>
+          <p:nvPr/>
+        </p:nvSpPr>
+        <p:spPr>
+          <a:xfrm>
+            <a:off x="6492240" y="2852927"/>
+            <a:ext cx="4846320" cy="548640"/>
+          </a:xfrm>
+          <a:prstGeom prst="rect">
+            <a:avLst/>
+          </a:prstGeom>
+          <a:noFill/>
+        </p:spPr>
+        <p:txBody>
+          <a:bodyPr wrap="square" anchor="t" lIns="0" rIns="0" tIns="0" bIns="0">
+            <a:spAutoFit/>
+          </a:bodyPr>
+          <a:lstStyle/>
+          <a:p>
+            <a:pPr algn="l">
+              <a:lnSpc>
+                <a:spcPct val="115000"/>
+              </a:lnSpc>
+              <a:spcBef>
+                <a:spcPts val="0"/>
+              </a:spcBef>
+              <a:spcAft>
+                <a:spcPts val="400"/>
+              </a:spcAft>
+            </a:pPr>
+            <a:r>
+              <a:rPr sz="1350" b="0">
+                <a:solidFill>
+                  <a:srgbClr val="434343"/>
+                </a:solidFill>
+                <a:latin typeface="Microsoft JhengHei"/>
+                <a:ea typeface="Microsoft JhengHei"/>
+                <a:cs typeface="Microsoft JhengHei"/>
+              </a:rPr>
+              <a:t>億元對齊、標準比率對照、雙序列圖</a:t>
+            </a:r>
+          </a:p>
+        </p:txBody>
+      </p:sp>
+      <p:sp>
+        <p:nvSpPr>
+          <p:cNvPr id="18" name="Rounded Rectangle 17"/>
+          <p:cNvSpPr/>
+          <p:nvPr/>
+        </p:nvSpPr>
+        <p:spPr>
+          <a:xfrm>
+            <a:off x="640080" y="3703320"/>
+            <a:ext cx="5349240" cy="1417320"/>
+          </a:xfrm>
+          <a:prstGeom prst="roundRect">
+            <a:avLst>
+              <a:gd name="adj" fmla="val 8000"/>
+            </a:avLst>
+          </a:prstGeom>
+          <a:solidFill>
+            <a:srgbClr val="F6F8FB"/>
+          </a:solidFill>
+          <a:ln w="12700">
+            <a:solidFill>
+              <a:srgbClr val="D8DEE6"/>
+            </a:solidFill>
+          </a:ln>
+          <a:effectLst/>
+        </p:spPr>
+        <p:style>
+          <a:lnRef idx="1">
+            <a:schemeClr val="accent1"/>
+          </a:lnRef>
+          <a:fillRef idx="3">
+            <a:schemeClr val="accent1"/>
+          </a:fillRef>
+          <a:effectRef idx="2">
+            <a:schemeClr val="accent1"/>
+          </a:effectRef>
+          <a:fontRef idx="minor">
+            <a:schemeClr val="lt1"/>
+          </a:fontRef>
+        </p:style>
+        <p:txBody>
+          <a:bodyPr rtlCol="0" anchor="ctr"/>
+          <a:lstStyle/>
+          <a:p>
+            <a:pPr algn="ctr"/>
+          </a:p>
+        </p:txBody>
+      </p:sp>
+      <p:sp>
+        <p:nvSpPr>
+          <p:cNvPr id="19" name="Rectangle 18"/>
+          <p:cNvSpPr/>
+          <p:nvPr/>
+        </p:nvSpPr>
+        <p:spPr>
+          <a:xfrm>
+            <a:off x="640080" y="3703320"/>
+            <a:ext cx="109728" cy="1417320"/>
+          </a:xfrm>
+          <a:prstGeom prst="rect">
+            <a:avLst/>
+          </a:prstGeom>
+          <a:solidFill>
+            <a:srgbClr val="E8654E"/>
+          </a:solidFill>
+          <a:ln>
+            <a:noFill/>
+          </a:ln>
+          <a:effectLst/>
+        </p:spPr>
+        <p:style>
+          <a:lnRef idx="1">
+            <a:schemeClr val="accent1"/>
+          </a:lnRef>
+          <a:fillRef idx="3">
+            <a:schemeClr val="accent1"/>
+          </a:fillRef>
+          <a:effectRef idx="2">
+            <a:schemeClr val="accent1"/>
+          </a:effectRef>
+          <a:fontRef idx="minor">
+            <a:schemeClr val="lt1"/>
+          </a:fontRef>
+        </p:style>
+        <p:txBody>
+          <a:bodyPr rtlCol="0" anchor="ctr"/>
+          <a:lstStyle/>
+          <a:p>
+            <a:pPr algn="ctr"/>
+          </a:p>
+        </p:txBody>
+      </p:sp>
+      <p:sp>
+        <p:nvSpPr>
+          <p:cNvPr id="20" name="TextBox 19"/>
+          <p:cNvSpPr txBox="1"/>
+          <p:nvPr/>
+        </p:nvSpPr>
+        <p:spPr>
+          <a:xfrm>
+            <a:off x="960119" y="3959352"/>
+            <a:ext cx="4846320" cy="457200"/>
+          </a:xfrm>
+          <a:prstGeom prst="rect">
+            <a:avLst/>
+          </a:prstGeom>
+          <a:noFill/>
+        </p:spPr>
+        <p:txBody>
+          <a:bodyPr wrap="square" anchor="t" lIns="0" rIns="0" tIns="0" bIns="0">
+            <a:spAutoFit/>
+          </a:bodyPr>
+          <a:lstStyle/>
+          <a:p>
+            <a:pPr algn="l">
+              <a:lnSpc>
+                <a:spcPct val="100000"/>
+              </a:lnSpc>
+              <a:spcBef>
+                <a:spcPts val="0"/>
+              </a:spcBef>
+              <a:spcAft>
+                <a:spcPts val="400"/>
+              </a:spcAft>
+            </a:pPr>
+            <a:r>
+              <a:rPr sz="1600" b="1">
+                <a:solidFill>
+                  <a:srgbClr val="1E3A5F"/>
+                </a:solidFill>
+                <a:latin typeface="Microsoft JhengHei"/>
+                <a:ea typeface="Microsoft JhengHei"/>
+                <a:cs typeface="Microsoft JhengHei"/>
+              </a:rPr>
+              <a:t>問答與報告　</a:t>
+            </a:r>
+          </a:p>
+        </p:txBody>
+      </p:sp>
+      <p:sp>
+        <p:nvSpPr>
+          <p:cNvPr id="21" name="TextBox 20"/>
+          <p:cNvSpPr txBox="1"/>
+          <p:nvPr/>
+        </p:nvSpPr>
+        <p:spPr>
+          <a:xfrm>
+            <a:off x="960119" y="4453128"/>
+            <a:ext cx="4846320" cy="548640"/>
+          </a:xfrm>
+          <a:prstGeom prst="rect">
+            <a:avLst/>
+          </a:prstGeom>
+          <a:noFill/>
+        </p:spPr>
+        <p:txBody>
+          <a:bodyPr wrap="square" anchor="t" lIns="0" rIns="0" tIns="0" bIns="0">
+            <a:spAutoFit/>
+          </a:bodyPr>
+          <a:lstStyle/>
+          <a:p>
+            <a:pPr algn="l">
+              <a:lnSpc>
+                <a:spcPct val="115000"/>
+              </a:lnSpc>
+              <a:spcBef>
+                <a:spcPts val="0"/>
+              </a:spcBef>
+              <a:spcAft>
+                <a:spcPts val="400"/>
+              </a:spcAft>
+            </a:pPr>
+            <a:r>
+              <a:rPr sz="1350" b="0">
+                <a:solidFill>
+                  <a:srgbClr val="434343"/>
+                </a:solidFill>
+                <a:latin typeface="Microsoft JhengHei"/>
+                <a:ea typeface="Microsoft JhengHei"/>
+                <a:cs typeface="Microsoft JhengHei"/>
+              </a:rPr>
+              <a:t>EAP Hybrid RAG 對話、附圖、一鍵 Word</a:t>
+            </a:r>
+          </a:p>
+        </p:txBody>
+      </p:sp>
+      <p:sp>
+        <p:nvSpPr>
+          <p:cNvPr id="22" name="Rounded Rectangle 21"/>
+          <p:cNvSpPr/>
+          <p:nvPr/>
+        </p:nvSpPr>
+        <p:spPr>
+          <a:xfrm>
+            <a:off x="6172200" y="3703320"/>
+            <a:ext cx="5349240" cy="1417320"/>
+          </a:xfrm>
+          <a:prstGeom prst="roundRect">
+            <a:avLst>
+              <a:gd name="adj" fmla="val 8000"/>
+            </a:avLst>
+          </a:prstGeom>
+          <a:solidFill>
+            <a:srgbClr val="F6F8FB"/>
+          </a:solidFill>
+          <a:ln w="12700">
+            <a:solidFill>
+              <a:srgbClr val="D8DEE6"/>
+            </a:solidFill>
+          </a:ln>
+          <a:effectLst/>
+        </p:spPr>
+        <p:style>
+          <a:lnRef idx="1">
+            <a:schemeClr val="accent1"/>
+          </a:lnRef>
+          <a:fillRef idx="3">
+            <a:schemeClr val="accent1"/>
+          </a:fillRef>
+          <a:effectRef idx="2">
+            <a:schemeClr val="accent1"/>
+          </a:effectRef>
+          <a:fontRef idx="minor">
+            <a:schemeClr val="lt1"/>
+          </a:fontRef>
+        </p:style>
+        <p:txBody>
+          <a:bodyPr rtlCol="0" anchor="ctr"/>
+          <a:lstStyle/>
+          <a:p>
+            <a:pPr algn="ctr"/>
+          </a:p>
+        </p:txBody>
+      </p:sp>
+      <p:sp>
+        <p:nvSpPr>
+          <p:cNvPr id="23" name="Rectangle 22"/>
+          <p:cNvSpPr/>
+          <p:nvPr/>
+        </p:nvSpPr>
+        <p:spPr>
+          <a:xfrm>
+            <a:off x="6172200" y="3703320"/>
+            <a:ext cx="109728" cy="1417320"/>
+          </a:xfrm>
+          <a:prstGeom prst="rect">
+            <a:avLst/>
+          </a:prstGeom>
+          <a:solidFill>
+            <a:srgbClr val="E8654E"/>
+          </a:solidFill>
+          <a:ln>
+            <a:noFill/>
+          </a:ln>
+          <a:effectLst/>
+        </p:spPr>
+        <p:style>
+          <a:lnRef idx="1">
+            <a:schemeClr val="accent1"/>
+          </a:lnRef>
+          <a:fillRef idx="3">
+            <a:schemeClr val="accent1"/>
+          </a:fillRef>
+          <a:effectRef idx="2">
+            <a:schemeClr val="accent1"/>
+          </a:effectRef>
+          <a:fontRef idx="minor">
+            <a:schemeClr val="lt1"/>
+          </a:fontRef>
+        </p:style>
+        <p:txBody>
+          <a:bodyPr rtlCol="0" anchor="ctr"/>
+          <a:lstStyle/>
+          <a:p>
+            <a:pPr algn="ctr"/>
+          </a:p>
+        </p:txBody>
+      </p:sp>
+      <p:sp>
+        <p:nvSpPr>
+          <p:cNvPr id="24" name="TextBox 23"/>
+          <p:cNvSpPr txBox="1"/>
+          <p:nvPr/>
+        </p:nvSpPr>
+        <p:spPr>
+          <a:xfrm>
+            <a:off x="6492240" y="3959352"/>
+            <a:ext cx="4846320" cy="457200"/>
+          </a:xfrm>
+          <a:prstGeom prst="rect">
+            <a:avLst/>
+          </a:prstGeom>
+          <a:noFill/>
+        </p:spPr>
+        <p:txBody>
+          <a:bodyPr wrap="square" anchor="t" lIns="0" rIns="0" tIns="0" bIns="0">
+            <a:spAutoFit/>
+          </a:bodyPr>
+          <a:lstStyle/>
+          <a:p>
+            <a:pPr algn="l">
+              <a:lnSpc>
+                <a:spcPct val="100000"/>
+              </a:lnSpc>
+              <a:spcBef>
+                <a:spcPts val="0"/>
+              </a:spcBef>
+              <a:spcAft>
+                <a:spcPts val="400"/>
+              </a:spcAft>
+            </a:pPr>
+            <a:r>
+              <a:rPr sz="1600" b="1">
+                <a:solidFill>
+                  <a:srgbClr val="1E3A5F"/>
+                </a:solidFill>
+                <a:latin typeface="Microsoft JhengHei"/>
+                <a:ea typeface="Microsoft JhengHei"/>
+                <a:cs typeface="Microsoft JhengHei"/>
+              </a:rPr>
+              <a:t>資料來源／上傳　</a:t>
+            </a:r>
+          </a:p>
+        </p:txBody>
+      </p:sp>
+      <p:sp>
+        <p:nvSpPr>
+          <p:cNvPr id="25" name="TextBox 24"/>
+          <p:cNvSpPr txBox="1"/>
+          <p:nvPr/>
+        </p:nvSpPr>
+        <p:spPr>
+          <a:xfrm>
+            <a:off x="6492240" y="4453128"/>
+            <a:ext cx="4846320" cy="548640"/>
+          </a:xfrm>
+          <a:prstGeom prst="rect">
+            <a:avLst/>
+          </a:prstGeom>
+          <a:noFill/>
+        </p:spPr>
+        <p:txBody>
+          <a:bodyPr wrap="square" anchor="t" lIns="0" rIns="0" tIns="0" bIns="0">
+            <a:spAutoFit/>
+          </a:bodyPr>
+          <a:lstStyle/>
+          <a:p>
+            <a:pPr algn="l">
+              <a:lnSpc>
+                <a:spcPct val="115000"/>
+              </a:lnSpc>
+              <a:spcBef>
+                <a:spcPts val="0"/>
+              </a:spcBef>
+              <a:spcAft>
+                <a:spcPts val="400"/>
+              </a:spcAft>
+            </a:pPr>
+            <a:r>
+              <a:rPr sz="1350" b="0">
+                <a:solidFill>
+                  <a:srgbClr val="434343"/>
+                </a:solidFill>
+                <a:latin typeface="Microsoft JhengHei"/>
+                <a:ea typeface="Microsoft JhengHei"/>
+                <a:cs typeface="Microsoft JhengHei"/>
+              </a:rPr>
+              <a:t>收錄概況、逐字稿、PDF/錄音上傳</a:t>
+            </a:r>
+          </a:p>
+        </p:txBody>
+      </p:sp>
+      <p:sp>
+        <p:nvSpPr>
+          <p:cNvPr id="26" name="TextBox 25"/>
+          <p:cNvSpPr txBox="1"/>
+          <p:nvPr/>
+        </p:nvSpPr>
+        <p:spPr>
+          <a:xfrm>
+            <a:off x="640080" y="5760720"/>
+            <a:ext cx="10972800" cy="457200"/>
+          </a:xfrm>
+          <a:prstGeom prst="rect">
+            <a:avLst/>
+          </a:prstGeom>
+          <a:noFill/>
+        </p:spPr>
+        <p:txBody>
+          <a:bodyPr wrap="square" anchor="t" lIns="0" rIns="0" tIns="0" bIns="0">
+            <a:spAutoFit/>
+          </a:bodyPr>
+          <a:lstStyle/>
+          <a:p>
+            <a:pPr algn="l">
+              <a:lnSpc>
+                <a:spcPct val="100000"/>
+              </a:lnSpc>
+              <a:spcBef>
+                <a:spcPts val="0"/>
+              </a:spcBef>
+              <a:spcAft>
+                <a:spcPts val="400"/>
+              </a:spcAft>
+            </a:pPr>
+            <a:r>
+              <a:rPr sz="1300" b="1">
+                <a:solidFill>
+                  <a:srgbClr val="E8654E"/>
+                </a:solidFill>
+                <a:latin typeface="Microsoft JhengHei"/>
+                <a:ea typeface="Microsoft JhengHei"/>
+                <a:cs typeface="Microsoft JhengHei"/>
+              </a:rPr>
+              <a:t>建議：此頁貼實機截圖＋紅框圈重點＋編號說明，或現場實機操作。</a:t>
+            </a:r>
+          </a:p>
+        </p:txBody>
+      </p:sp>
+      <p:sp>
+        <p:nvSpPr>
+          <p:cNvPr id="27" name="TextBox 26"/>
+          <p:cNvSpPr txBox="1"/>
+          <p:nvPr/>
+        </p:nvSpPr>
+        <p:spPr>
+          <a:xfrm>
+            <a:off x="11094415" y="6400800"/>
+            <a:ext cx="731520" cy="274320"/>
+          </a:xfrm>
+          <a:prstGeom prst="rect">
+            <a:avLst/>
+          </a:prstGeom>
+          <a:noFill/>
+        </p:spPr>
+        <p:txBody>
+          <a:bodyPr wrap="square" anchor="t" lIns="0" rIns="0" tIns="0" bIns="0">
+            <a:spAutoFit/>
+          </a:bodyPr>
+          <a:lstStyle/>
+          <a:p>
+            <a:pPr algn="r">
+              <a:lnSpc>
+                <a:spcPct val="100000"/>
+              </a:lnSpc>
+              <a:spcBef>
+                <a:spcPts val="0"/>
+              </a:spcBef>
+              <a:spcAft>
+                <a:spcPts val="400"/>
+              </a:spcAft>
+            </a:pPr>
+            <a:r>
+              <a:rPr sz="1100" b="0">
+                <a:solidFill>
+                  <a:srgbClr val="767C87"/>
+                </a:solidFill>
+                <a:latin typeface="Microsoft JhengHei"/>
+                <a:ea typeface="Microsoft JhengHei"/>
+                <a:cs typeface="Microsoft JhengHei"/>
+              </a:rPr>
+              <a:t>10</a:t>
+            </a:r>
+          </a:p>
+        </p:txBody>
+      </p:sp>
+    </p:spTree>
+  </p:cSld>
+  <p:clrMapOvr>
+    <a:masterClrMapping/>
+  </p:clrMapOvr>
+</p:sld>
+</file>
+
+<file path=ppt/slides/slide11.xml><?xml version="1.0" encoding="utf-8"?>
+<p:sld xmlns:a="http://schemas.openxmlformats.org/drawingml/2006/main" xmlns:p="http://schemas.openxmlformats.org/presentationml/2006/main" xmlns:r="http://schemas.openxmlformats.org/officeDocument/2006/relationships">
+  <p:cSld>
+    <p:bg>
+      <p:bgPr>
+        <a:solidFill>
           <a:srgbClr val="142238"/>
         </a:solidFill>
         <a:effectLst/>
@@ -6610,7 +7836,7 @@
                 <a:ea typeface="Microsoft JhengHei"/>
                 <a:cs typeface="Microsoft JhengHei"/>
               </a:rPr>
-              <a:t>切段、統一單位、標記累計、術語對齊</a:t>
+              <a:t>切段、單位補全、標記累計／層級、術語對齊</a:t>
             </a:r>
           </a:p>
         </p:txBody>
@@ -6752,7 +7978,7 @@
                 <a:ea typeface="Microsoft JhengHei"/>
                 <a:cs typeface="Microsoft JhengHei"/>
               </a:rPr>
-              <a:t>EAP Hybrid RAG ＋ Graph／Vector 索引</a:t>
+              <a:t>策展成唯一節點後匯入 EAP 圖譜</a:t>
             </a:r>
           </a:p>
         </p:txBody>
@@ -7257,7 +8483,7 @@
                 <a:ea typeface="Microsoft JhengHei"/>
                 <a:cs typeface="Microsoft JhengHei"/>
               </a:rPr>
-              <a:t>1,104</a:t>
+              <a:t>1,176</a:t>
             </a:r>
           </a:p>
         </p:txBody>
@@ -7828,7 +9054,7 @@
                 <a:ea typeface="Microsoft JhengHei"/>
                 <a:cs typeface="Microsoft JhengHei"/>
               </a:rPr>
-              <a:t>第一次諮詢重點 ② · 系統技術架構</a:t>
+              <a:t>第一次諮詢重點 ① · 資料清洗與治理</a:t>
             </a:r>
           </a:p>
         </p:txBody>
@@ -7875,7 +9101,7 @@
                 <a:ea typeface="Microsoft JhengHei"/>
                 <a:cs typeface="Microsoft JhengHei"/>
               </a:rPr>
-              <a:t>系統技術架構 — 語意知識網</a:t>
+              <a:t>資料治理：從碎片到唯一節點</a:t>
             </a:r>
           </a:p>
         </p:txBody>
@@ -7922,7 +9148,7 @@
                 <a:ea typeface="Microsoft JhengHei"/>
                 <a:cs typeface="Microsoft JhengHei"/>
               </a:rPr>
-              <a:t>Semantic Knowledge Network：Graph（精準）＋ Vector（語意）雙軌</a:t>
+              <a:t>解析出來還不夠——要策展成 AI 檢索不會出錯的結構</a:t>
             </a:r>
           </a:p>
         </p:txBody>
@@ -7935,8 +9161,8 @@
         </p:nvSpPr>
         <p:spPr>
           <a:xfrm>
-            <a:off x="640080" y="2194560"/>
-            <a:ext cx="1737360" cy="1371600"/>
+            <a:off x="566928" y="2423160"/>
+            <a:ext cx="2487168" cy="2194560"/>
           </a:xfrm>
           <a:prstGeom prst="roundRect">
             <a:avLst>
@@ -7946,7 +9172,7 @@
           <a:solidFill>
             <a:srgbClr val="FDECE8"/>
           </a:solidFill>
-          <a:ln w="12700">
+          <a:ln w="19050">
             <a:solidFill>
               <a:srgbClr val="E8654E"/>
             </a:solidFill>
@@ -7983,1374 +9209,8 @@
         </p:nvSpPr>
         <p:spPr>
           <a:xfrm>
-            <a:off x="640080" y="2514600"/>
-            <a:ext cx="1737360" cy="731520"/>
-          </a:xfrm>
-          <a:prstGeom prst="rect">
-            <a:avLst/>
-          </a:prstGeom>
-          <a:noFill/>
-        </p:spPr>
-        <p:txBody>
-          <a:bodyPr wrap="square" anchor="t" lIns="0" rIns="0" tIns="0" bIns="0">
-            <a:spAutoFit/>
-          </a:bodyPr>
-          <a:lstStyle/>
-          <a:p>
-            <a:pPr algn="ctr">
-              <a:lnSpc>
-                <a:spcPct val="100000"/>
-              </a:lnSpc>
-              <a:spcBef>
-                <a:spcPts val="0"/>
-              </a:spcBef>
-              <a:spcAft>
-                <a:spcPts val="200"/>
-              </a:spcAft>
-            </a:pPr>
-            <a:r>
-              <a:rPr sz="1500" b="1">
-                <a:solidFill>
-                  <a:srgbClr val="1E3A5F"/>
-                </a:solidFill>
-                <a:latin typeface="Microsoft JhengHei"/>
-                <a:ea typeface="Microsoft JhengHei"/>
-                <a:cs typeface="Microsoft JhengHei"/>
-              </a:rPr>
-              <a:t>核心資料</a:t>
-            </a:r>
-          </a:p>
-          <a:p>
-            <a:pPr algn="ctr">
-              <a:lnSpc>
-                <a:spcPct val="100000"/>
-              </a:lnSpc>
-              <a:spcBef>
-                <a:spcPts val="0"/>
-              </a:spcBef>
-              <a:spcAft>
-                <a:spcPts val="200"/>
-              </a:spcAft>
-            </a:pPr>
-            <a:r>
-              <a:rPr sz="1200" b="0">
-                <a:solidFill>
-                  <a:srgbClr val="767C87"/>
-                </a:solidFill>
-                <a:latin typeface="Microsoft JhengHei"/>
-                <a:ea typeface="Microsoft JhengHei"/>
-                <a:cs typeface="Microsoft JhengHei"/>
-              </a:rPr>
-              <a:t>Hybrid Data</a:t>
-            </a:r>
-          </a:p>
-        </p:txBody>
-      </p:sp>
-      <p:sp>
-        <p:nvSpPr>
-          <p:cNvPr id="12" name="Rounded Rectangle 11"/>
-          <p:cNvSpPr/>
-          <p:nvPr/>
-        </p:nvSpPr>
-        <p:spPr>
-          <a:xfrm>
-            <a:off x="640080" y="4069079"/>
-            <a:ext cx="1737360" cy="1371600"/>
-          </a:xfrm>
-          <a:prstGeom prst="roundRect">
-            <a:avLst>
-              <a:gd name="adj" fmla="val 8000"/>
-            </a:avLst>
-          </a:prstGeom>
-          <a:solidFill>
-            <a:srgbClr val="F6F8FB"/>
-          </a:solidFill>
-          <a:ln w="12700">
-            <a:solidFill>
-              <a:srgbClr val="D8DEE6"/>
-            </a:solidFill>
-          </a:ln>
-          <a:effectLst/>
-        </p:spPr>
-        <p:style>
-          <a:lnRef idx="1">
-            <a:schemeClr val="accent1"/>
-          </a:lnRef>
-          <a:fillRef idx="3">
-            <a:schemeClr val="accent1"/>
-          </a:fillRef>
-          <a:effectRef idx="2">
-            <a:schemeClr val="accent1"/>
-          </a:effectRef>
-          <a:fontRef idx="minor">
-            <a:schemeClr val="lt1"/>
-          </a:fontRef>
-        </p:style>
-        <p:txBody>
-          <a:bodyPr rtlCol="0" anchor="ctr"/>
-          <a:lstStyle/>
-          <a:p>
-            <a:pPr algn="ctr"/>
-          </a:p>
-        </p:txBody>
-      </p:sp>
-      <p:sp>
-        <p:nvSpPr>
-          <p:cNvPr id="13" name="TextBox 12"/>
-          <p:cNvSpPr txBox="1"/>
-          <p:nvPr/>
-        </p:nvSpPr>
-        <p:spPr>
-          <a:xfrm>
-            <a:off x="640080" y="4389120"/>
-            <a:ext cx="1737360" cy="731520"/>
-          </a:xfrm>
-          <a:prstGeom prst="rect">
-            <a:avLst/>
-          </a:prstGeom>
-          <a:noFill/>
-        </p:spPr>
-        <p:txBody>
-          <a:bodyPr wrap="square" anchor="t" lIns="0" rIns="0" tIns="0" bIns="0">
-            <a:spAutoFit/>
-          </a:bodyPr>
-          <a:lstStyle/>
-          <a:p>
-            <a:pPr algn="ctr">
-              <a:lnSpc>
-                <a:spcPct val="100000"/>
-              </a:lnSpc>
-              <a:spcBef>
-                <a:spcPts val="0"/>
-              </a:spcBef>
-              <a:spcAft>
-                <a:spcPts val="200"/>
-              </a:spcAft>
-            </a:pPr>
-            <a:r>
-              <a:rPr sz="1500" b="1">
-                <a:solidFill>
-                  <a:srgbClr val="1E3A5F"/>
-                </a:solidFill>
-                <a:latin typeface="Microsoft JhengHei"/>
-                <a:ea typeface="Microsoft JhengHei"/>
-                <a:cs typeface="Microsoft JhengHei"/>
-              </a:rPr>
-              <a:t>使用情境</a:t>
-            </a:r>
-          </a:p>
-          <a:p>
-            <a:pPr algn="ctr">
-              <a:lnSpc>
-                <a:spcPct val="100000"/>
-              </a:lnSpc>
-              <a:spcBef>
-                <a:spcPts val="0"/>
-              </a:spcBef>
-              <a:spcAft>
-                <a:spcPts val="200"/>
-              </a:spcAft>
-            </a:pPr>
-            <a:r>
-              <a:rPr sz="1200" b="0">
-                <a:solidFill>
-                  <a:srgbClr val="767C87"/>
-                </a:solidFill>
-                <a:latin typeface="Microsoft JhengHei"/>
-                <a:ea typeface="Microsoft JhengHei"/>
-                <a:cs typeface="Microsoft JhengHei"/>
-              </a:rPr>
-              <a:t>Use Case</a:t>
-            </a:r>
-          </a:p>
-        </p:txBody>
-      </p:sp>
-      <p:sp>
-        <p:nvSpPr>
-          <p:cNvPr id="14" name="Rounded Rectangle 13"/>
-          <p:cNvSpPr/>
-          <p:nvPr/>
-        </p:nvSpPr>
-        <p:spPr>
-          <a:xfrm>
-            <a:off x="2743200" y="2103120"/>
-            <a:ext cx="4160520" cy="1371600"/>
-          </a:xfrm>
-          <a:prstGeom prst="roundRect">
-            <a:avLst>
-              <a:gd name="adj" fmla="val 8000"/>
-            </a:avLst>
-          </a:prstGeom>
-          <a:solidFill>
-            <a:srgbClr val="1E3A5F"/>
-          </a:solidFill>
-          <a:ln>
-            <a:noFill/>
-          </a:ln>
-          <a:effectLst/>
-        </p:spPr>
-        <p:style>
-          <a:lnRef idx="1">
-            <a:schemeClr val="accent1"/>
-          </a:lnRef>
-          <a:fillRef idx="3">
-            <a:schemeClr val="accent1"/>
-          </a:fillRef>
-          <a:effectRef idx="2">
-            <a:schemeClr val="accent1"/>
-          </a:effectRef>
-          <a:fontRef idx="minor">
-            <a:schemeClr val="lt1"/>
-          </a:fontRef>
-        </p:style>
-        <p:txBody>
-          <a:bodyPr rtlCol="0" anchor="ctr"/>
-          <a:lstStyle/>
-          <a:p>
-            <a:pPr algn="ctr"/>
-          </a:p>
-        </p:txBody>
-      </p:sp>
-      <p:sp>
-        <p:nvSpPr>
-          <p:cNvPr id="15" name="TextBox 14"/>
-          <p:cNvSpPr txBox="1"/>
-          <p:nvPr/>
-        </p:nvSpPr>
-        <p:spPr>
-          <a:xfrm>
-            <a:off x="2743200" y="2286000"/>
-            <a:ext cx="4160520" cy="1005840"/>
-          </a:xfrm>
-          <a:prstGeom prst="rect">
-            <a:avLst/>
-          </a:prstGeom>
-          <a:noFill/>
-        </p:spPr>
-        <p:txBody>
-          <a:bodyPr wrap="square" anchor="ctr" lIns="0" rIns="0" tIns="0" bIns="0">
-            <a:spAutoFit/>
-          </a:bodyPr>
-          <a:lstStyle/>
-          <a:p>
-            <a:pPr algn="ctr">
-              <a:lnSpc>
-                <a:spcPct val="100000"/>
-              </a:lnSpc>
-              <a:spcBef>
-                <a:spcPts val="0"/>
-              </a:spcBef>
-              <a:spcAft>
-                <a:spcPts val="300"/>
-              </a:spcAft>
-            </a:pPr>
-            <a:r>
-              <a:rPr sz="1500" b="1">
-                <a:solidFill>
-                  <a:srgbClr val="FFFFFF"/>
-                </a:solidFill>
-                <a:latin typeface="Microsoft JhengHei"/>
-                <a:ea typeface="Microsoft JhengHei"/>
-                <a:cs typeface="Microsoft JhengHei"/>
-              </a:rPr>
-              <a:t>Graph Data（GraphRAG）</a:t>
-            </a:r>
-          </a:p>
-          <a:p>
-            <a:pPr algn="ctr">
-              <a:lnSpc>
-                <a:spcPct val="100000"/>
-              </a:lnSpc>
-              <a:spcBef>
-                <a:spcPts val="0"/>
-              </a:spcBef>
-              <a:spcAft>
-                <a:spcPts val="300"/>
-              </a:spcAft>
-            </a:pPr>
-            <a:r>
-              <a:rPr sz="1200" b="0">
-                <a:solidFill>
-                  <a:srgbClr val="E8EDF4"/>
-                </a:solidFill>
-                <a:latin typeface="Microsoft JhengHei"/>
-                <a:ea typeface="Microsoft JhengHei"/>
-                <a:cs typeface="Microsoft JhengHei"/>
-              </a:rPr>
-              <a:t>指標關聯圖：公司→期間→指標→數值</a:t>
-            </a:r>
-          </a:p>
-        </p:txBody>
-      </p:sp>
-      <p:sp>
-        <p:nvSpPr>
-          <p:cNvPr id="16" name="Rounded Rectangle 15"/>
-          <p:cNvSpPr/>
-          <p:nvPr/>
-        </p:nvSpPr>
-        <p:spPr>
-          <a:xfrm>
-            <a:off x="7223760" y="2103120"/>
-            <a:ext cx="4343400" cy="1371600"/>
-          </a:xfrm>
-          <a:prstGeom prst="roundRect">
-            <a:avLst>
-              <a:gd name="adj" fmla="val 8000"/>
-            </a:avLst>
-          </a:prstGeom>
-          <a:solidFill>
-            <a:srgbClr val="6B4E9E"/>
-          </a:solidFill>
-          <a:ln>
-            <a:noFill/>
-          </a:ln>
-          <a:effectLst/>
-        </p:spPr>
-        <p:style>
-          <a:lnRef idx="1">
-            <a:schemeClr val="accent1"/>
-          </a:lnRef>
-          <a:fillRef idx="3">
-            <a:schemeClr val="accent1"/>
-          </a:fillRef>
-          <a:effectRef idx="2">
-            <a:schemeClr val="accent1"/>
-          </a:effectRef>
-          <a:fontRef idx="minor">
-            <a:schemeClr val="lt1"/>
-          </a:fontRef>
-        </p:style>
-        <p:txBody>
-          <a:bodyPr rtlCol="0" anchor="ctr"/>
-          <a:lstStyle/>
-          <a:p>
-            <a:pPr algn="ctr"/>
-          </a:p>
-        </p:txBody>
-      </p:sp>
-      <p:sp>
-        <p:nvSpPr>
-          <p:cNvPr id="17" name="TextBox 16"/>
-          <p:cNvSpPr txBox="1"/>
-          <p:nvPr/>
-        </p:nvSpPr>
-        <p:spPr>
-          <a:xfrm>
-            <a:off x="7223760" y="2286000"/>
-            <a:ext cx="4343400" cy="1005840"/>
-          </a:xfrm>
-          <a:prstGeom prst="rect">
-            <a:avLst/>
-          </a:prstGeom>
-          <a:noFill/>
-        </p:spPr>
-        <p:txBody>
-          <a:bodyPr wrap="square" anchor="ctr" lIns="0" rIns="0" tIns="0" bIns="0">
-            <a:spAutoFit/>
-          </a:bodyPr>
-          <a:lstStyle/>
-          <a:p>
-            <a:pPr algn="ctr">
-              <a:lnSpc>
-                <a:spcPct val="100000"/>
-              </a:lnSpc>
-              <a:spcBef>
-                <a:spcPts val="0"/>
-              </a:spcBef>
-              <a:spcAft>
-                <a:spcPts val="300"/>
-              </a:spcAft>
-            </a:pPr>
-            <a:r>
-              <a:rPr sz="1500" b="1">
-                <a:solidFill>
-                  <a:srgbClr val="FFFFFF"/>
-                </a:solidFill>
-                <a:latin typeface="Microsoft JhengHei"/>
-                <a:ea typeface="Microsoft JhengHei"/>
-                <a:cs typeface="Microsoft JhengHei"/>
-              </a:rPr>
-              <a:t>Vector Data（VectorRAG）</a:t>
-            </a:r>
-          </a:p>
-          <a:p>
-            <a:pPr algn="ctr">
-              <a:lnSpc>
-                <a:spcPct val="100000"/>
-              </a:lnSpc>
-              <a:spcBef>
-                <a:spcPts val="0"/>
-              </a:spcBef>
-              <a:spcAft>
-                <a:spcPts val="300"/>
-              </a:spcAft>
-            </a:pPr>
-            <a:r>
-              <a:rPr sz="1200" b="0">
-                <a:solidFill>
-                  <a:srgbClr val="E8EDF4"/>
-                </a:solidFill>
-                <a:latin typeface="Microsoft JhengHei"/>
-                <a:ea typeface="Microsoft JhengHei"/>
-                <a:cs typeface="Microsoft JhengHei"/>
-              </a:rPr>
-              <a:t>法說會逐字稿：切段後語意索引</a:t>
-            </a:r>
-          </a:p>
-        </p:txBody>
-      </p:sp>
-      <p:sp>
-        <p:nvSpPr>
-          <p:cNvPr id="18" name="Rounded Rectangle 17"/>
-          <p:cNvSpPr/>
-          <p:nvPr/>
-        </p:nvSpPr>
-        <p:spPr>
-          <a:xfrm>
-            <a:off x="2743200" y="3657600"/>
-            <a:ext cx="1280160" cy="640080"/>
-          </a:xfrm>
-          <a:prstGeom prst="roundRect">
-            <a:avLst>
-              <a:gd name="adj" fmla="val 8000"/>
-            </a:avLst>
-          </a:prstGeom>
-          <a:solidFill>
-            <a:srgbClr val="F6F8FB"/>
-          </a:solidFill>
-          <a:ln w="12700">
-            <a:solidFill>
-              <a:srgbClr val="D8DEE6"/>
-            </a:solidFill>
-          </a:ln>
-          <a:effectLst/>
-        </p:spPr>
-        <p:style>
-          <a:lnRef idx="1">
-            <a:schemeClr val="accent1"/>
-          </a:lnRef>
-          <a:fillRef idx="3">
-            <a:schemeClr val="accent1"/>
-          </a:fillRef>
-          <a:effectRef idx="2">
-            <a:schemeClr val="accent1"/>
-          </a:effectRef>
-          <a:fontRef idx="minor">
-            <a:schemeClr val="lt1"/>
-          </a:fontRef>
-        </p:style>
-        <p:txBody>
-          <a:bodyPr rtlCol="0" anchor="ctr"/>
-          <a:lstStyle/>
-          <a:p>
-            <a:pPr algn="ctr"/>
-          </a:p>
-        </p:txBody>
-      </p:sp>
-      <p:sp>
-        <p:nvSpPr>
-          <p:cNvPr id="19" name="TextBox 18"/>
-          <p:cNvSpPr txBox="1"/>
-          <p:nvPr/>
-        </p:nvSpPr>
-        <p:spPr>
-          <a:xfrm>
-            <a:off x="2743200" y="3657600"/>
-            <a:ext cx="1280160" cy="640080"/>
-          </a:xfrm>
-          <a:prstGeom prst="rect">
-            <a:avLst/>
-          </a:prstGeom>
-          <a:noFill/>
-        </p:spPr>
-        <p:txBody>
-          <a:bodyPr wrap="square" anchor="ctr" lIns="0" rIns="0" tIns="0" bIns="0">
-            <a:spAutoFit/>
-          </a:bodyPr>
-          <a:lstStyle/>
-          <a:p>
-            <a:pPr algn="ctr">
-              <a:lnSpc>
-                <a:spcPct val="100000"/>
-              </a:lnSpc>
-              <a:spcBef>
-                <a:spcPts val="0"/>
-              </a:spcBef>
-              <a:spcAft>
-                <a:spcPts val="400"/>
-              </a:spcAft>
-            </a:pPr>
-            <a:r>
-              <a:rPr sz="1100" b="1">
-                <a:solidFill>
-                  <a:srgbClr val="1E3A5F"/>
-                </a:solidFill>
-                <a:latin typeface="Microsoft JhengHei"/>
-                <a:ea typeface="Microsoft JhengHei"/>
-                <a:cs typeface="Microsoft JhengHei"/>
-              </a:rPr>
-              <a:t>個案指標表</a:t>
-            </a:r>
-          </a:p>
-        </p:txBody>
-      </p:sp>
-      <p:sp>
-        <p:nvSpPr>
-          <p:cNvPr id="20" name="Rounded Rectangle 19"/>
-          <p:cNvSpPr/>
-          <p:nvPr/>
-        </p:nvSpPr>
-        <p:spPr>
-          <a:xfrm>
-            <a:off x="4160520" y="3657600"/>
-            <a:ext cx="1280160" cy="640080"/>
-          </a:xfrm>
-          <a:prstGeom prst="roundRect">
-            <a:avLst>
-              <a:gd name="adj" fmla="val 8000"/>
-            </a:avLst>
-          </a:prstGeom>
-          <a:solidFill>
-            <a:srgbClr val="F6F8FB"/>
-          </a:solidFill>
-          <a:ln w="12700">
-            <a:solidFill>
-              <a:srgbClr val="D8DEE6"/>
-            </a:solidFill>
-          </a:ln>
-          <a:effectLst/>
-        </p:spPr>
-        <p:style>
-          <a:lnRef idx="1">
-            <a:schemeClr val="accent1"/>
-          </a:lnRef>
-          <a:fillRef idx="3">
-            <a:schemeClr val="accent1"/>
-          </a:fillRef>
-          <a:effectRef idx="2">
-            <a:schemeClr val="accent1"/>
-          </a:effectRef>
-          <a:fontRef idx="minor">
-            <a:schemeClr val="lt1"/>
-          </a:fontRef>
-        </p:style>
-        <p:txBody>
-          <a:bodyPr rtlCol="0" anchor="ctr"/>
-          <a:lstStyle/>
-          <a:p>
-            <a:pPr algn="ctr"/>
-          </a:p>
-        </p:txBody>
-      </p:sp>
-      <p:sp>
-        <p:nvSpPr>
-          <p:cNvPr id="21" name="TextBox 20"/>
-          <p:cNvSpPr txBox="1"/>
-          <p:nvPr/>
-        </p:nvSpPr>
-        <p:spPr>
-          <a:xfrm>
-            <a:off x="4160520" y="3657600"/>
-            <a:ext cx="1280160" cy="640080"/>
-          </a:xfrm>
-          <a:prstGeom prst="rect">
-            <a:avLst/>
-          </a:prstGeom>
-          <a:noFill/>
-        </p:spPr>
-        <p:txBody>
-          <a:bodyPr wrap="square" anchor="ctr" lIns="0" rIns="0" tIns="0" bIns="0">
-            <a:spAutoFit/>
-          </a:bodyPr>
-          <a:lstStyle/>
-          <a:p>
-            <a:pPr algn="ctr">
-              <a:lnSpc>
-                <a:spcPct val="100000"/>
-              </a:lnSpc>
-              <a:spcBef>
-                <a:spcPts val="0"/>
-              </a:spcBef>
-              <a:spcAft>
-                <a:spcPts val="400"/>
-              </a:spcAft>
-            </a:pPr>
-            <a:r>
-              <a:rPr sz="1100" b="1">
-                <a:solidFill>
-                  <a:srgbClr val="1E3A5F"/>
-                </a:solidFill>
-                <a:latin typeface="Microsoft JhengHei"/>
-                <a:ea typeface="Microsoft JhengHei"/>
-                <a:cs typeface="Microsoft JhengHei"/>
-              </a:rPr>
-              <a:t>期間節點</a:t>
-            </a:r>
-          </a:p>
-        </p:txBody>
-      </p:sp>
-      <p:sp>
-        <p:nvSpPr>
-          <p:cNvPr id="22" name="Rounded Rectangle 21"/>
-          <p:cNvSpPr/>
-          <p:nvPr/>
-        </p:nvSpPr>
-        <p:spPr>
-          <a:xfrm>
-            <a:off x="5577840" y="3657600"/>
-            <a:ext cx="1280160" cy="640080"/>
-          </a:xfrm>
-          <a:prstGeom prst="roundRect">
-            <a:avLst>
-              <a:gd name="adj" fmla="val 8000"/>
-            </a:avLst>
-          </a:prstGeom>
-          <a:solidFill>
-            <a:srgbClr val="F6F8FB"/>
-          </a:solidFill>
-          <a:ln w="12700">
-            <a:solidFill>
-              <a:srgbClr val="D8DEE6"/>
-            </a:solidFill>
-          </a:ln>
-          <a:effectLst/>
-        </p:spPr>
-        <p:style>
-          <a:lnRef idx="1">
-            <a:schemeClr val="accent1"/>
-          </a:lnRef>
-          <a:fillRef idx="3">
-            <a:schemeClr val="accent1"/>
-          </a:fillRef>
-          <a:effectRef idx="2">
-            <a:schemeClr val="accent1"/>
-          </a:effectRef>
-          <a:fontRef idx="minor">
-            <a:schemeClr val="lt1"/>
-          </a:fontRef>
-        </p:style>
-        <p:txBody>
-          <a:bodyPr rtlCol="0" anchor="ctr"/>
-          <a:lstStyle/>
-          <a:p>
-            <a:pPr algn="ctr"/>
-          </a:p>
-        </p:txBody>
-      </p:sp>
-      <p:sp>
-        <p:nvSpPr>
-          <p:cNvPr id="23" name="TextBox 22"/>
-          <p:cNvSpPr txBox="1"/>
-          <p:nvPr/>
-        </p:nvSpPr>
-        <p:spPr>
-          <a:xfrm>
-            <a:off x="5577840" y="3657600"/>
-            <a:ext cx="1280160" cy="640080"/>
-          </a:xfrm>
-          <a:prstGeom prst="rect">
-            <a:avLst/>
-          </a:prstGeom>
-          <a:noFill/>
-        </p:spPr>
-        <p:txBody>
-          <a:bodyPr wrap="square" anchor="ctr" lIns="0" rIns="0" tIns="0" bIns="0">
-            <a:spAutoFit/>
-          </a:bodyPr>
-          <a:lstStyle/>
-          <a:p>
-            <a:pPr algn="ctr">
-              <a:lnSpc>
-                <a:spcPct val="100000"/>
-              </a:lnSpc>
-              <a:spcBef>
-                <a:spcPts val="0"/>
-              </a:spcBef>
-              <a:spcAft>
-                <a:spcPts val="400"/>
-              </a:spcAft>
-            </a:pPr>
-            <a:r>
-              <a:rPr sz="1100" b="1">
-                <a:solidFill>
-                  <a:srgbClr val="1E3A5F"/>
-                </a:solidFill>
-                <a:latin typeface="Microsoft JhengHei"/>
-                <a:ea typeface="Microsoft JhengHei"/>
-                <a:cs typeface="Microsoft JhengHei"/>
-              </a:rPr>
-              <a:t>數值屬性</a:t>
-            </a:r>
-          </a:p>
-        </p:txBody>
-      </p:sp>
-      <p:sp>
-        <p:nvSpPr>
-          <p:cNvPr id="24" name="Rounded Rectangle 23"/>
-          <p:cNvSpPr/>
-          <p:nvPr/>
-        </p:nvSpPr>
-        <p:spPr>
-          <a:xfrm>
-            <a:off x="7223760" y="3657600"/>
-            <a:ext cx="1325880" cy="640080"/>
-          </a:xfrm>
-          <a:prstGeom prst="roundRect">
-            <a:avLst>
-              <a:gd name="adj" fmla="val 8000"/>
-            </a:avLst>
-          </a:prstGeom>
-          <a:solidFill>
-            <a:srgbClr val="F6F8FB"/>
-          </a:solidFill>
-          <a:ln w="12700">
-            <a:solidFill>
-              <a:srgbClr val="D8DEE6"/>
-            </a:solidFill>
-          </a:ln>
-          <a:effectLst/>
-        </p:spPr>
-        <p:style>
-          <a:lnRef idx="1">
-            <a:schemeClr val="accent1"/>
-          </a:lnRef>
-          <a:fillRef idx="3">
-            <a:schemeClr val="accent1"/>
-          </a:fillRef>
-          <a:effectRef idx="2">
-            <a:schemeClr val="accent1"/>
-          </a:effectRef>
-          <a:fontRef idx="minor">
-            <a:schemeClr val="lt1"/>
-          </a:fontRef>
-        </p:style>
-        <p:txBody>
-          <a:bodyPr rtlCol="0" anchor="ctr"/>
-          <a:lstStyle/>
-          <a:p>
-            <a:pPr algn="ctr"/>
-          </a:p>
-        </p:txBody>
-      </p:sp>
-      <p:sp>
-        <p:nvSpPr>
-          <p:cNvPr id="25" name="TextBox 24"/>
-          <p:cNvSpPr txBox="1"/>
-          <p:nvPr/>
-        </p:nvSpPr>
-        <p:spPr>
-          <a:xfrm>
-            <a:off x="7223760" y="3657600"/>
-            <a:ext cx="1325880" cy="640080"/>
-          </a:xfrm>
-          <a:prstGeom prst="rect">
-            <a:avLst/>
-          </a:prstGeom>
-          <a:noFill/>
-        </p:spPr>
-        <p:txBody>
-          <a:bodyPr wrap="square" anchor="ctr" lIns="0" rIns="0" tIns="0" bIns="0">
-            <a:spAutoFit/>
-          </a:bodyPr>
-          <a:lstStyle/>
-          <a:p>
-            <a:pPr algn="ctr">
-              <a:lnSpc>
-                <a:spcPct val="100000"/>
-              </a:lnSpc>
-              <a:spcBef>
-                <a:spcPts val="0"/>
-              </a:spcBef>
-              <a:spcAft>
-                <a:spcPts val="400"/>
-              </a:spcAft>
-            </a:pPr>
-            <a:r>
-              <a:rPr sz="1100" b="1">
-                <a:solidFill>
-                  <a:srgbClr val="1E3A5F"/>
-                </a:solidFill>
-                <a:latin typeface="Microsoft JhengHei"/>
-                <a:ea typeface="Microsoft JhengHei"/>
-                <a:cs typeface="Microsoft JhengHei"/>
-              </a:rPr>
-              <a:t>發債計畫</a:t>
-            </a:r>
-          </a:p>
-        </p:txBody>
-      </p:sp>
-      <p:sp>
-        <p:nvSpPr>
-          <p:cNvPr id="26" name="Rounded Rectangle 25"/>
-          <p:cNvSpPr/>
-          <p:nvPr/>
-        </p:nvSpPr>
-        <p:spPr>
-          <a:xfrm>
-            <a:off x="8686800" y="3657600"/>
-            <a:ext cx="1325880" cy="640080"/>
-          </a:xfrm>
-          <a:prstGeom prst="roundRect">
-            <a:avLst>
-              <a:gd name="adj" fmla="val 8000"/>
-            </a:avLst>
-          </a:prstGeom>
-          <a:solidFill>
-            <a:srgbClr val="F6F8FB"/>
-          </a:solidFill>
-          <a:ln w="12700">
-            <a:solidFill>
-              <a:srgbClr val="D8DEE6"/>
-            </a:solidFill>
-          </a:ln>
-          <a:effectLst/>
-        </p:spPr>
-        <p:style>
-          <a:lnRef idx="1">
-            <a:schemeClr val="accent1"/>
-          </a:lnRef>
-          <a:fillRef idx="3">
-            <a:schemeClr val="accent1"/>
-          </a:fillRef>
-          <a:effectRef idx="2">
-            <a:schemeClr val="accent1"/>
-          </a:effectRef>
-          <a:fontRef idx="minor">
-            <a:schemeClr val="lt1"/>
-          </a:fontRef>
-        </p:style>
-        <p:txBody>
-          <a:bodyPr rtlCol="0" anchor="ctr"/>
-          <a:lstStyle/>
-          <a:p>
-            <a:pPr algn="ctr"/>
-          </a:p>
-        </p:txBody>
-      </p:sp>
-      <p:sp>
-        <p:nvSpPr>
-          <p:cNvPr id="27" name="TextBox 26"/>
-          <p:cNvSpPr txBox="1"/>
-          <p:nvPr/>
-        </p:nvSpPr>
-        <p:spPr>
-          <a:xfrm>
-            <a:off x="8686800" y="3657600"/>
-            <a:ext cx="1325880" cy="640080"/>
-          </a:xfrm>
-          <a:prstGeom prst="rect">
-            <a:avLst/>
-          </a:prstGeom>
-          <a:noFill/>
-        </p:spPr>
-        <p:txBody>
-          <a:bodyPr wrap="square" anchor="ctr" lIns="0" rIns="0" tIns="0" bIns="0">
-            <a:spAutoFit/>
-          </a:bodyPr>
-          <a:lstStyle/>
-          <a:p>
-            <a:pPr algn="ctr">
-              <a:lnSpc>
-                <a:spcPct val="100000"/>
-              </a:lnSpc>
-              <a:spcBef>
-                <a:spcPts val="0"/>
-              </a:spcBef>
-              <a:spcAft>
-                <a:spcPts val="400"/>
-              </a:spcAft>
-            </a:pPr>
-            <a:r>
-              <a:rPr sz="1100" b="1">
-                <a:solidFill>
-                  <a:srgbClr val="1E3A5F"/>
-                </a:solidFill>
-                <a:latin typeface="Microsoft JhengHei"/>
-                <a:ea typeface="Microsoft JhengHei"/>
-                <a:cs typeface="Microsoft JhengHei"/>
-              </a:rPr>
-              <a:t>獲利說明</a:t>
-            </a:r>
-          </a:p>
-        </p:txBody>
-      </p:sp>
-      <p:sp>
-        <p:nvSpPr>
-          <p:cNvPr id="28" name="Rounded Rectangle 27"/>
-          <p:cNvSpPr/>
-          <p:nvPr/>
-        </p:nvSpPr>
-        <p:spPr>
-          <a:xfrm>
-            <a:off x="10149840" y="3657600"/>
-            <a:ext cx="1325880" cy="640080"/>
-          </a:xfrm>
-          <a:prstGeom prst="roundRect">
-            <a:avLst>
-              <a:gd name="adj" fmla="val 8000"/>
-            </a:avLst>
-          </a:prstGeom>
-          <a:solidFill>
-            <a:srgbClr val="F6F8FB"/>
-          </a:solidFill>
-          <a:ln w="12700">
-            <a:solidFill>
-              <a:srgbClr val="D8DEE6"/>
-            </a:solidFill>
-          </a:ln>
-          <a:effectLst/>
-        </p:spPr>
-        <p:style>
-          <a:lnRef idx="1">
-            <a:schemeClr val="accent1"/>
-          </a:lnRef>
-          <a:fillRef idx="3">
-            <a:schemeClr val="accent1"/>
-          </a:fillRef>
-          <a:effectRef idx="2">
-            <a:schemeClr val="accent1"/>
-          </a:effectRef>
-          <a:fontRef idx="minor">
-            <a:schemeClr val="lt1"/>
-          </a:fontRef>
-        </p:style>
-        <p:txBody>
-          <a:bodyPr rtlCol="0" anchor="ctr"/>
-          <a:lstStyle/>
-          <a:p>
-            <a:pPr algn="ctr"/>
-          </a:p>
-        </p:txBody>
-      </p:sp>
-      <p:sp>
-        <p:nvSpPr>
-          <p:cNvPr id="29" name="TextBox 28"/>
-          <p:cNvSpPr txBox="1"/>
-          <p:nvPr/>
-        </p:nvSpPr>
-        <p:spPr>
-          <a:xfrm>
-            <a:off x="10149840" y="3657600"/>
-            <a:ext cx="1325880" cy="640080"/>
-          </a:xfrm>
-          <a:prstGeom prst="rect">
-            <a:avLst/>
-          </a:prstGeom>
-          <a:noFill/>
-        </p:spPr>
-        <p:txBody>
-          <a:bodyPr wrap="square" anchor="ctr" lIns="0" rIns="0" tIns="0" bIns="0">
-            <a:spAutoFit/>
-          </a:bodyPr>
-          <a:lstStyle/>
-          <a:p>
-            <a:pPr algn="ctr">
-              <a:lnSpc>
-                <a:spcPct val="100000"/>
-              </a:lnSpc>
-              <a:spcBef>
-                <a:spcPts val="0"/>
-              </a:spcBef>
-              <a:spcAft>
-                <a:spcPts val="400"/>
-              </a:spcAft>
-            </a:pPr>
-            <a:r>
-              <a:rPr sz="1100" b="1">
-                <a:solidFill>
-                  <a:srgbClr val="1E3A5F"/>
-                </a:solidFill>
-                <a:latin typeface="Microsoft JhengHei"/>
-                <a:ea typeface="Microsoft JhengHei"/>
-                <a:cs typeface="Microsoft JhengHei"/>
-              </a:rPr>
-              <a:t>經理人問答</a:t>
-            </a:r>
-          </a:p>
-        </p:txBody>
-      </p:sp>
-      <p:sp>
-        <p:nvSpPr>
-          <p:cNvPr id="30" name="Rounded Rectangle 29"/>
-          <p:cNvSpPr/>
-          <p:nvPr/>
-        </p:nvSpPr>
-        <p:spPr>
-          <a:xfrm>
-            <a:off x="2743200" y="4709160"/>
-            <a:ext cx="2057400" cy="685800"/>
-          </a:xfrm>
-          <a:prstGeom prst="roundRect">
-            <a:avLst>
-              <a:gd name="adj" fmla="val 8000"/>
-            </a:avLst>
-          </a:prstGeom>
-          <a:solidFill>
-            <a:srgbClr val="1E3A5F"/>
-          </a:solidFill>
-          <a:ln>
-            <a:noFill/>
-          </a:ln>
-          <a:effectLst/>
-        </p:spPr>
-        <p:style>
-          <a:lnRef idx="1">
-            <a:schemeClr val="accent1"/>
-          </a:lnRef>
-          <a:fillRef idx="3">
-            <a:schemeClr val="accent1"/>
-          </a:fillRef>
-          <a:effectRef idx="2">
-            <a:schemeClr val="accent1"/>
-          </a:effectRef>
-          <a:fontRef idx="minor">
-            <a:schemeClr val="lt1"/>
-          </a:fontRef>
-        </p:style>
-        <p:txBody>
-          <a:bodyPr rtlCol="0" anchor="ctr"/>
-          <a:lstStyle/>
-          <a:p>
-            <a:pPr algn="ctr"/>
-          </a:p>
-        </p:txBody>
-      </p:sp>
-      <p:sp>
-        <p:nvSpPr>
-          <p:cNvPr id="31" name="TextBox 30"/>
-          <p:cNvSpPr txBox="1"/>
-          <p:nvPr/>
-        </p:nvSpPr>
-        <p:spPr>
-          <a:xfrm>
-            <a:off x="2743200" y="4709160"/>
-            <a:ext cx="2057400" cy="685800"/>
-          </a:xfrm>
-          <a:prstGeom prst="rect">
-            <a:avLst/>
-          </a:prstGeom>
-          <a:noFill/>
-        </p:spPr>
-        <p:txBody>
-          <a:bodyPr wrap="square" anchor="ctr" lIns="0" rIns="0" tIns="0" bIns="0">
-            <a:spAutoFit/>
-          </a:bodyPr>
-          <a:lstStyle/>
-          <a:p>
-            <a:pPr algn="ctr">
-              <a:lnSpc>
-                <a:spcPct val="100000"/>
-              </a:lnSpc>
-              <a:spcBef>
-                <a:spcPts val="0"/>
-              </a:spcBef>
-              <a:spcAft>
-                <a:spcPts val="400"/>
-              </a:spcAft>
-            </a:pPr>
-            <a:r>
-              <a:rPr sz="1250" b="1">
-                <a:solidFill>
-                  <a:srgbClr val="FFFFFF"/>
-                </a:solidFill>
-                <a:latin typeface="Microsoft JhengHei"/>
-                <a:ea typeface="Microsoft JhengHei"/>
-                <a:cs typeface="Microsoft JhengHei"/>
-              </a:rPr>
-              <a:t>自動審核／分析</a:t>
-            </a:r>
-          </a:p>
-        </p:txBody>
-      </p:sp>
-      <p:sp>
-        <p:nvSpPr>
-          <p:cNvPr id="32" name="Rounded Rectangle 31"/>
-          <p:cNvSpPr/>
-          <p:nvPr/>
-        </p:nvSpPr>
-        <p:spPr>
-          <a:xfrm>
-            <a:off x="4983480" y="4709160"/>
-            <a:ext cx="2057400" cy="685800"/>
-          </a:xfrm>
-          <a:prstGeom prst="roundRect">
-            <a:avLst>
-              <a:gd name="adj" fmla="val 8000"/>
-            </a:avLst>
-          </a:prstGeom>
-          <a:solidFill>
-            <a:srgbClr val="1E3A5F"/>
-          </a:solidFill>
-          <a:ln>
-            <a:noFill/>
-          </a:ln>
-          <a:effectLst/>
-        </p:spPr>
-        <p:style>
-          <a:lnRef idx="1">
-            <a:schemeClr val="accent1"/>
-          </a:lnRef>
-          <a:fillRef idx="3">
-            <a:schemeClr val="accent1"/>
-          </a:fillRef>
-          <a:effectRef idx="2">
-            <a:schemeClr val="accent1"/>
-          </a:effectRef>
-          <a:fontRef idx="minor">
-            <a:schemeClr val="lt1"/>
-          </a:fontRef>
-        </p:style>
-        <p:txBody>
-          <a:bodyPr rtlCol="0" anchor="ctr"/>
-          <a:lstStyle/>
-          <a:p>
-            <a:pPr algn="ctr"/>
-          </a:p>
-        </p:txBody>
-      </p:sp>
-      <p:sp>
-        <p:nvSpPr>
-          <p:cNvPr id="33" name="TextBox 32"/>
-          <p:cNvSpPr txBox="1"/>
-          <p:nvPr/>
-        </p:nvSpPr>
-        <p:spPr>
-          <a:xfrm>
-            <a:off x="4983480" y="4709160"/>
-            <a:ext cx="2057400" cy="685800"/>
-          </a:xfrm>
-          <a:prstGeom prst="rect">
-            <a:avLst/>
-          </a:prstGeom>
-          <a:noFill/>
-        </p:spPr>
-        <p:txBody>
-          <a:bodyPr wrap="square" anchor="ctr" lIns="0" rIns="0" tIns="0" bIns="0">
-            <a:spAutoFit/>
-          </a:bodyPr>
-          <a:lstStyle/>
-          <a:p>
-            <a:pPr algn="ctr">
-              <a:lnSpc>
-                <a:spcPct val="100000"/>
-              </a:lnSpc>
-              <a:spcBef>
-                <a:spcPts val="0"/>
-              </a:spcBef>
-              <a:spcAft>
-                <a:spcPts val="400"/>
-              </a:spcAft>
-            </a:pPr>
-            <a:r>
-              <a:rPr sz="1250" b="1">
-                <a:solidFill>
-                  <a:srgbClr val="FFFFFF"/>
-                </a:solidFill>
-                <a:latin typeface="Microsoft JhengHei"/>
-                <a:ea typeface="Microsoft JhengHei"/>
-                <a:cs typeface="Microsoft JhengHei"/>
-              </a:rPr>
-              <a:t>跨機構比較</a:t>
-            </a:r>
-          </a:p>
-        </p:txBody>
-      </p:sp>
-      <p:sp>
-        <p:nvSpPr>
-          <p:cNvPr id="34" name="Rounded Rectangle 33"/>
-          <p:cNvSpPr/>
-          <p:nvPr/>
-        </p:nvSpPr>
-        <p:spPr>
-          <a:xfrm>
-            <a:off x="7223760" y="4709160"/>
-            <a:ext cx="2057400" cy="685800"/>
-          </a:xfrm>
-          <a:prstGeom prst="roundRect">
-            <a:avLst>
-              <a:gd name="adj" fmla="val 8000"/>
-            </a:avLst>
-          </a:prstGeom>
-          <a:solidFill>
-            <a:srgbClr val="1E3A5F"/>
-          </a:solidFill>
-          <a:ln>
-            <a:noFill/>
-          </a:ln>
-          <a:effectLst/>
-        </p:spPr>
-        <p:style>
-          <a:lnRef idx="1">
-            <a:schemeClr val="accent1"/>
-          </a:lnRef>
-          <a:fillRef idx="3">
-            <a:schemeClr val="accent1"/>
-          </a:fillRef>
-          <a:effectRef idx="2">
-            <a:schemeClr val="accent1"/>
-          </a:effectRef>
-          <a:fontRef idx="minor">
-            <a:schemeClr val="lt1"/>
-          </a:fontRef>
-        </p:style>
-        <p:txBody>
-          <a:bodyPr rtlCol="0" anchor="ctr"/>
-          <a:lstStyle/>
-          <a:p>
-            <a:pPr algn="ctr"/>
-          </a:p>
-        </p:txBody>
-      </p:sp>
-      <p:sp>
-        <p:nvSpPr>
-          <p:cNvPr id="35" name="TextBox 34"/>
-          <p:cNvSpPr txBox="1"/>
-          <p:nvPr/>
-        </p:nvSpPr>
-        <p:spPr>
-          <a:xfrm>
-            <a:off x="7223760" y="4709160"/>
-            <a:ext cx="2057400" cy="685800"/>
-          </a:xfrm>
-          <a:prstGeom prst="rect">
-            <a:avLst/>
-          </a:prstGeom>
-          <a:noFill/>
-        </p:spPr>
-        <p:txBody>
-          <a:bodyPr wrap="square" anchor="ctr" lIns="0" rIns="0" tIns="0" bIns="0">
-            <a:spAutoFit/>
-          </a:bodyPr>
-          <a:lstStyle/>
-          <a:p>
-            <a:pPr algn="ctr">
-              <a:lnSpc>
-                <a:spcPct val="100000"/>
-              </a:lnSpc>
-              <a:spcBef>
-                <a:spcPts val="0"/>
-              </a:spcBef>
-              <a:spcAft>
-                <a:spcPts val="400"/>
-              </a:spcAft>
-            </a:pPr>
-            <a:r>
-              <a:rPr sz="1250" b="1">
-                <a:solidFill>
-                  <a:srgbClr val="FFFFFF"/>
-                </a:solidFill>
-                <a:latin typeface="Microsoft JhengHei"/>
-                <a:ea typeface="Microsoft JhengHei"/>
-                <a:cs typeface="Microsoft JhengHei"/>
-              </a:rPr>
-              <a:t>法規／問答諮詢</a:t>
-            </a:r>
-          </a:p>
-        </p:txBody>
-      </p:sp>
-      <p:sp>
-        <p:nvSpPr>
-          <p:cNvPr id="36" name="Rounded Rectangle 35"/>
-          <p:cNvSpPr/>
-          <p:nvPr/>
-        </p:nvSpPr>
-        <p:spPr>
-          <a:xfrm>
-            <a:off x="9464040" y="4709160"/>
-            <a:ext cx="2057400" cy="685800"/>
-          </a:xfrm>
-          <a:prstGeom prst="roundRect">
-            <a:avLst>
-              <a:gd name="adj" fmla="val 8000"/>
-            </a:avLst>
-          </a:prstGeom>
-          <a:solidFill>
-            <a:srgbClr val="1E3A5F"/>
-          </a:solidFill>
-          <a:ln>
-            <a:noFill/>
-          </a:ln>
-          <a:effectLst/>
-        </p:spPr>
-        <p:style>
-          <a:lnRef idx="1">
-            <a:schemeClr val="accent1"/>
-          </a:lnRef>
-          <a:fillRef idx="3">
-            <a:schemeClr val="accent1"/>
-          </a:fillRef>
-          <a:effectRef idx="2">
-            <a:schemeClr val="accent1"/>
-          </a:effectRef>
-          <a:fontRef idx="minor">
-            <a:schemeClr val="lt1"/>
-          </a:fontRef>
-        </p:style>
-        <p:txBody>
-          <a:bodyPr rtlCol="0" anchor="ctr"/>
-          <a:lstStyle/>
-          <a:p>
-            <a:pPr algn="ctr"/>
-          </a:p>
-        </p:txBody>
-      </p:sp>
-      <p:sp>
-        <p:nvSpPr>
-          <p:cNvPr id="37" name="TextBox 36"/>
-          <p:cNvSpPr txBox="1"/>
-          <p:nvPr/>
-        </p:nvSpPr>
-        <p:spPr>
-          <a:xfrm>
-            <a:off x="9464040" y="4709160"/>
-            <a:ext cx="2057400" cy="685800"/>
-          </a:xfrm>
-          <a:prstGeom prst="rect">
-            <a:avLst/>
-          </a:prstGeom>
-          <a:noFill/>
-        </p:spPr>
-        <p:txBody>
-          <a:bodyPr wrap="square" anchor="ctr" lIns="0" rIns="0" tIns="0" bIns="0">
-            <a:spAutoFit/>
-          </a:bodyPr>
-          <a:lstStyle/>
-          <a:p>
-            <a:pPr algn="ctr">
-              <a:lnSpc>
-                <a:spcPct val="100000"/>
-              </a:lnSpc>
-              <a:spcBef>
-                <a:spcPts val="0"/>
-              </a:spcBef>
-              <a:spcAft>
-                <a:spcPts val="400"/>
-              </a:spcAft>
-            </a:pPr>
-            <a:r>
-              <a:rPr sz="1250" b="1">
-                <a:solidFill>
-                  <a:srgbClr val="FFFFFF"/>
-                </a:solidFill>
-                <a:latin typeface="Microsoft JhengHei"/>
-                <a:ea typeface="Microsoft JhengHei"/>
-                <a:cs typeface="Microsoft JhengHei"/>
-              </a:rPr>
-              <a:t>一鍵報告</a:t>
-            </a:r>
-          </a:p>
-        </p:txBody>
-      </p:sp>
-      <p:sp>
-        <p:nvSpPr>
-          <p:cNvPr id="38" name="TextBox 37"/>
-          <p:cNvSpPr txBox="1"/>
-          <p:nvPr/>
-        </p:nvSpPr>
-        <p:spPr>
-          <a:xfrm>
-            <a:off x="2743200" y="5623560"/>
-            <a:ext cx="8778240" cy="457200"/>
+            <a:off x="768096" y="2660904"/>
+            <a:ext cx="2084832" cy="640080"/>
           </a:xfrm>
           <a:prstGeom prst="rect">
             <a:avLst/>
@@ -9375,22 +9235,845 @@
               </a:spcAft>
             </a:pPr>
             <a:r>
-              <a:rPr sz="1250" b="0">
-                <a:solidFill>
-                  <a:srgbClr val="767C87"/>
-                </a:solidFill>
-                <a:latin typeface="Microsoft JhengHei"/>
-                <a:ea typeface="Microsoft JhengHei"/>
-                <a:cs typeface="Microsoft JhengHei"/>
-              </a:rPr>
-              <a:t>透過 公司ID／期間／指標名 跨表串接，Graph 提供可驗證數值、Vector 提供有出處的說法。</a:t>
-            </a:r>
-          </a:p>
-        </p:txBody>
-      </p:sp>
-      <p:sp>
-        <p:nvSpPr>
-          <p:cNvPr id="39" name="TextBox 38"/>
+              <a:rPr sz="1500" b="1">
+                <a:solidFill>
+                  <a:srgbClr val="E8654E"/>
+                </a:solidFill>
+                <a:latin typeface="Microsoft JhengHei"/>
+                <a:ea typeface="Microsoft JhengHei"/>
+                <a:cs typeface="Microsoft JhengHei"/>
+              </a:rPr>
+              <a:t>① 盤點問題</a:t>
+            </a:r>
+          </a:p>
+        </p:txBody>
+      </p:sp>
+      <p:sp>
+        <p:nvSpPr>
+          <p:cNvPr id="12" name="TextBox 11"/>
+          <p:cNvSpPr txBox="1"/>
+          <p:nvPr/>
+        </p:nvSpPr>
+        <p:spPr>
+          <a:xfrm>
+            <a:off x="786384" y="3337560"/>
+            <a:ext cx="2084832" cy="1097280"/>
+          </a:xfrm>
+          <a:prstGeom prst="rect">
+            <a:avLst/>
+          </a:prstGeom>
+          <a:noFill/>
+        </p:spPr>
+        <p:txBody>
+          <a:bodyPr wrap="square" lIns="0" rIns="0" tIns="0" bIns="0">
+            <a:spAutoFit/>
+          </a:bodyPr>
+          <a:lstStyle/>
+          <a:p>
+            <a:pPr>
+              <a:lnSpc>
+                <a:spcPct val="110000"/>
+              </a:lnSpc>
+              <a:spcAft>
+                <a:spcPts val="500"/>
+              </a:spcAft>
+            </a:pPr>
+            <a:r>
+              <a:rPr sz="1000" b="1">
+                <a:solidFill>
+                  <a:srgbClr val="E8654E"/>
+                </a:solidFill>
+                <a:latin typeface="Microsoft JhengHei"/>
+                <a:ea typeface="Microsoft JhengHei"/>
+                <a:cs typeface="Microsoft JhengHei"/>
+              </a:rPr>
+              <a:t>·  211 個同名 ROE 節點</a:t>
+            </a:r>
+            <a:r>
+              <a:rPr sz="1200">
+                <a:solidFill>
+                  <a:srgbClr val="434343"/>
+                </a:solidFill>
+                <a:latin typeface="Microsoft JhengHei"/>
+                <a:ea typeface="Microsoft JhengHei"/>
+                <a:cs typeface="Microsoft JhengHei"/>
+              </a:rPr>
+              <a:t/>
+            </a:r>
+          </a:p>
+          <a:p>
+            <a:pPr>
+              <a:lnSpc>
+                <a:spcPct val="110000"/>
+              </a:lnSpc>
+              <a:spcAft>
+                <a:spcPts val="500"/>
+              </a:spcAft>
+            </a:pPr>
+            <a:r>
+              <a:rPr sz="1000" b="1">
+                <a:solidFill>
+                  <a:srgbClr val="E8654E"/>
+                </a:solidFill>
+                <a:latin typeface="Microsoft JhengHei"/>
+                <a:ea typeface="Microsoft JhengHei"/>
+                <a:cs typeface="Microsoft JhengHei"/>
+              </a:rPr>
+              <a:t>·  數值掛在關係上</a:t>
+            </a:r>
+            <a:r>
+              <a:rPr sz="1200">
+                <a:solidFill>
+                  <a:srgbClr val="434343"/>
+                </a:solidFill>
+                <a:latin typeface="Microsoft JhengHei"/>
+                <a:ea typeface="Microsoft JhengHei"/>
+                <a:cs typeface="Microsoft JhengHei"/>
+              </a:rPr>
+              <a:t/>
+            </a:r>
+          </a:p>
+        </p:txBody>
+      </p:sp>
+      <p:sp>
+        <p:nvSpPr>
+          <p:cNvPr id="13" name="Right Arrow 12"/>
+          <p:cNvSpPr/>
+          <p:nvPr/>
+        </p:nvSpPr>
+        <p:spPr>
+          <a:xfrm>
+            <a:off x="3072384" y="3337559"/>
+            <a:ext cx="347472" cy="365760"/>
+          </a:xfrm>
+          <a:prstGeom prst="rightArrow">
+            <a:avLst/>
+          </a:prstGeom>
+          <a:solidFill>
+            <a:srgbClr val="E8654E"/>
+          </a:solidFill>
+          <a:ln>
+            <a:noFill/>
+          </a:ln>
+          <a:effectLst/>
+        </p:spPr>
+        <p:style>
+          <a:lnRef idx="1">
+            <a:schemeClr val="accent1"/>
+          </a:lnRef>
+          <a:fillRef idx="3">
+            <a:schemeClr val="accent1"/>
+          </a:fillRef>
+          <a:effectRef idx="2">
+            <a:schemeClr val="accent1"/>
+          </a:effectRef>
+          <a:fontRef idx="minor">
+            <a:schemeClr val="lt1"/>
+          </a:fontRef>
+        </p:style>
+        <p:txBody>
+          <a:bodyPr rtlCol="0" anchor="ctr"/>
+          <a:lstStyle/>
+          <a:p>
+            <a:pPr algn="ctr"/>
+          </a:p>
+        </p:txBody>
+      </p:sp>
+      <p:sp>
+        <p:nvSpPr>
+          <p:cNvPr id="14" name="Rounded Rectangle 13"/>
+          <p:cNvSpPr/>
+          <p:nvPr/>
+        </p:nvSpPr>
+        <p:spPr>
+          <a:xfrm>
+            <a:off x="3438144" y="2423160"/>
+            <a:ext cx="2487168" cy="2194560"/>
+          </a:xfrm>
+          <a:prstGeom prst="roundRect">
+            <a:avLst>
+              <a:gd name="adj" fmla="val 8000"/>
+            </a:avLst>
+          </a:prstGeom>
+          <a:solidFill>
+            <a:srgbClr val="E8EDF4"/>
+          </a:solidFill>
+          <a:ln w="19050">
+            <a:solidFill>
+              <a:srgbClr val="1E3A5F"/>
+            </a:solidFill>
+          </a:ln>
+          <a:effectLst/>
+        </p:spPr>
+        <p:style>
+          <a:lnRef idx="1">
+            <a:schemeClr val="accent1"/>
+          </a:lnRef>
+          <a:fillRef idx="3">
+            <a:schemeClr val="accent1"/>
+          </a:fillRef>
+          <a:effectRef idx="2">
+            <a:schemeClr val="accent1"/>
+          </a:effectRef>
+          <a:fontRef idx="minor">
+            <a:schemeClr val="lt1"/>
+          </a:fontRef>
+        </p:style>
+        <p:txBody>
+          <a:bodyPr rtlCol="0" anchor="ctr"/>
+          <a:lstStyle/>
+          <a:p>
+            <a:pPr algn="ctr"/>
+          </a:p>
+        </p:txBody>
+      </p:sp>
+      <p:sp>
+        <p:nvSpPr>
+          <p:cNvPr id="15" name="TextBox 14"/>
+          <p:cNvSpPr txBox="1"/>
+          <p:nvPr/>
+        </p:nvSpPr>
+        <p:spPr>
+          <a:xfrm>
+            <a:off x="3639312" y="2660904"/>
+            <a:ext cx="2084832" cy="640080"/>
+          </a:xfrm>
+          <a:prstGeom prst="rect">
+            <a:avLst/>
+          </a:prstGeom>
+          <a:noFill/>
+        </p:spPr>
+        <p:txBody>
+          <a:bodyPr wrap="square" anchor="t" lIns="0" rIns="0" tIns="0" bIns="0">
+            <a:spAutoFit/>
+          </a:bodyPr>
+          <a:lstStyle/>
+          <a:p>
+            <a:pPr algn="l">
+              <a:lnSpc>
+                <a:spcPct val="100000"/>
+              </a:lnSpc>
+              <a:spcBef>
+                <a:spcPts val="0"/>
+              </a:spcBef>
+              <a:spcAft>
+                <a:spcPts val="400"/>
+              </a:spcAft>
+            </a:pPr>
+            <a:r>
+              <a:rPr sz="1500" b="1">
+                <a:solidFill>
+                  <a:srgbClr val="1E3A5F"/>
+                </a:solidFill>
+                <a:latin typeface="Microsoft JhengHei"/>
+                <a:ea typeface="Microsoft JhengHei"/>
+                <a:cs typeface="Microsoft JhengHei"/>
+              </a:rPr>
+              <a:t>② 策展正規化</a:t>
+            </a:r>
+          </a:p>
+        </p:txBody>
+      </p:sp>
+      <p:sp>
+        <p:nvSpPr>
+          <p:cNvPr id="16" name="TextBox 15"/>
+          <p:cNvSpPr txBox="1"/>
+          <p:nvPr/>
+        </p:nvSpPr>
+        <p:spPr>
+          <a:xfrm>
+            <a:off x="3657600" y="3337560"/>
+            <a:ext cx="2084832" cy="1097280"/>
+          </a:xfrm>
+          <a:prstGeom prst="rect">
+            <a:avLst/>
+          </a:prstGeom>
+          <a:noFill/>
+        </p:spPr>
+        <p:txBody>
+          <a:bodyPr wrap="square" lIns="0" rIns="0" tIns="0" bIns="0">
+            <a:spAutoFit/>
+          </a:bodyPr>
+          <a:lstStyle/>
+          <a:p>
+            <a:pPr>
+              <a:lnSpc>
+                <a:spcPct val="110000"/>
+              </a:lnSpc>
+              <a:spcAft>
+                <a:spcPts val="500"/>
+              </a:spcAft>
+            </a:pPr>
+            <a:r>
+              <a:rPr sz="1000" b="1">
+                <a:solidFill>
+                  <a:srgbClr val="1E3A5F"/>
+                </a:solidFill>
+                <a:latin typeface="Microsoft JhengHei"/>
+                <a:ea typeface="Microsoft JhengHei"/>
+                <a:cs typeface="Microsoft JhengHei"/>
+              </a:rPr>
+              <a:t>·  公司｜期間｜指標 唯一命名</a:t>
+            </a:r>
+            <a:r>
+              <a:rPr sz="1200">
+                <a:solidFill>
+                  <a:srgbClr val="434343"/>
+                </a:solidFill>
+                <a:latin typeface="Microsoft JhengHei"/>
+                <a:ea typeface="Microsoft JhengHei"/>
+                <a:cs typeface="Microsoft JhengHei"/>
+              </a:rPr>
+              <a:t/>
+            </a:r>
+          </a:p>
+          <a:p>
+            <a:pPr>
+              <a:lnSpc>
+                <a:spcPct val="110000"/>
+              </a:lnSpc>
+              <a:spcAft>
+                <a:spcPts val="500"/>
+              </a:spcAft>
+            </a:pPr>
+            <a:r>
+              <a:rPr sz="1000" b="1">
+                <a:solidFill>
+                  <a:srgbClr val="1E3A5F"/>
+                </a:solidFill>
+                <a:latin typeface="Microsoft JhengHei"/>
+                <a:ea typeface="Microsoft JhengHei"/>
+                <a:cs typeface="Microsoft JhengHei"/>
+              </a:rPr>
+              <a:t>·  累計別／層級／單位入欄</a:t>
+            </a:r>
+            <a:r>
+              <a:rPr sz="1200">
+                <a:solidFill>
+                  <a:srgbClr val="434343"/>
+                </a:solidFill>
+                <a:latin typeface="Microsoft JhengHei"/>
+                <a:ea typeface="Microsoft JhengHei"/>
+                <a:cs typeface="Microsoft JhengHei"/>
+              </a:rPr>
+              <a:t/>
+            </a:r>
+          </a:p>
+        </p:txBody>
+      </p:sp>
+      <p:sp>
+        <p:nvSpPr>
+          <p:cNvPr id="17" name="Right Arrow 16"/>
+          <p:cNvSpPr/>
+          <p:nvPr/>
+        </p:nvSpPr>
+        <p:spPr>
+          <a:xfrm>
+            <a:off x="5943600" y="3337559"/>
+            <a:ext cx="347472" cy="365760"/>
+          </a:xfrm>
+          <a:prstGeom prst="rightArrow">
+            <a:avLst/>
+          </a:prstGeom>
+          <a:solidFill>
+            <a:srgbClr val="E8654E"/>
+          </a:solidFill>
+          <a:ln>
+            <a:noFill/>
+          </a:ln>
+          <a:effectLst/>
+        </p:spPr>
+        <p:style>
+          <a:lnRef idx="1">
+            <a:schemeClr val="accent1"/>
+          </a:lnRef>
+          <a:fillRef idx="3">
+            <a:schemeClr val="accent1"/>
+          </a:fillRef>
+          <a:effectRef idx="2">
+            <a:schemeClr val="accent1"/>
+          </a:effectRef>
+          <a:fontRef idx="minor">
+            <a:schemeClr val="lt1"/>
+          </a:fontRef>
+        </p:style>
+        <p:txBody>
+          <a:bodyPr rtlCol="0" anchor="ctr"/>
+          <a:lstStyle/>
+          <a:p>
+            <a:pPr algn="ctr"/>
+          </a:p>
+        </p:txBody>
+      </p:sp>
+      <p:sp>
+        <p:nvSpPr>
+          <p:cNvPr id="18" name="Rounded Rectangle 17"/>
+          <p:cNvSpPr/>
+          <p:nvPr/>
+        </p:nvSpPr>
+        <p:spPr>
+          <a:xfrm>
+            <a:off x="6309360" y="2423160"/>
+            <a:ext cx="2487168" cy="2194560"/>
+          </a:xfrm>
+          <a:prstGeom prst="roundRect">
+            <a:avLst>
+              <a:gd name="adj" fmla="val 8000"/>
+            </a:avLst>
+          </a:prstGeom>
+          <a:solidFill>
+            <a:srgbClr val="E8EDF4"/>
+          </a:solidFill>
+          <a:ln w="19050">
+            <a:solidFill>
+              <a:srgbClr val="1E3A5F"/>
+            </a:solidFill>
+          </a:ln>
+          <a:effectLst/>
+        </p:spPr>
+        <p:style>
+          <a:lnRef idx="1">
+            <a:schemeClr val="accent1"/>
+          </a:lnRef>
+          <a:fillRef idx="3">
+            <a:schemeClr val="accent1"/>
+          </a:fillRef>
+          <a:effectRef idx="2">
+            <a:schemeClr val="accent1"/>
+          </a:effectRef>
+          <a:fontRef idx="minor">
+            <a:schemeClr val="lt1"/>
+          </a:fontRef>
+        </p:style>
+        <p:txBody>
+          <a:bodyPr rtlCol="0" anchor="ctr"/>
+          <a:lstStyle/>
+          <a:p>
+            <a:pPr algn="ctr"/>
+          </a:p>
+        </p:txBody>
+      </p:sp>
+      <p:sp>
+        <p:nvSpPr>
+          <p:cNvPr id="19" name="TextBox 18"/>
+          <p:cNvSpPr txBox="1"/>
+          <p:nvPr/>
+        </p:nvSpPr>
+        <p:spPr>
+          <a:xfrm>
+            <a:off x="6510528" y="2660904"/>
+            <a:ext cx="2084832" cy="640080"/>
+          </a:xfrm>
+          <a:prstGeom prst="rect">
+            <a:avLst/>
+          </a:prstGeom>
+          <a:noFill/>
+        </p:spPr>
+        <p:txBody>
+          <a:bodyPr wrap="square" anchor="t" lIns="0" rIns="0" tIns="0" bIns="0">
+            <a:spAutoFit/>
+          </a:bodyPr>
+          <a:lstStyle/>
+          <a:p>
+            <a:pPr algn="l">
+              <a:lnSpc>
+                <a:spcPct val="100000"/>
+              </a:lnSpc>
+              <a:spcBef>
+                <a:spcPts val="0"/>
+              </a:spcBef>
+              <a:spcAft>
+                <a:spcPts val="400"/>
+              </a:spcAft>
+            </a:pPr>
+            <a:r>
+              <a:rPr sz="1500" b="1">
+                <a:solidFill>
+                  <a:srgbClr val="1E3A5F"/>
+                </a:solidFill>
+                <a:latin typeface="Microsoft JhengHei"/>
+                <a:ea typeface="Microsoft JhengHei"/>
+                <a:cs typeface="Microsoft JhengHei"/>
+              </a:rPr>
+              <a:t>③ 清空重建</a:t>
+            </a:r>
+          </a:p>
+        </p:txBody>
+      </p:sp>
+      <p:sp>
+        <p:nvSpPr>
+          <p:cNvPr id="20" name="TextBox 19"/>
+          <p:cNvSpPr txBox="1"/>
+          <p:nvPr/>
+        </p:nvSpPr>
+        <p:spPr>
+          <a:xfrm>
+            <a:off x="6528816" y="3337560"/>
+            <a:ext cx="2084832" cy="1097280"/>
+          </a:xfrm>
+          <a:prstGeom prst="rect">
+            <a:avLst/>
+          </a:prstGeom>
+          <a:noFill/>
+        </p:spPr>
+        <p:txBody>
+          <a:bodyPr wrap="square" lIns="0" rIns="0" tIns="0" bIns="0">
+            <a:spAutoFit/>
+          </a:bodyPr>
+          <a:lstStyle/>
+          <a:p>
+            <a:pPr>
+              <a:lnSpc>
+                <a:spcPct val="110000"/>
+              </a:lnSpc>
+              <a:spcAft>
+                <a:spcPts val="500"/>
+              </a:spcAft>
+            </a:pPr>
+            <a:r>
+              <a:rPr sz="1000" b="1">
+                <a:solidFill>
+                  <a:srgbClr val="1E3A5F"/>
+                </a:solidFill>
+                <a:latin typeface="Microsoft JhengHei"/>
+                <a:ea typeface="Microsoft JhengHei"/>
+                <a:cs typeface="Microsoft JhengHei"/>
+              </a:rPr>
+              <a:t>·  專案重設為空白</a:t>
+            </a:r>
+            <a:r>
+              <a:rPr sz="1200">
+                <a:solidFill>
+                  <a:srgbClr val="434343"/>
+                </a:solidFill>
+                <a:latin typeface="Microsoft JhengHei"/>
+                <a:ea typeface="Microsoft JhengHei"/>
+                <a:cs typeface="Microsoft JhengHei"/>
+              </a:rPr>
+              <a:t/>
+            </a:r>
+          </a:p>
+          <a:p>
+            <a:pPr>
+              <a:lnSpc>
+                <a:spcPct val="110000"/>
+              </a:lnSpc>
+              <a:spcAft>
+                <a:spcPts val="500"/>
+              </a:spcAft>
+            </a:pPr>
+            <a:r>
+              <a:rPr sz="1000" b="1">
+                <a:solidFill>
+                  <a:srgbClr val="1E3A5F"/>
+                </a:solidFill>
+                <a:latin typeface="Microsoft JhengHei"/>
+                <a:ea typeface="Microsoft JhengHei"/>
+                <a:cs typeface="Microsoft JhengHei"/>
+              </a:rPr>
+              <a:t>·  1,176 筆策展資料重匯</a:t>
+            </a:r>
+            <a:r>
+              <a:rPr sz="1200">
+                <a:solidFill>
+                  <a:srgbClr val="434343"/>
+                </a:solidFill>
+                <a:latin typeface="Microsoft JhengHei"/>
+                <a:ea typeface="Microsoft JhengHei"/>
+                <a:cs typeface="Microsoft JhengHei"/>
+              </a:rPr>
+              <a:t/>
+            </a:r>
+          </a:p>
+        </p:txBody>
+      </p:sp>
+      <p:sp>
+        <p:nvSpPr>
+          <p:cNvPr id="21" name="Right Arrow 20"/>
+          <p:cNvSpPr/>
+          <p:nvPr/>
+        </p:nvSpPr>
+        <p:spPr>
+          <a:xfrm>
+            <a:off x="8814816" y="3337559"/>
+            <a:ext cx="347472" cy="365760"/>
+          </a:xfrm>
+          <a:prstGeom prst="rightArrow">
+            <a:avLst/>
+          </a:prstGeom>
+          <a:solidFill>
+            <a:srgbClr val="E8654E"/>
+          </a:solidFill>
+          <a:ln>
+            <a:noFill/>
+          </a:ln>
+          <a:effectLst/>
+        </p:spPr>
+        <p:style>
+          <a:lnRef idx="1">
+            <a:schemeClr val="accent1"/>
+          </a:lnRef>
+          <a:fillRef idx="3">
+            <a:schemeClr val="accent1"/>
+          </a:fillRef>
+          <a:effectRef idx="2">
+            <a:schemeClr val="accent1"/>
+          </a:effectRef>
+          <a:fontRef idx="minor">
+            <a:schemeClr val="lt1"/>
+          </a:fontRef>
+        </p:style>
+        <p:txBody>
+          <a:bodyPr rtlCol="0" anchor="ctr"/>
+          <a:lstStyle/>
+          <a:p>
+            <a:pPr algn="ctr"/>
+          </a:p>
+        </p:txBody>
+      </p:sp>
+      <p:sp>
+        <p:nvSpPr>
+          <p:cNvPr id="22" name="Rounded Rectangle 21"/>
+          <p:cNvSpPr/>
+          <p:nvPr/>
+        </p:nvSpPr>
+        <p:spPr>
+          <a:xfrm>
+            <a:off x="9180576" y="2423160"/>
+            <a:ext cx="2487168" cy="2194560"/>
+          </a:xfrm>
+          <a:prstGeom prst="roundRect">
+            <a:avLst>
+              <a:gd name="adj" fmla="val 8000"/>
+            </a:avLst>
+          </a:prstGeom>
+          <a:solidFill>
+            <a:srgbClr val="FDECE8"/>
+          </a:solidFill>
+          <a:ln w="19050">
+            <a:solidFill>
+              <a:srgbClr val="E8654E"/>
+            </a:solidFill>
+          </a:ln>
+          <a:effectLst/>
+        </p:spPr>
+        <p:style>
+          <a:lnRef idx="1">
+            <a:schemeClr val="accent1"/>
+          </a:lnRef>
+          <a:fillRef idx="3">
+            <a:schemeClr val="accent1"/>
+          </a:fillRef>
+          <a:effectRef idx="2">
+            <a:schemeClr val="accent1"/>
+          </a:effectRef>
+          <a:fontRef idx="minor">
+            <a:schemeClr val="lt1"/>
+          </a:fontRef>
+        </p:style>
+        <p:txBody>
+          <a:bodyPr rtlCol="0" anchor="ctr"/>
+          <a:lstStyle/>
+          <a:p>
+            <a:pPr algn="ctr"/>
+          </a:p>
+        </p:txBody>
+      </p:sp>
+      <p:sp>
+        <p:nvSpPr>
+          <p:cNvPr id="23" name="TextBox 22"/>
+          <p:cNvSpPr txBox="1"/>
+          <p:nvPr/>
+        </p:nvSpPr>
+        <p:spPr>
+          <a:xfrm>
+            <a:off x="9381744" y="2660904"/>
+            <a:ext cx="2084832" cy="640080"/>
+          </a:xfrm>
+          <a:prstGeom prst="rect">
+            <a:avLst/>
+          </a:prstGeom>
+          <a:noFill/>
+        </p:spPr>
+        <p:txBody>
+          <a:bodyPr wrap="square" anchor="t" lIns="0" rIns="0" tIns="0" bIns="0">
+            <a:spAutoFit/>
+          </a:bodyPr>
+          <a:lstStyle/>
+          <a:p>
+            <a:pPr algn="l">
+              <a:lnSpc>
+                <a:spcPct val="100000"/>
+              </a:lnSpc>
+              <a:spcBef>
+                <a:spcPts val="0"/>
+              </a:spcBef>
+              <a:spcAft>
+                <a:spcPts val="400"/>
+              </a:spcAft>
+            </a:pPr>
+            <a:r>
+              <a:rPr sz="1500" b="1">
+                <a:solidFill>
+                  <a:srgbClr val="E8654E"/>
+                </a:solidFill>
+                <a:latin typeface="Microsoft JhengHei"/>
+                <a:ea typeface="Microsoft JhengHei"/>
+                <a:cs typeface="Microsoft JhengHei"/>
+              </a:rPr>
+              <a:t>④ 驗證通過</a:t>
+            </a:r>
+          </a:p>
+        </p:txBody>
+      </p:sp>
+      <p:sp>
+        <p:nvSpPr>
+          <p:cNvPr id="24" name="TextBox 23"/>
+          <p:cNvSpPr txBox="1"/>
+          <p:nvPr/>
+        </p:nvSpPr>
+        <p:spPr>
+          <a:xfrm>
+            <a:off x="9400032" y="3337560"/>
+            <a:ext cx="2084832" cy="1097280"/>
+          </a:xfrm>
+          <a:prstGeom prst="rect">
+            <a:avLst/>
+          </a:prstGeom>
+          <a:noFill/>
+        </p:spPr>
+        <p:txBody>
+          <a:bodyPr wrap="square" lIns="0" rIns="0" tIns="0" bIns="0">
+            <a:spAutoFit/>
+          </a:bodyPr>
+          <a:lstStyle/>
+          <a:p>
+            <a:pPr>
+              <a:lnSpc>
+                <a:spcPct val="110000"/>
+              </a:lnSpc>
+              <a:spcAft>
+                <a:spcPts val="500"/>
+              </a:spcAft>
+            </a:pPr>
+            <a:r>
+              <a:rPr sz="1000" b="1">
+                <a:solidFill>
+                  <a:srgbClr val="E8654E"/>
+                </a:solidFill>
+                <a:latin typeface="Microsoft JhengHei"/>
+                <a:ea typeface="Microsoft JhengHei"/>
+                <a:cs typeface="Microsoft JhengHei"/>
+              </a:rPr>
+              <a:t>·  各期指標各自答對</a:t>
+            </a:r>
+            <a:r>
+              <a:rPr sz="1200">
+                <a:solidFill>
+                  <a:srgbClr val="434343"/>
+                </a:solidFill>
+                <a:latin typeface="Microsoft JhengHei"/>
+                <a:ea typeface="Microsoft JhengHei"/>
+                <a:cs typeface="Microsoft JhengHei"/>
+              </a:rPr>
+              <a:t/>
+            </a:r>
+          </a:p>
+          <a:p>
+            <a:pPr>
+              <a:lnSpc>
+                <a:spcPct val="110000"/>
+              </a:lnSpc>
+              <a:spcAft>
+                <a:spcPts val="500"/>
+              </a:spcAft>
+            </a:pPr>
+            <a:r>
+              <a:rPr sz="1000" b="1">
+                <a:solidFill>
+                  <a:srgbClr val="E8654E"/>
+                </a:solidFill>
+                <a:latin typeface="Microsoft JhengHei"/>
+                <a:ea typeface="Microsoft JhengHei"/>
+                <a:cs typeface="Microsoft JhengHei"/>
+              </a:rPr>
+              <a:t>·  單位涵蓋率 86%→97%</a:t>
+            </a:r>
+            <a:r>
+              <a:rPr sz="1200">
+                <a:solidFill>
+                  <a:srgbClr val="434343"/>
+                </a:solidFill>
+                <a:latin typeface="Microsoft JhengHei"/>
+                <a:ea typeface="Microsoft JhengHei"/>
+                <a:cs typeface="Microsoft JhengHei"/>
+              </a:rPr>
+              <a:t/>
+            </a:r>
+          </a:p>
+        </p:txBody>
+      </p:sp>
+      <p:sp>
+        <p:nvSpPr>
+          <p:cNvPr id="25" name="TextBox 24"/>
+          <p:cNvSpPr txBox="1"/>
+          <p:nvPr/>
+        </p:nvSpPr>
+        <p:spPr>
+          <a:xfrm>
+            <a:off x="640080" y="5029200"/>
+            <a:ext cx="10972800" cy="914400"/>
+          </a:xfrm>
+          <a:prstGeom prst="rect">
+            <a:avLst/>
+          </a:prstGeom>
+          <a:noFill/>
+        </p:spPr>
+        <p:txBody>
+          <a:bodyPr wrap="square" anchor="t" lIns="0" rIns="0" tIns="0" bIns="0">
+            <a:spAutoFit/>
+          </a:bodyPr>
+          <a:lstStyle/>
+          <a:p>
+            <a:pPr algn="l">
+              <a:lnSpc>
+                <a:spcPct val="130000"/>
+              </a:lnSpc>
+              <a:spcBef>
+                <a:spcPts val="0"/>
+              </a:spcBef>
+              <a:spcAft>
+                <a:spcPts val="400"/>
+              </a:spcAft>
+            </a:pPr>
+            <a:r>
+              <a:rPr sz="1500" b="1">
+                <a:solidFill>
+                  <a:srgbClr val="E8654E"/>
+                </a:solidFill>
+                <a:latin typeface="Microsoft JhengHei"/>
+                <a:ea typeface="Microsoft JhengHei"/>
+                <a:cs typeface="Microsoft JhengHei"/>
+              </a:rPr>
+              <a:t>重建後圖譜 1,186 節點／2,352 關連。同一指標不同期各自正確，檢索不再跨期誤配——這是 RAG 答案品質的根本前提。</a:t>
+            </a:r>
+            <a:r>
+              <a:rPr sz="1500" b="0">
+                <a:solidFill>
+                  <a:srgbClr val="434343"/>
+                </a:solidFill>
+                <a:latin typeface="Microsoft JhengHei"/>
+                <a:ea typeface="Microsoft JhengHei"/>
+                <a:cs typeface="Microsoft JhengHei"/>
+              </a:rPr>
+              <a:t/>
+            </a:r>
+          </a:p>
+        </p:txBody>
+      </p:sp>
+      <p:sp>
+        <p:nvSpPr>
+          <p:cNvPr id="26" name="TextBox 25"/>
           <p:cNvSpPr txBox="1"/>
           <p:nvPr/>
         </p:nvSpPr>
@@ -9723,7 +10406,7 @@
                 <a:ea typeface="Microsoft JhengHei"/>
                 <a:cs typeface="Microsoft JhengHei"/>
               </a:rPr>
-              <a:t>第一次諮詢重點 ③ · 平台操作與介面構想</a:t>
+              <a:t>第一次諮詢重點 ② · 系統技術架構</a:t>
             </a:r>
           </a:p>
         </p:txBody>
@@ -9770,7 +10453,7 @@
                 <a:ea typeface="Microsoft JhengHei"/>
                 <a:cs typeface="Microsoft JhengHei"/>
               </a:rPr>
-              <a:t>平台操作與介面構想</a:t>
+              <a:t>系統技術架構 — 語意知識網</a:t>
             </a:r>
           </a:p>
         </p:txBody>
@@ -9817,259 +10500,21 @@
                 <a:ea typeface="Microsoft JhengHei"/>
                 <a:cs typeface="Microsoft JhengHei"/>
               </a:rPr>
-              <a:t>EAP 平台使用 ＋ 我們的網頁介面，兩層並呈</a:t>
-            </a:r>
-          </a:p>
-        </p:txBody>
-      </p:sp>
-      <p:sp>
-        <p:nvSpPr>
-          <p:cNvPr id="10" name="TextBox 9"/>
-          <p:cNvSpPr txBox="1"/>
-          <p:nvPr/>
-        </p:nvSpPr>
-        <p:spPr>
-          <a:xfrm>
-            <a:off x="640080" y="2148840"/>
-            <a:ext cx="5029200" cy="3291840"/>
-          </a:xfrm>
-          <a:prstGeom prst="rect">
-            <a:avLst/>
-          </a:prstGeom>
-          <a:noFill/>
-        </p:spPr>
-        <p:txBody>
-          <a:bodyPr wrap="square" lIns="0" rIns="0" tIns="0" bIns="0">
-            <a:spAutoFit/>
-          </a:bodyPr>
-          <a:lstStyle/>
-          <a:p>
-            <a:pPr>
-              <a:lnSpc>
-                <a:spcPct val="112000"/>
-              </a:lnSpc>
-              <a:spcAft>
-                <a:spcPts val="1300"/>
-              </a:spcAft>
-            </a:pPr>
-            <a:r>
-              <a:rPr sz="1300" b="1">
-                <a:solidFill>
-                  <a:srgbClr val="E8654E"/>
-                </a:solidFill>
-                <a:latin typeface="Microsoft JhengHei"/>
-                <a:ea typeface="Microsoft JhengHei"/>
-                <a:cs typeface="Microsoft JhengHei"/>
-              </a:rPr>
-              <a:t>●  </a:t>
-            </a:r>
-            <a:r>
-              <a:rPr sz="1500" b="1">
-                <a:solidFill>
-                  <a:srgbClr val="1E3A5F"/>
-                </a:solidFill>
-                <a:latin typeface="Microsoft JhengHei"/>
-                <a:ea typeface="Microsoft JhengHei"/>
-                <a:cs typeface="Microsoft JhengHei"/>
-              </a:rPr>
-              <a:t>EAP 平台　</a:t>
-            </a:r>
-            <a:r>
-              <a:rPr sz="1500">
-                <a:solidFill>
-                  <a:srgbClr val="434343"/>
-                </a:solidFill>
-                <a:latin typeface="Microsoft JhengHei"/>
-                <a:ea typeface="Microsoft JhengHei"/>
-                <a:cs typeface="Microsoft JhengHei"/>
-              </a:rPr>
-              <a:t>後台匯入資料、建立 Hybrid RAG 對話</a:t>
-            </a:r>
-          </a:p>
-          <a:p>
-            <a:pPr>
-              <a:lnSpc>
-                <a:spcPct val="112000"/>
-              </a:lnSpc>
-              <a:spcAft>
-                <a:spcPts val="1300"/>
-              </a:spcAft>
-            </a:pPr>
-            <a:r>
-              <a:rPr sz="1300" b="1">
-                <a:solidFill>
-                  <a:srgbClr val="E8654E"/>
-                </a:solidFill>
-                <a:latin typeface="Microsoft JhengHei"/>
-                <a:ea typeface="Microsoft JhengHei"/>
-                <a:cs typeface="Microsoft JhengHei"/>
-              </a:rPr>
-              <a:t>●  </a:t>
-            </a:r>
-            <a:r>
-              <a:rPr sz="1500" b="1">
-                <a:solidFill>
-                  <a:srgbClr val="1E3A5F"/>
-                </a:solidFill>
-                <a:latin typeface="Microsoft JhengHei"/>
-                <a:ea typeface="Microsoft JhengHei"/>
-                <a:cs typeface="Microsoft JhengHei"/>
-              </a:rPr>
-              <a:t>網頁介面　</a:t>
-            </a:r>
-            <a:r>
-              <a:rPr sz="1500">
-                <a:solidFill>
-                  <a:srgbClr val="434343"/>
-                </a:solidFill>
-                <a:latin typeface="Microsoft JhengHei"/>
-                <a:ea typeface="Microsoft JhengHei"/>
-                <a:cs typeface="Microsoft JhengHei"/>
-              </a:rPr>
-              <a:t>呼叫 EAP Chat API，包成好用的財報工具</a:t>
-            </a:r>
-          </a:p>
-          <a:p>
-            <a:pPr>
-              <a:lnSpc>
-                <a:spcPct val="112000"/>
-              </a:lnSpc>
-              <a:spcAft>
-                <a:spcPts val="1300"/>
-              </a:spcAft>
-            </a:pPr>
-            <a:r>
-              <a:rPr sz="1300" b="1">
-                <a:solidFill>
-                  <a:srgbClr val="E8654E"/>
-                </a:solidFill>
-                <a:latin typeface="Microsoft JhengHei"/>
-                <a:ea typeface="Microsoft JhengHei"/>
-                <a:cs typeface="Microsoft JhengHei"/>
-              </a:rPr>
-              <a:t>●  </a:t>
-            </a:r>
-            <a:r>
-              <a:rPr sz="1500" b="1">
-                <a:solidFill>
-                  <a:srgbClr val="1E3A5F"/>
-                </a:solidFill>
-                <a:latin typeface="Microsoft JhengHei"/>
-                <a:ea typeface="Microsoft JhengHei"/>
-                <a:cs typeface="Microsoft JhengHei"/>
-              </a:rPr>
-              <a:t>四大功能　</a:t>
-            </a:r>
-            <a:r>
-              <a:rPr sz="1500">
-                <a:solidFill>
-                  <a:srgbClr val="434343"/>
-                </a:solidFill>
-                <a:latin typeface="Microsoft JhengHei"/>
-                <a:ea typeface="Microsoft JhengHei"/>
-                <a:cs typeface="Microsoft JhengHei"/>
-              </a:rPr>
-              <a:t>儀表板／跨機構／問答報告／資料來源</a:t>
-            </a:r>
-          </a:p>
-          <a:p>
-            <a:pPr>
-              <a:lnSpc>
-                <a:spcPct val="112000"/>
-              </a:lnSpc>
-              <a:spcAft>
-                <a:spcPts val="1300"/>
-              </a:spcAft>
-            </a:pPr>
-            <a:r>
-              <a:rPr sz="1300" b="1">
-                <a:solidFill>
-                  <a:srgbClr val="E8654E"/>
-                </a:solidFill>
-                <a:latin typeface="Microsoft JhengHei"/>
-                <a:ea typeface="Microsoft JhengHei"/>
-                <a:cs typeface="Microsoft JhengHei"/>
-              </a:rPr>
-              <a:t>●  </a:t>
-            </a:r>
-            <a:r>
-              <a:rPr sz="1500" b="1">
-                <a:solidFill>
-                  <a:srgbClr val="1E3A5F"/>
-                </a:solidFill>
-                <a:latin typeface="Microsoft JhengHei"/>
-                <a:ea typeface="Microsoft JhengHei"/>
-                <a:cs typeface="Microsoft JhengHei"/>
-              </a:rPr>
-              <a:t>一鍵切換　</a:t>
-            </a:r>
-            <a:r>
-              <a:rPr sz="1500">
-                <a:solidFill>
-                  <a:srgbClr val="434343"/>
-                </a:solidFill>
-                <a:latin typeface="Microsoft JhengHei"/>
-                <a:ea typeface="Microsoft JhengHei"/>
-                <a:cs typeface="Microsoft JhengHei"/>
-              </a:rPr>
-              <a:t>EAP 平台回答（主）↔ Gemini（輔）</a:t>
-            </a:r>
-          </a:p>
-          <a:p>
-            <a:pPr>
-              <a:lnSpc>
-                <a:spcPct val="112000"/>
-              </a:lnSpc>
-              <a:spcAft>
-                <a:spcPts val="1300"/>
-              </a:spcAft>
-            </a:pPr>
-            <a:r>
-              <a:rPr sz="1300" b="1">
-                <a:solidFill>
-                  <a:srgbClr val="E8654E"/>
-                </a:solidFill>
-                <a:latin typeface="Microsoft JhengHei"/>
-                <a:ea typeface="Microsoft JhengHei"/>
-                <a:cs typeface="Microsoft JhengHei"/>
-              </a:rPr>
-              <a:t>●  </a:t>
-            </a:r>
-            <a:r>
-              <a:rPr sz="1500" b="1">
-                <a:solidFill>
-                  <a:srgbClr val="1E3A5F"/>
-                </a:solidFill>
-                <a:latin typeface="Microsoft JhengHei"/>
-                <a:ea typeface="Microsoft JhengHei"/>
-                <a:cs typeface="Microsoft JhengHei"/>
-              </a:rPr>
-              <a:t>誠實標示　</a:t>
-            </a:r>
-            <a:r>
-              <a:rPr sz="1500">
-                <a:solidFill>
-                  <a:srgbClr val="434343"/>
-                </a:solidFill>
-                <a:latin typeface="Microsoft JhengHei"/>
-                <a:ea typeface="Microsoft JhengHei"/>
-                <a:cs typeface="Microsoft JhengHei"/>
-              </a:rPr>
-              <a:t>圖表註明來源，數字附驗證</a:t>
-            </a:r>
-          </a:p>
-        </p:txBody>
-      </p:sp>
-      <p:sp>
-        <p:nvSpPr>
-          <p:cNvPr id="11" name="Rounded Rectangle 10"/>
+              <a:t>Semantic Knowledge Network：Graph（精準）＋ Vector（語意）雙軌</a:t>
+            </a:r>
+          </a:p>
+        </p:txBody>
+      </p:sp>
+      <p:sp>
+        <p:nvSpPr>
+          <p:cNvPr id="10" name="Rounded Rectangle 9"/>
           <p:cNvSpPr/>
           <p:nvPr/>
         </p:nvSpPr>
         <p:spPr>
           <a:xfrm>
-            <a:off x="5989320" y="2057400"/>
-            <a:ext cx="5577840" cy="3749039"/>
+            <a:off x="640080" y="2194560"/>
+            <a:ext cx="1737360" cy="1371600"/>
           </a:xfrm>
           <a:prstGeom prst="roundRect">
             <a:avLst>
@@ -10077,9 +10522,128 @@
             </a:avLst>
           </a:prstGeom>
           <a:solidFill>
-            <a:srgbClr val="FFFFFF"/>
+            <a:srgbClr val="FDECE8"/>
           </a:solidFill>
-          <a:ln w="15240">
+          <a:ln w="12700">
+            <a:solidFill>
+              <a:srgbClr val="E8654E"/>
+            </a:solidFill>
+          </a:ln>
+          <a:effectLst/>
+        </p:spPr>
+        <p:style>
+          <a:lnRef idx="1">
+            <a:schemeClr val="accent1"/>
+          </a:lnRef>
+          <a:fillRef idx="3">
+            <a:schemeClr val="accent1"/>
+          </a:fillRef>
+          <a:effectRef idx="2">
+            <a:schemeClr val="accent1"/>
+          </a:effectRef>
+          <a:fontRef idx="minor">
+            <a:schemeClr val="lt1"/>
+          </a:fontRef>
+        </p:style>
+        <p:txBody>
+          <a:bodyPr rtlCol="0" anchor="ctr"/>
+          <a:lstStyle/>
+          <a:p>
+            <a:pPr algn="ctr"/>
+          </a:p>
+        </p:txBody>
+      </p:sp>
+      <p:sp>
+        <p:nvSpPr>
+          <p:cNvPr id="11" name="TextBox 10"/>
+          <p:cNvSpPr txBox="1"/>
+          <p:nvPr/>
+        </p:nvSpPr>
+        <p:spPr>
+          <a:xfrm>
+            <a:off x="640080" y="2514600"/>
+            <a:ext cx="1737360" cy="731520"/>
+          </a:xfrm>
+          <a:prstGeom prst="rect">
+            <a:avLst/>
+          </a:prstGeom>
+          <a:noFill/>
+        </p:spPr>
+        <p:txBody>
+          <a:bodyPr wrap="square" anchor="t" lIns="0" rIns="0" tIns="0" bIns="0">
+            <a:spAutoFit/>
+          </a:bodyPr>
+          <a:lstStyle/>
+          <a:p>
+            <a:pPr algn="ctr">
+              <a:lnSpc>
+                <a:spcPct val="100000"/>
+              </a:lnSpc>
+              <a:spcBef>
+                <a:spcPts val="0"/>
+              </a:spcBef>
+              <a:spcAft>
+                <a:spcPts val="200"/>
+              </a:spcAft>
+            </a:pPr>
+            <a:r>
+              <a:rPr sz="1500" b="1">
+                <a:solidFill>
+                  <a:srgbClr val="1E3A5F"/>
+                </a:solidFill>
+                <a:latin typeface="Microsoft JhengHei"/>
+                <a:ea typeface="Microsoft JhengHei"/>
+                <a:cs typeface="Microsoft JhengHei"/>
+              </a:rPr>
+              <a:t>核心資料</a:t>
+            </a:r>
+          </a:p>
+          <a:p>
+            <a:pPr algn="ctr">
+              <a:lnSpc>
+                <a:spcPct val="100000"/>
+              </a:lnSpc>
+              <a:spcBef>
+                <a:spcPts val="0"/>
+              </a:spcBef>
+              <a:spcAft>
+                <a:spcPts val="200"/>
+              </a:spcAft>
+            </a:pPr>
+            <a:r>
+              <a:rPr sz="1200" b="0">
+                <a:solidFill>
+                  <a:srgbClr val="767C87"/>
+                </a:solidFill>
+                <a:latin typeface="Microsoft JhengHei"/>
+                <a:ea typeface="Microsoft JhengHei"/>
+                <a:cs typeface="Microsoft JhengHei"/>
+              </a:rPr>
+              <a:t>Hybrid Data</a:t>
+            </a:r>
+          </a:p>
+        </p:txBody>
+      </p:sp>
+      <p:sp>
+        <p:nvSpPr>
+          <p:cNvPr id="12" name="Rounded Rectangle 11"/>
+          <p:cNvSpPr/>
+          <p:nvPr/>
+        </p:nvSpPr>
+        <p:spPr>
+          <a:xfrm>
+            <a:off x="640080" y="4069079"/>
+            <a:ext cx="1737360" cy="1371600"/>
+          </a:xfrm>
+          <a:prstGeom prst="roundRect">
+            <a:avLst>
+              <a:gd name="adj" fmla="val 8000"/>
+            </a:avLst>
+          </a:prstGeom>
+          <a:solidFill>
+            <a:srgbClr val="F6F8FB"/>
+          </a:solidFill>
+          <a:ln w="12700">
             <a:solidFill>
               <a:srgbClr val="D8DEE6"/>
             </a:solidFill>
@@ -10110,17 +10674,90 @@
       </p:sp>
       <p:sp>
         <p:nvSpPr>
-          <p:cNvPr id="12" name="Rectangle 11"/>
+          <p:cNvPr id="13" name="TextBox 12"/>
+          <p:cNvSpPr txBox="1"/>
+          <p:nvPr/>
+        </p:nvSpPr>
+        <p:spPr>
+          <a:xfrm>
+            <a:off x="640080" y="4389120"/>
+            <a:ext cx="1737360" cy="731520"/>
+          </a:xfrm>
+          <a:prstGeom prst="rect">
+            <a:avLst/>
+          </a:prstGeom>
+          <a:noFill/>
+        </p:spPr>
+        <p:txBody>
+          <a:bodyPr wrap="square" anchor="t" lIns="0" rIns="0" tIns="0" bIns="0">
+            <a:spAutoFit/>
+          </a:bodyPr>
+          <a:lstStyle/>
+          <a:p>
+            <a:pPr algn="ctr">
+              <a:lnSpc>
+                <a:spcPct val="100000"/>
+              </a:lnSpc>
+              <a:spcBef>
+                <a:spcPts val="0"/>
+              </a:spcBef>
+              <a:spcAft>
+                <a:spcPts val="200"/>
+              </a:spcAft>
+            </a:pPr>
+            <a:r>
+              <a:rPr sz="1500" b="1">
+                <a:solidFill>
+                  <a:srgbClr val="1E3A5F"/>
+                </a:solidFill>
+                <a:latin typeface="Microsoft JhengHei"/>
+                <a:ea typeface="Microsoft JhengHei"/>
+                <a:cs typeface="Microsoft JhengHei"/>
+              </a:rPr>
+              <a:t>使用情境</a:t>
+            </a:r>
+          </a:p>
+          <a:p>
+            <a:pPr algn="ctr">
+              <a:lnSpc>
+                <a:spcPct val="100000"/>
+              </a:lnSpc>
+              <a:spcBef>
+                <a:spcPts val="0"/>
+              </a:spcBef>
+              <a:spcAft>
+                <a:spcPts val="200"/>
+              </a:spcAft>
+            </a:pPr>
+            <a:r>
+              <a:rPr sz="1200" b="0">
+                <a:solidFill>
+                  <a:srgbClr val="767C87"/>
+                </a:solidFill>
+                <a:latin typeface="Microsoft JhengHei"/>
+                <a:ea typeface="Microsoft JhengHei"/>
+                <a:cs typeface="Microsoft JhengHei"/>
+              </a:rPr>
+              <a:t>Use Case</a:t>
+            </a:r>
+          </a:p>
+        </p:txBody>
+      </p:sp>
+      <p:sp>
+        <p:nvSpPr>
+          <p:cNvPr id="14" name="Rounded Rectangle 13"/>
           <p:cNvSpPr/>
           <p:nvPr/>
         </p:nvSpPr>
         <p:spPr>
           <a:xfrm>
-            <a:off x="5989320" y="2057400"/>
-            <a:ext cx="5577840" cy="457200"/>
-          </a:xfrm>
-          <a:prstGeom prst="rect">
-            <a:avLst/>
+            <a:off x="2743200" y="2103120"/>
+            <a:ext cx="4160520" cy="1371600"/>
+          </a:xfrm>
+          <a:prstGeom prst="roundRect">
+            <a:avLst>
+              <a:gd name="adj" fmla="val 8000"/>
+            </a:avLst>
           </a:prstGeom>
           <a:solidFill>
             <a:srgbClr val="1E3A5F"/>
@@ -10154,20 +10791,93 @@
       </p:sp>
       <p:sp>
         <p:nvSpPr>
-          <p:cNvPr id="13" name="Oval 12"/>
+          <p:cNvPr id="15" name="TextBox 14"/>
+          <p:cNvSpPr txBox="1"/>
+          <p:nvPr/>
+        </p:nvSpPr>
+        <p:spPr>
+          <a:xfrm>
+            <a:off x="2743200" y="2286000"/>
+            <a:ext cx="4160520" cy="1005840"/>
+          </a:xfrm>
+          <a:prstGeom prst="rect">
+            <a:avLst/>
+          </a:prstGeom>
+          <a:noFill/>
+        </p:spPr>
+        <p:txBody>
+          <a:bodyPr wrap="square" anchor="ctr" lIns="0" rIns="0" tIns="0" bIns="0">
+            <a:spAutoFit/>
+          </a:bodyPr>
+          <a:lstStyle/>
+          <a:p>
+            <a:pPr algn="ctr">
+              <a:lnSpc>
+                <a:spcPct val="100000"/>
+              </a:lnSpc>
+              <a:spcBef>
+                <a:spcPts val="0"/>
+              </a:spcBef>
+              <a:spcAft>
+                <a:spcPts val="300"/>
+              </a:spcAft>
+            </a:pPr>
+            <a:r>
+              <a:rPr sz="1500" b="1">
+                <a:solidFill>
+                  <a:srgbClr val="FFFFFF"/>
+                </a:solidFill>
+                <a:latin typeface="Microsoft JhengHei"/>
+                <a:ea typeface="Microsoft JhengHei"/>
+                <a:cs typeface="Microsoft JhengHei"/>
+              </a:rPr>
+              <a:t>Graph Data（GraphRAG）</a:t>
+            </a:r>
+          </a:p>
+          <a:p>
+            <a:pPr algn="ctr">
+              <a:lnSpc>
+                <a:spcPct val="100000"/>
+              </a:lnSpc>
+              <a:spcBef>
+                <a:spcPts val="0"/>
+              </a:spcBef>
+              <a:spcAft>
+                <a:spcPts val="300"/>
+              </a:spcAft>
+            </a:pPr>
+            <a:r>
+              <a:rPr sz="1200" b="0">
+                <a:solidFill>
+                  <a:srgbClr val="E8EDF4"/>
+                </a:solidFill>
+                <a:latin typeface="Microsoft JhengHei"/>
+                <a:ea typeface="Microsoft JhengHei"/>
+                <a:cs typeface="Microsoft JhengHei"/>
+              </a:rPr>
+              <a:t>指標關聯圖：公司→期間→指標→數值</a:t>
+            </a:r>
+          </a:p>
+        </p:txBody>
+      </p:sp>
+      <p:sp>
+        <p:nvSpPr>
+          <p:cNvPr id="16" name="Rounded Rectangle 15"/>
           <p:cNvSpPr/>
           <p:nvPr/>
         </p:nvSpPr>
         <p:spPr>
           <a:xfrm>
-            <a:off x="6190488" y="2212848"/>
-            <a:ext cx="146304" cy="146304"/>
-          </a:xfrm>
-          <a:prstGeom prst="ellipse">
-            <a:avLst/>
+            <a:off x="7223760" y="2103120"/>
+            <a:ext cx="4343400" cy="1371600"/>
+          </a:xfrm>
+          <a:prstGeom prst="roundRect">
+            <a:avLst>
+              <a:gd name="adj" fmla="val 8000"/>
+            </a:avLst>
           </a:prstGeom>
           <a:solidFill>
-            <a:srgbClr val="E8654E"/>
+            <a:srgbClr val="6B4E9E"/>
           </a:solidFill>
           <a:ln>
             <a:noFill/>
@@ -10198,20 +10908,663 @@
       </p:sp>
       <p:sp>
         <p:nvSpPr>
-          <p:cNvPr id="14" name="Oval 13"/>
+          <p:cNvPr id="17" name="TextBox 16"/>
+          <p:cNvSpPr txBox="1"/>
+          <p:nvPr/>
+        </p:nvSpPr>
+        <p:spPr>
+          <a:xfrm>
+            <a:off x="7223760" y="2286000"/>
+            <a:ext cx="4343400" cy="1005840"/>
+          </a:xfrm>
+          <a:prstGeom prst="rect">
+            <a:avLst/>
+          </a:prstGeom>
+          <a:noFill/>
+        </p:spPr>
+        <p:txBody>
+          <a:bodyPr wrap="square" anchor="ctr" lIns="0" rIns="0" tIns="0" bIns="0">
+            <a:spAutoFit/>
+          </a:bodyPr>
+          <a:lstStyle/>
+          <a:p>
+            <a:pPr algn="ctr">
+              <a:lnSpc>
+                <a:spcPct val="100000"/>
+              </a:lnSpc>
+              <a:spcBef>
+                <a:spcPts val="0"/>
+              </a:spcBef>
+              <a:spcAft>
+                <a:spcPts val="300"/>
+              </a:spcAft>
+            </a:pPr>
+            <a:r>
+              <a:rPr sz="1500" b="1">
+                <a:solidFill>
+                  <a:srgbClr val="FFFFFF"/>
+                </a:solidFill>
+                <a:latin typeface="Microsoft JhengHei"/>
+                <a:ea typeface="Microsoft JhengHei"/>
+                <a:cs typeface="Microsoft JhengHei"/>
+              </a:rPr>
+              <a:t>Vector Data（VectorRAG）</a:t>
+            </a:r>
+          </a:p>
+          <a:p>
+            <a:pPr algn="ctr">
+              <a:lnSpc>
+                <a:spcPct val="100000"/>
+              </a:lnSpc>
+              <a:spcBef>
+                <a:spcPts val="0"/>
+              </a:spcBef>
+              <a:spcAft>
+                <a:spcPts val="300"/>
+              </a:spcAft>
+            </a:pPr>
+            <a:r>
+              <a:rPr sz="1200" b="0">
+                <a:solidFill>
+                  <a:srgbClr val="E8EDF4"/>
+                </a:solidFill>
+                <a:latin typeface="Microsoft JhengHei"/>
+                <a:ea typeface="Microsoft JhengHei"/>
+                <a:cs typeface="Microsoft JhengHei"/>
+              </a:rPr>
+              <a:t>法說會逐字稿：切段後語意索引</a:t>
+            </a:r>
+          </a:p>
+        </p:txBody>
+      </p:sp>
+      <p:sp>
+        <p:nvSpPr>
+          <p:cNvPr id="18" name="Rounded Rectangle 17"/>
           <p:cNvSpPr/>
           <p:nvPr/>
         </p:nvSpPr>
         <p:spPr>
           <a:xfrm>
-            <a:off x="6446520" y="2212848"/>
-            <a:ext cx="146304" cy="146304"/>
-          </a:xfrm>
-          <a:prstGeom prst="ellipse">
-            <a:avLst/>
+            <a:off x="2743200" y="3657600"/>
+            <a:ext cx="1280160" cy="640080"/>
+          </a:xfrm>
+          <a:prstGeom prst="roundRect">
+            <a:avLst>
+              <a:gd name="adj" fmla="val 8000"/>
+            </a:avLst>
           </a:prstGeom>
           <a:solidFill>
-            <a:srgbClr val="D9A441"/>
+            <a:srgbClr val="F6F8FB"/>
+          </a:solidFill>
+          <a:ln w="12700">
+            <a:solidFill>
+              <a:srgbClr val="D8DEE6"/>
+            </a:solidFill>
+          </a:ln>
+          <a:effectLst/>
+        </p:spPr>
+        <p:style>
+          <a:lnRef idx="1">
+            <a:schemeClr val="accent1"/>
+          </a:lnRef>
+          <a:fillRef idx="3">
+            <a:schemeClr val="accent1"/>
+          </a:fillRef>
+          <a:effectRef idx="2">
+            <a:schemeClr val="accent1"/>
+          </a:effectRef>
+          <a:fontRef idx="minor">
+            <a:schemeClr val="lt1"/>
+          </a:fontRef>
+        </p:style>
+        <p:txBody>
+          <a:bodyPr rtlCol="0" anchor="ctr"/>
+          <a:lstStyle/>
+          <a:p>
+            <a:pPr algn="ctr"/>
+          </a:p>
+        </p:txBody>
+      </p:sp>
+      <p:sp>
+        <p:nvSpPr>
+          <p:cNvPr id="19" name="TextBox 18"/>
+          <p:cNvSpPr txBox="1"/>
+          <p:nvPr/>
+        </p:nvSpPr>
+        <p:spPr>
+          <a:xfrm>
+            <a:off x="2743200" y="3657600"/>
+            <a:ext cx="1280160" cy="640080"/>
+          </a:xfrm>
+          <a:prstGeom prst="rect">
+            <a:avLst/>
+          </a:prstGeom>
+          <a:noFill/>
+        </p:spPr>
+        <p:txBody>
+          <a:bodyPr wrap="square" anchor="ctr" lIns="0" rIns="0" tIns="0" bIns="0">
+            <a:spAutoFit/>
+          </a:bodyPr>
+          <a:lstStyle/>
+          <a:p>
+            <a:pPr algn="ctr">
+              <a:lnSpc>
+                <a:spcPct val="100000"/>
+              </a:lnSpc>
+              <a:spcBef>
+                <a:spcPts val="0"/>
+              </a:spcBef>
+              <a:spcAft>
+                <a:spcPts val="400"/>
+              </a:spcAft>
+            </a:pPr>
+            <a:r>
+              <a:rPr sz="1100" b="1">
+                <a:solidFill>
+                  <a:srgbClr val="1E3A5F"/>
+                </a:solidFill>
+                <a:latin typeface="Microsoft JhengHei"/>
+                <a:ea typeface="Microsoft JhengHei"/>
+                <a:cs typeface="Microsoft JhengHei"/>
+              </a:rPr>
+              <a:t>個案指標表</a:t>
+            </a:r>
+          </a:p>
+        </p:txBody>
+      </p:sp>
+      <p:sp>
+        <p:nvSpPr>
+          <p:cNvPr id="20" name="Rounded Rectangle 19"/>
+          <p:cNvSpPr/>
+          <p:nvPr/>
+        </p:nvSpPr>
+        <p:spPr>
+          <a:xfrm>
+            <a:off x="4160520" y="3657600"/>
+            <a:ext cx="1280160" cy="640080"/>
+          </a:xfrm>
+          <a:prstGeom prst="roundRect">
+            <a:avLst>
+              <a:gd name="adj" fmla="val 8000"/>
+            </a:avLst>
+          </a:prstGeom>
+          <a:solidFill>
+            <a:srgbClr val="F6F8FB"/>
+          </a:solidFill>
+          <a:ln w="12700">
+            <a:solidFill>
+              <a:srgbClr val="D8DEE6"/>
+            </a:solidFill>
+          </a:ln>
+          <a:effectLst/>
+        </p:spPr>
+        <p:style>
+          <a:lnRef idx="1">
+            <a:schemeClr val="accent1"/>
+          </a:lnRef>
+          <a:fillRef idx="3">
+            <a:schemeClr val="accent1"/>
+          </a:fillRef>
+          <a:effectRef idx="2">
+            <a:schemeClr val="accent1"/>
+          </a:effectRef>
+          <a:fontRef idx="minor">
+            <a:schemeClr val="lt1"/>
+          </a:fontRef>
+        </p:style>
+        <p:txBody>
+          <a:bodyPr rtlCol="0" anchor="ctr"/>
+          <a:lstStyle/>
+          <a:p>
+            <a:pPr algn="ctr"/>
+          </a:p>
+        </p:txBody>
+      </p:sp>
+      <p:sp>
+        <p:nvSpPr>
+          <p:cNvPr id="21" name="TextBox 20"/>
+          <p:cNvSpPr txBox="1"/>
+          <p:nvPr/>
+        </p:nvSpPr>
+        <p:spPr>
+          <a:xfrm>
+            <a:off x="4160520" y="3657600"/>
+            <a:ext cx="1280160" cy="640080"/>
+          </a:xfrm>
+          <a:prstGeom prst="rect">
+            <a:avLst/>
+          </a:prstGeom>
+          <a:noFill/>
+        </p:spPr>
+        <p:txBody>
+          <a:bodyPr wrap="square" anchor="ctr" lIns="0" rIns="0" tIns="0" bIns="0">
+            <a:spAutoFit/>
+          </a:bodyPr>
+          <a:lstStyle/>
+          <a:p>
+            <a:pPr algn="ctr">
+              <a:lnSpc>
+                <a:spcPct val="100000"/>
+              </a:lnSpc>
+              <a:spcBef>
+                <a:spcPts val="0"/>
+              </a:spcBef>
+              <a:spcAft>
+                <a:spcPts val="400"/>
+              </a:spcAft>
+            </a:pPr>
+            <a:r>
+              <a:rPr sz="1100" b="1">
+                <a:solidFill>
+                  <a:srgbClr val="1E3A5F"/>
+                </a:solidFill>
+                <a:latin typeface="Microsoft JhengHei"/>
+                <a:ea typeface="Microsoft JhengHei"/>
+                <a:cs typeface="Microsoft JhengHei"/>
+              </a:rPr>
+              <a:t>期間節點</a:t>
+            </a:r>
+          </a:p>
+        </p:txBody>
+      </p:sp>
+      <p:sp>
+        <p:nvSpPr>
+          <p:cNvPr id="22" name="Rounded Rectangle 21"/>
+          <p:cNvSpPr/>
+          <p:nvPr/>
+        </p:nvSpPr>
+        <p:spPr>
+          <a:xfrm>
+            <a:off x="5577840" y="3657600"/>
+            <a:ext cx="1280160" cy="640080"/>
+          </a:xfrm>
+          <a:prstGeom prst="roundRect">
+            <a:avLst>
+              <a:gd name="adj" fmla="val 8000"/>
+            </a:avLst>
+          </a:prstGeom>
+          <a:solidFill>
+            <a:srgbClr val="F6F8FB"/>
+          </a:solidFill>
+          <a:ln w="12700">
+            <a:solidFill>
+              <a:srgbClr val="D8DEE6"/>
+            </a:solidFill>
+          </a:ln>
+          <a:effectLst/>
+        </p:spPr>
+        <p:style>
+          <a:lnRef idx="1">
+            <a:schemeClr val="accent1"/>
+          </a:lnRef>
+          <a:fillRef idx="3">
+            <a:schemeClr val="accent1"/>
+          </a:fillRef>
+          <a:effectRef idx="2">
+            <a:schemeClr val="accent1"/>
+          </a:effectRef>
+          <a:fontRef idx="minor">
+            <a:schemeClr val="lt1"/>
+          </a:fontRef>
+        </p:style>
+        <p:txBody>
+          <a:bodyPr rtlCol="0" anchor="ctr"/>
+          <a:lstStyle/>
+          <a:p>
+            <a:pPr algn="ctr"/>
+          </a:p>
+        </p:txBody>
+      </p:sp>
+      <p:sp>
+        <p:nvSpPr>
+          <p:cNvPr id="23" name="TextBox 22"/>
+          <p:cNvSpPr txBox="1"/>
+          <p:nvPr/>
+        </p:nvSpPr>
+        <p:spPr>
+          <a:xfrm>
+            <a:off x="5577840" y="3657600"/>
+            <a:ext cx="1280160" cy="640080"/>
+          </a:xfrm>
+          <a:prstGeom prst="rect">
+            <a:avLst/>
+          </a:prstGeom>
+          <a:noFill/>
+        </p:spPr>
+        <p:txBody>
+          <a:bodyPr wrap="square" anchor="ctr" lIns="0" rIns="0" tIns="0" bIns="0">
+            <a:spAutoFit/>
+          </a:bodyPr>
+          <a:lstStyle/>
+          <a:p>
+            <a:pPr algn="ctr">
+              <a:lnSpc>
+                <a:spcPct val="100000"/>
+              </a:lnSpc>
+              <a:spcBef>
+                <a:spcPts val="0"/>
+              </a:spcBef>
+              <a:spcAft>
+                <a:spcPts val="400"/>
+              </a:spcAft>
+            </a:pPr>
+            <a:r>
+              <a:rPr sz="1100" b="1">
+                <a:solidFill>
+                  <a:srgbClr val="1E3A5F"/>
+                </a:solidFill>
+                <a:latin typeface="Microsoft JhengHei"/>
+                <a:ea typeface="Microsoft JhengHei"/>
+                <a:cs typeface="Microsoft JhengHei"/>
+              </a:rPr>
+              <a:t>數值屬性</a:t>
+            </a:r>
+          </a:p>
+        </p:txBody>
+      </p:sp>
+      <p:sp>
+        <p:nvSpPr>
+          <p:cNvPr id="24" name="Rounded Rectangle 23"/>
+          <p:cNvSpPr/>
+          <p:nvPr/>
+        </p:nvSpPr>
+        <p:spPr>
+          <a:xfrm>
+            <a:off x="7223760" y="3657600"/>
+            <a:ext cx="1325880" cy="640080"/>
+          </a:xfrm>
+          <a:prstGeom prst="roundRect">
+            <a:avLst>
+              <a:gd name="adj" fmla="val 8000"/>
+            </a:avLst>
+          </a:prstGeom>
+          <a:solidFill>
+            <a:srgbClr val="F6F8FB"/>
+          </a:solidFill>
+          <a:ln w="12700">
+            <a:solidFill>
+              <a:srgbClr val="D8DEE6"/>
+            </a:solidFill>
+          </a:ln>
+          <a:effectLst/>
+        </p:spPr>
+        <p:style>
+          <a:lnRef idx="1">
+            <a:schemeClr val="accent1"/>
+          </a:lnRef>
+          <a:fillRef idx="3">
+            <a:schemeClr val="accent1"/>
+          </a:fillRef>
+          <a:effectRef idx="2">
+            <a:schemeClr val="accent1"/>
+          </a:effectRef>
+          <a:fontRef idx="minor">
+            <a:schemeClr val="lt1"/>
+          </a:fontRef>
+        </p:style>
+        <p:txBody>
+          <a:bodyPr rtlCol="0" anchor="ctr"/>
+          <a:lstStyle/>
+          <a:p>
+            <a:pPr algn="ctr"/>
+          </a:p>
+        </p:txBody>
+      </p:sp>
+      <p:sp>
+        <p:nvSpPr>
+          <p:cNvPr id="25" name="TextBox 24"/>
+          <p:cNvSpPr txBox="1"/>
+          <p:nvPr/>
+        </p:nvSpPr>
+        <p:spPr>
+          <a:xfrm>
+            <a:off x="7223760" y="3657600"/>
+            <a:ext cx="1325880" cy="640080"/>
+          </a:xfrm>
+          <a:prstGeom prst="rect">
+            <a:avLst/>
+          </a:prstGeom>
+          <a:noFill/>
+        </p:spPr>
+        <p:txBody>
+          <a:bodyPr wrap="square" anchor="ctr" lIns="0" rIns="0" tIns="0" bIns="0">
+            <a:spAutoFit/>
+          </a:bodyPr>
+          <a:lstStyle/>
+          <a:p>
+            <a:pPr algn="ctr">
+              <a:lnSpc>
+                <a:spcPct val="100000"/>
+              </a:lnSpc>
+              <a:spcBef>
+                <a:spcPts val="0"/>
+              </a:spcBef>
+              <a:spcAft>
+                <a:spcPts val="400"/>
+              </a:spcAft>
+            </a:pPr>
+            <a:r>
+              <a:rPr sz="1100" b="1">
+                <a:solidFill>
+                  <a:srgbClr val="1E3A5F"/>
+                </a:solidFill>
+                <a:latin typeface="Microsoft JhengHei"/>
+                <a:ea typeface="Microsoft JhengHei"/>
+                <a:cs typeface="Microsoft JhengHei"/>
+              </a:rPr>
+              <a:t>發債計畫</a:t>
+            </a:r>
+          </a:p>
+        </p:txBody>
+      </p:sp>
+      <p:sp>
+        <p:nvSpPr>
+          <p:cNvPr id="26" name="Rounded Rectangle 25"/>
+          <p:cNvSpPr/>
+          <p:nvPr/>
+        </p:nvSpPr>
+        <p:spPr>
+          <a:xfrm>
+            <a:off x="8686800" y="3657600"/>
+            <a:ext cx="1325880" cy="640080"/>
+          </a:xfrm>
+          <a:prstGeom prst="roundRect">
+            <a:avLst>
+              <a:gd name="adj" fmla="val 8000"/>
+            </a:avLst>
+          </a:prstGeom>
+          <a:solidFill>
+            <a:srgbClr val="F6F8FB"/>
+          </a:solidFill>
+          <a:ln w="12700">
+            <a:solidFill>
+              <a:srgbClr val="D8DEE6"/>
+            </a:solidFill>
+          </a:ln>
+          <a:effectLst/>
+        </p:spPr>
+        <p:style>
+          <a:lnRef idx="1">
+            <a:schemeClr val="accent1"/>
+          </a:lnRef>
+          <a:fillRef idx="3">
+            <a:schemeClr val="accent1"/>
+          </a:fillRef>
+          <a:effectRef idx="2">
+            <a:schemeClr val="accent1"/>
+          </a:effectRef>
+          <a:fontRef idx="minor">
+            <a:schemeClr val="lt1"/>
+          </a:fontRef>
+        </p:style>
+        <p:txBody>
+          <a:bodyPr rtlCol="0" anchor="ctr"/>
+          <a:lstStyle/>
+          <a:p>
+            <a:pPr algn="ctr"/>
+          </a:p>
+        </p:txBody>
+      </p:sp>
+      <p:sp>
+        <p:nvSpPr>
+          <p:cNvPr id="27" name="TextBox 26"/>
+          <p:cNvSpPr txBox="1"/>
+          <p:nvPr/>
+        </p:nvSpPr>
+        <p:spPr>
+          <a:xfrm>
+            <a:off x="8686800" y="3657600"/>
+            <a:ext cx="1325880" cy="640080"/>
+          </a:xfrm>
+          <a:prstGeom prst="rect">
+            <a:avLst/>
+          </a:prstGeom>
+          <a:noFill/>
+        </p:spPr>
+        <p:txBody>
+          <a:bodyPr wrap="square" anchor="ctr" lIns="0" rIns="0" tIns="0" bIns="0">
+            <a:spAutoFit/>
+          </a:bodyPr>
+          <a:lstStyle/>
+          <a:p>
+            <a:pPr algn="ctr">
+              <a:lnSpc>
+                <a:spcPct val="100000"/>
+              </a:lnSpc>
+              <a:spcBef>
+                <a:spcPts val="0"/>
+              </a:spcBef>
+              <a:spcAft>
+                <a:spcPts val="400"/>
+              </a:spcAft>
+            </a:pPr>
+            <a:r>
+              <a:rPr sz="1100" b="1">
+                <a:solidFill>
+                  <a:srgbClr val="1E3A5F"/>
+                </a:solidFill>
+                <a:latin typeface="Microsoft JhengHei"/>
+                <a:ea typeface="Microsoft JhengHei"/>
+                <a:cs typeface="Microsoft JhengHei"/>
+              </a:rPr>
+              <a:t>獲利說明</a:t>
+            </a:r>
+          </a:p>
+        </p:txBody>
+      </p:sp>
+      <p:sp>
+        <p:nvSpPr>
+          <p:cNvPr id="28" name="Rounded Rectangle 27"/>
+          <p:cNvSpPr/>
+          <p:nvPr/>
+        </p:nvSpPr>
+        <p:spPr>
+          <a:xfrm>
+            <a:off x="10149840" y="3657600"/>
+            <a:ext cx="1325880" cy="640080"/>
+          </a:xfrm>
+          <a:prstGeom prst="roundRect">
+            <a:avLst>
+              <a:gd name="adj" fmla="val 8000"/>
+            </a:avLst>
+          </a:prstGeom>
+          <a:solidFill>
+            <a:srgbClr val="F6F8FB"/>
+          </a:solidFill>
+          <a:ln w="12700">
+            <a:solidFill>
+              <a:srgbClr val="D8DEE6"/>
+            </a:solidFill>
+          </a:ln>
+          <a:effectLst/>
+        </p:spPr>
+        <p:style>
+          <a:lnRef idx="1">
+            <a:schemeClr val="accent1"/>
+          </a:lnRef>
+          <a:fillRef idx="3">
+            <a:schemeClr val="accent1"/>
+          </a:fillRef>
+          <a:effectRef idx="2">
+            <a:schemeClr val="accent1"/>
+          </a:effectRef>
+          <a:fontRef idx="minor">
+            <a:schemeClr val="lt1"/>
+          </a:fontRef>
+        </p:style>
+        <p:txBody>
+          <a:bodyPr rtlCol="0" anchor="ctr"/>
+          <a:lstStyle/>
+          <a:p>
+            <a:pPr algn="ctr"/>
+          </a:p>
+        </p:txBody>
+      </p:sp>
+      <p:sp>
+        <p:nvSpPr>
+          <p:cNvPr id="29" name="TextBox 28"/>
+          <p:cNvSpPr txBox="1"/>
+          <p:nvPr/>
+        </p:nvSpPr>
+        <p:spPr>
+          <a:xfrm>
+            <a:off x="10149840" y="3657600"/>
+            <a:ext cx="1325880" cy="640080"/>
+          </a:xfrm>
+          <a:prstGeom prst="rect">
+            <a:avLst/>
+          </a:prstGeom>
+          <a:noFill/>
+        </p:spPr>
+        <p:txBody>
+          <a:bodyPr wrap="square" anchor="ctr" lIns="0" rIns="0" tIns="0" bIns="0">
+            <a:spAutoFit/>
+          </a:bodyPr>
+          <a:lstStyle/>
+          <a:p>
+            <a:pPr algn="ctr">
+              <a:lnSpc>
+                <a:spcPct val="100000"/>
+              </a:lnSpc>
+              <a:spcBef>
+                <a:spcPts val="0"/>
+              </a:spcBef>
+              <a:spcAft>
+                <a:spcPts val="400"/>
+              </a:spcAft>
+            </a:pPr>
+            <a:r>
+              <a:rPr sz="1100" b="1">
+                <a:solidFill>
+                  <a:srgbClr val="1E3A5F"/>
+                </a:solidFill>
+                <a:latin typeface="Microsoft JhengHei"/>
+                <a:ea typeface="Microsoft JhengHei"/>
+                <a:cs typeface="Microsoft JhengHei"/>
+              </a:rPr>
+              <a:t>經理人問答</a:t>
+            </a:r>
+          </a:p>
+        </p:txBody>
+      </p:sp>
+      <p:sp>
+        <p:nvSpPr>
+          <p:cNvPr id="30" name="Rounded Rectangle 29"/>
+          <p:cNvSpPr/>
+          <p:nvPr/>
+        </p:nvSpPr>
+        <p:spPr>
+          <a:xfrm>
+            <a:off x="2743200" y="4709160"/>
+            <a:ext cx="2057400" cy="685800"/>
+          </a:xfrm>
+          <a:prstGeom prst="roundRect">
+            <a:avLst>
+              <a:gd name="adj" fmla="val 8000"/>
+            </a:avLst>
+          </a:prstGeom>
+          <a:solidFill>
+            <a:srgbClr val="1E3A5F"/>
           </a:solidFill>
           <a:ln>
             <a:noFill/>
@@ -10242,20 +11595,69 @@
       </p:sp>
       <p:sp>
         <p:nvSpPr>
-          <p:cNvPr id="15" name="Oval 14"/>
+          <p:cNvPr id="31" name="TextBox 30"/>
+          <p:cNvSpPr txBox="1"/>
+          <p:nvPr/>
+        </p:nvSpPr>
+        <p:spPr>
+          <a:xfrm>
+            <a:off x="2743200" y="4709160"/>
+            <a:ext cx="2057400" cy="685800"/>
+          </a:xfrm>
+          <a:prstGeom prst="rect">
+            <a:avLst/>
+          </a:prstGeom>
+          <a:noFill/>
+        </p:spPr>
+        <p:txBody>
+          <a:bodyPr wrap="square" anchor="ctr" lIns="0" rIns="0" tIns="0" bIns="0">
+            <a:spAutoFit/>
+          </a:bodyPr>
+          <a:lstStyle/>
+          <a:p>
+            <a:pPr algn="ctr">
+              <a:lnSpc>
+                <a:spcPct val="100000"/>
+              </a:lnSpc>
+              <a:spcBef>
+                <a:spcPts val="0"/>
+              </a:spcBef>
+              <a:spcAft>
+                <a:spcPts val="400"/>
+              </a:spcAft>
+            </a:pPr>
+            <a:r>
+              <a:rPr sz="1250" b="1">
+                <a:solidFill>
+                  <a:srgbClr val="FFFFFF"/>
+                </a:solidFill>
+                <a:latin typeface="Microsoft JhengHei"/>
+                <a:ea typeface="Microsoft JhengHei"/>
+                <a:cs typeface="Microsoft JhengHei"/>
+              </a:rPr>
+              <a:t>自動審核／分析</a:t>
+            </a:r>
+          </a:p>
+        </p:txBody>
+      </p:sp>
+      <p:sp>
+        <p:nvSpPr>
+          <p:cNvPr id="32" name="Rounded Rectangle 31"/>
           <p:cNvSpPr/>
           <p:nvPr/>
         </p:nvSpPr>
         <p:spPr>
           <a:xfrm>
-            <a:off x="6702552" y="2212848"/>
-            <a:ext cx="146304" cy="146304"/>
-          </a:xfrm>
-          <a:prstGeom prst="ellipse">
-            <a:avLst/>
+            <a:off x="4983480" y="4709160"/>
+            <a:ext cx="2057400" cy="685800"/>
+          </a:xfrm>
+          <a:prstGeom prst="roundRect">
+            <a:avLst>
+              <a:gd name="adj" fmla="val 8000"/>
+            </a:avLst>
           </a:prstGeom>
           <a:solidFill>
-            <a:srgbClr val="2E7D46"/>
+            <a:srgbClr val="1E3A5F"/>
           </a:solidFill>
           <a:ln>
             <a:noFill/>
@@ -10286,14 +11688,14 @@
       </p:sp>
       <p:sp>
         <p:nvSpPr>
-          <p:cNvPr id="16" name="TextBox 15"/>
+          <p:cNvPr id="33" name="TextBox 32"/>
           <p:cNvSpPr txBox="1"/>
           <p:nvPr/>
         </p:nvSpPr>
         <p:spPr>
           <a:xfrm>
-            <a:off x="7086600" y="2130552"/>
-            <a:ext cx="4297679" cy="320040"/>
+            <a:off x="4983480" y="4709160"/>
+            <a:ext cx="2057400" cy="685800"/>
           </a:xfrm>
           <a:prstGeom prst="rect">
             <a:avLst/>
@@ -10302,6 +11704,239 @@
         </p:spPr>
         <p:txBody>
           <a:bodyPr wrap="square" anchor="ctr" lIns="0" rIns="0" tIns="0" bIns="0">
+            <a:spAutoFit/>
+          </a:bodyPr>
+          <a:lstStyle/>
+          <a:p>
+            <a:pPr algn="ctr">
+              <a:lnSpc>
+                <a:spcPct val="100000"/>
+              </a:lnSpc>
+              <a:spcBef>
+                <a:spcPts val="0"/>
+              </a:spcBef>
+              <a:spcAft>
+                <a:spcPts val="400"/>
+              </a:spcAft>
+            </a:pPr>
+            <a:r>
+              <a:rPr sz="1250" b="1">
+                <a:solidFill>
+                  <a:srgbClr val="FFFFFF"/>
+                </a:solidFill>
+                <a:latin typeface="Microsoft JhengHei"/>
+                <a:ea typeface="Microsoft JhengHei"/>
+                <a:cs typeface="Microsoft JhengHei"/>
+              </a:rPr>
+              <a:t>跨機構比較</a:t>
+            </a:r>
+          </a:p>
+        </p:txBody>
+      </p:sp>
+      <p:sp>
+        <p:nvSpPr>
+          <p:cNvPr id="34" name="Rounded Rectangle 33"/>
+          <p:cNvSpPr/>
+          <p:nvPr/>
+        </p:nvSpPr>
+        <p:spPr>
+          <a:xfrm>
+            <a:off x="7223760" y="4709160"/>
+            <a:ext cx="2057400" cy="685800"/>
+          </a:xfrm>
+          <a:prstGeom prst="roundRect">
+            <a:avLst>
+              <a:gd name="adj" fmla="val 8000"/>
+            </a:avLst>
+          </a:prstGeom>
+          <a:solidFill>
+            <a:srgbClr val="1E3A5F"/>
+          </a:solidFill>
+          <a:ln>
+            <a:noFill/>
+          </a:ln>
+          <a:effectLst/>
+        </p:spPr>
+        <p:style>
+          <a:lnRef idx="1">
+            <a:schemeClr val="accent1"/>
+          </a:lnRef>
+          <a:fillRef idx="3">
+            <a:schemeClr val="accent1"/>
+          </a:fillRef>
+          <a:effectRef idx="2">
+            <a:schemeClr val="accent1"/>
+          </a:effectRef>
+          <a:fontRef idx="minor">
+            <a:schemeClr val="lt1"/>
+          </a:fontRef>
+        </p:style>
+        <p:txBody>
+          <a:bodyPr rtlCol="0" anchor="ctr"/>
+          <a:lstStyle/>
+          <a:p>
+            <a:pPr algn="ctr"/>
+          </a:p>
+        </p:txBody>
+      </p:sp>
+      <p:sp>
+        <p:nvSpPr>
+          <p:cNvPr id="35" name="TextBox 34"/>
+          <p:cNvSpPr txBox="1"/>
+          <p:nvPr/>
+        </p:nvSpPr>
+        <p:spPr>
+          <a:xfrm>
+            <a:off x="7223760" y="4709160"/>
+            <a:ext cx="2057400" cy="685800"/>
+          </a:xfrm>
+          <a:prstGeom prst="rect">
+            <a:avLst/>
+          </a:prstGeom>
+          <a:noFill/>
+        </p:spPr>
+        <p:txBody>
+          <a:bodyPr wrap="square" anchor="ctr" lIns="0" rIns="0" tIns="0" bIns="0">
+            <a:spAutoFit/>
+          </a:bodyPr>
+          <a:lstStyle/>
+          <a:p>
+            <a:pPr algn="ctr">
+              <a:lnSpc>
+                <a:spcPct val="100000"/>
+              </a:lnSpc>
+              <a:spcBef>
+                <a:spcPts val="0"/>
+              </a:spcBef>
+              <a:spcAft>
+                <a:spcPts val="400"/>
+              </a:spcAft>
+            </a:pPr>
+            <a:r>
+              <a:rPr sz="1250" b="1">
+                <a:solidFill>
+                  <a:srgbClr val="FFFFFF"/>
+                </a:solidFill>
+                <a:latin typeface="Microsoft JhengHei"/>
+                <a:ea typeface="Microsoft JhengHei"/>
+                <a:cs typeface="Microsoft JhengHei"/>
+              </a:rPr>
+              <a:t>法規／問答諮詢</a:t>
+            </a:r>
+          </a:p>
+        </p:txBody>
+      </p:sp>
+      <p:sp>
+        <p:nvSpPr>
+          <p:cNvPr id="36" name="Rounded Rectangle 35"/>
+          <p:cNvSpPr/>
+          <p:nvPr/>
+        </p:nvSpPr>
+        <p:spPr>
+          <a:xfrm>
+            <a:off x="9464040" y="4709160"/>
+            <a:ext cx="2057400" cy="685800"/>
+          </a:xfrm>
+          <a:prstGeom prst="roundRect">
+            <a:avLst>
+              <a:gd name="adj" fmla="val 8000"/>
+            </a:avLst>
+          </a:prstGeom>
+          <a:solidFill>
+            <a:srgbClr val="1E3A5F"/>
+          </a:solidFill>
+          <a:ln>
+            <a:noFill/>
+          </a:ln>
+          <a:effectLst/>
+        </p:spPr>
+        <p:style>
+          <a:lnRef idx="1">
+            <a:schemeClr val="accent1"/>
+          </a:lnRef>
+          <a:fillRef idx="3">
+            <a:schemeClr val="accent1"/>
+          </a:fillRef>
+          <a:effectRef idx="2">
+            <a:schemeClr val="accent1"/>
+          </a:effectRef>
+          <a:fontRef idx="minor">
+            <a:schemeClr val="lt1"/>
+          </a:fontRef>
+        </p:style>
+        <p:txBody>
+          <a:bodyPr rtlCol="0" anchor="ctr"/>
+          <a:lstStyle/>
+          <a:p>
+            <a:pPr algn="ctr"/>
+          </a:p>
+        </p:txBody>
+      </p:sp>
+      <p:sp>
+        <p:nvSpPr>
+          <p:cNvPr id="37" name="TextBox 36"/>
+          <p:cNvSpPr txBox="1"/>
+          <p:nvPr/>
+        </p:nvSpPr>
+        <p:spPr>
+          <a:xfrm>
+            <a:off x="9464040" y="4709160"/>
+            <a:ext cx="2057400" cy="685800"/>
+          </a:xfrm>
+          <a:prstGeom prst="rect">
+            <a:avLst/>
+          </a:prstGeom>
+          <a:noFill/>
+        </p:spPr>
+        <p:txBody>
+          <a:bodyPr wrap="square" anchor="ctr" lIns="0" rIns="0" tIns="0" bIns="0">
+            <a:spAutoFit/>
+          </a:bodyPr>
+          <a:lstStyle/>
+          <a:p>
+            <a:pPr algn="ctr">
+              <a:lnSpc>
+                <a:spcPct val="100000"/>
+              </a:lnSpc>
+              <a:spcBef>
+                <a:spcPts val="0"/>
+              </a:spcBef>
+              <a:spcAft>
+                <a:spcPts val="400"/>
+              </a:spcAft>
+            </a:pPr>
+            <a:r>
+              <a:rPr sz="1250" b="1">
+                <a:solidFill>
+                  <a:srgbClr val="FFFFFF"/>
+                </a:solidFill>
+                <a:latin typeface="Microsoft JhengHei"/>
+                <a:ea typeface="Microsoft JhengHei"/>
+                <a:cs typeface="Microsoft JhengHei"/>
+              </a:rPr>
+              <a:t>一鍵報告</a:t>
+            </a:r>
+          </a:p>
+        </p:txBody>
+      </p:sp>
+      <p:sp>
+        <p:nvSpPr>
+          <p:cNvPr id="38" name="TextBox 37"/>
+          <p:cNvSpPr txBox="1"/>
+          <p:nvPr/>
+        </p:nvSpPr>
+        <p:spPr>
+          <a:xfrm>
+            <a:off x="2743200" y="5623560"/>
+            <a:ext cx="8778240" cy="457200"/>
+          </a:xfrm>
+          <a:prstGeom prst="rect">
+            <a:avLst/>
+          </a:prstGeom>
+          <a:noFill/>
+        </p:spPr>
+        <p:txBody>
+          <a:bodyPr wrap="square" anchor="t" lIns="0" rIns="0" tIns="0" bIns="0">
             <a:spAutoFit/>
           </a:bodyPr>
           <a:lstStyle/>
@@ -10318,78 +11953,7 @@
               </a:spcAft>
             </a:pPr>
             <a:r>
-              <a:rPr sz="1150" b="1">
-                <a:solidFill>
-                  <a:srgbClr val="FFFFFF"/>
-                </a:solidFill>
-                <a:latin typeface="Microsoft JhengHei"/>
-                <a:ea typeface="Microsoft JhengHei"/>
-                <a:cs typeface="Microsoft JhengHei"/>
-              </a:rPr>
-              <a:t>有你蒸好 · 財報分析</a:t>
-            </a:r>
-          </a:p>
-        </p:txBody>
-      </p:sp>
-      <p:sp>
-        <p:nvSpPr>
-          <p:cNvPr id="17" name="TextBox 16"/>
-          <p:cNvSpPr txBox="1"/>
-          <p:nvPr/>
-        </p:nvSpPr>
-        <p:spPr>
-          <a:xfrm>
-            <a:off x="6355080" y="3429000"/>
-            <a:ext cx="4846320" cy="1097280"/>
-          </a:xfrm>
-          <a:prstGeom prst="rect">
-            <a:avLst/>
-          </a:prstGeom>
-          <a:noFill/>
-        </p:spPr>
-        <p:txBody>
-          <a:bodyPr wrap="square" anchor="ctr" lIns="0" rIns="0" tIns="0" bIns="0">
-            <a:spAutoFit/>
-          </a:bodyPr>
-          <a:lstStyle/>
-          <a:p>
-            <a:pPr algn="ctr">
-              <a:lnSpc>
-                <a:spcPct val="100000"/>
-              </a:lnSpc>
-              <a:spcBef>
-                <a:spcPts val="0"/>
-              </a:spcBef>
-              <a:spcAft>
-                <a:spcPts val="800"/>
-              </a:spcAft>
-            </a:pPr>
-            <a:r>
-              <a:rPr sz="1500" b="1">
-                <a:solidFill>
-                  <a:srgbClr val="1E3A5F"/>
-                </a:solidFill>
-                <a:latin typeface="Microsoft JhengHei"/>
-                <a:ea typeface="Microsoft JhengHei"/>
-                <a:cs typeface="Microsoft JhengHei"/>
-              </a:rPr>
-              <a:t>EAP 平台 ＋ 網頁介面</a:t>
-            </a:r>
-          </a:p>
-          <a:p>
-            <a:pPr algn="ctr">
-              <a:lnSpc>
-                <a:spcPct val="100000"/>
-              </a:lnSpc>
-              <a:spcBef>
-                <a:spcPts val="0"/>
-              </a:spcBef>
-              <a:spcAft>
-                <a:spcPts val="800"/>
-              </a:spcAft>
-            </a:pPr>
-            <a:r>
-              <a:rPr sz="1200" b="0">
+              <a:rPr sz="1250" b="0">
                 <a:solidFill>
                   <a:srgbClr val="767C87"/>
                 </a:solidFill>
@@ -10397,14 +11961,14 @@
                 <a:ea typeface="Microsoft JhengHei"/>
                 <a:cs typeface="Microsoft JhengHei"/>
               </a:rPr>
-              <a:t>（貼 EAP 平台／網頁截圖，或現場 Demo）</a:t>
-            </a:r>
-          </a:p>
-        </p:txBody>
-      </p:sp>
-      <p:sp>
-        <p:nvSpPr>
-          <p:cNvPr id="18" name="TextBox 17"/>
+              <a:t>透過 公司ID／期間／指標名 跨表串接，Graph 提供可驗證數值、Vector 提供有出處的說法。</a:t>
+            </a:r>
+          </a:p>
+        </p:txBody>
+      </p:sp>
+      <p:sp>
+        <p:nvSpPr>
+          <p:cNvPr id="39" name="TextBox 38"/>
           <p:cNvSpPr txBox="1"/>
           <p:nvPr/>
         </p:nvSpPr>
@@ -10737,7 +12301,7 @@
                 <a:ea typeface="Microsoft JhengHei"/>
                 <a:cs typeface="Microsoft JhengHei"/>
               </a:rPr>
-              <a:t>第一次諮詢重點 ③ · QA 測試</a:t>
+              <a:t>第一次諮詢重點 ③ · 平台操作與介面構想</a:t>
             </a:r>
           </a:p>
         </p:txBody>
@@ -10784,7 +12348,7 @@
                 <a:ea typeface="Microsoft JhengHei"/>
                 <a:cs typeface="Microsoft JhengHei"/>
               </a:rPr>
-              <a:t>QA 測試：檢索＋計算驗證</a:t>
+              <a:t>平台操作與介面構想</a:t>
             </a:r>
           </a:p>
         </p:txBody>
@@ -10831,21 +12395,259 @@
                 <a:ea typeface="Microsoft JhengHei"/>
                 <a:cs typeface="Microsoft JhengHei"/>
               </a:rPr>
-              <a:t>冷數據 → 溫決策：數字可驗證、說法有出處</a:t>
-            </a:r>
-          </a:p>
-        </p:txBody>
-      </p:sp>
-      <p:sp>
-        <p:nvSpPr>
-          <p:cNvPr id="10" name="Rounded Rectangle 9"/>
+              <a:t>EAP 平台使用 ＋ 我們的網頁介面，兩層並呈</a:t>
+            </a:r>
+          </a:p>
+        </p:txBody>
+      </p:sp>
+      <p:sp>
+        <p:nvSpPr>
+          <p:cNvPr id="10" name="TextBox 9"/>
+          <p:cNvSpPr txBox="1"/>
+          <p:nvPr/>
+        </p:nvSpPr>
+        <p:spPr>
+          <a:xfrm>
+            <a:off x="640080" y="2148840"/>
+            <a:ext cx="5029200" cy="3291840"/>
+          </a:xfrm>
+          <a:prstGeom prst="rect">
+            <a:avLst/>
+          </a:prstGeom>
+          <a:noFill/>
+        </p:spPr>
+        <p:txBody>
+          <a:bodyPr wrap="square" lIns="0" rIns="0" tIns="0" bIns="0">
+            <a:spAutoFit/>
+          </a:bodyPr>
+          <a:lstStyle/>
+          <a:p>
+            <a:pPr>
+              <a:lnSpc>
+                <a:spcPct val="112000"/>
+              </a:lnSpc>
+              <a:spcAft>
+                <a:spcPts val="1300"/>
+              </a:spcAft>
+            </a:pPr>
+            <a:r>
+              <a:rPr sz="1300" b="1">
+                <a:solidFill>
+                  <a:srgbClr val="E8654E"/>
+                </a:solidFill>
+                <a:latin typeface="Microsoft JhengHei"/>
+                <a:ea typeface="Microsoft JhengHei"/>
+                <a:cs typeface="Microsoft JhengHei"/>
+              </a:rPr>
+              <a:t>●  </a:t>
+            </a:r>
+            <a:r>
+              <a:rPr sz="1500" b="1">
+                <a:solidFill>
+                  <a:srgbClr val="1E3A5F"/>
+                </a:solidFill>
+                <a:latin typeface="Microsoft JhengHei"/>
+                <a:ea typeface="Microsoft JhengHei"/>
+                <a:cs typeface="Microsoft JhengHei"/>
+              </a:rPr>
+              <a:t>EAP 平台　</a:t>
+            </a:r>
+            <a:r>
+              <a:rPr sz="1500">
+                <a:solidFill>
+                  <a:srgbClr val="434343"/>
+                </a:solidFill>
+                <a:latin typeface="Microsoft JhengHei"/>
+                <a:ea typeface="Microsoft JhengHei"/>
+                <a:cs typeface="Microsoft JhengHei"/>
+              </a:rPr>
+              <a:t>後台匯入資料、建立 Hybrid RAG 對話</a:t>
+            </a:r>
+          </a:p>
+          <a:p>
+            <a:pPr>
+              <a:lnSpc>
+                <a:spcPct val="112000"/>
+              </a:lnSpc>
+              <a:spcAft>
+                <a:spcPts val="1300"/>
+              </a:spcAft>
+            </a:pPr>
+            <a:r>
+              <a:rPr sz="1300" b="1">
+                <a:solidFill>
+                  <a:srgbClr val="E8654E"/>
+                </a:solidFill>
+                <a:latin typeface="Microsoft JhengHei"/>
+                <a:ea typeface="Microsoft JhengHei"/>
+                <a:cs typeface="Microsoft JhengHei"/>
+              </a:rPr>
+              <a:t>●  </a:t>
+            </a:r>
+            <a:r>
+              <a:rPr sz="1500" b="1">
+                <a:solidFill>
+                  <a:srgbClr val="1E3A5F"/>
+                </a:solidFill>
+                <a:latin typeface="Microsoft JhengHei"/>
+                <a:ea typeface="Microsoft JhengHei"/>
+                <a:cs typeface="Microsoft JhengHei"/>
+              </a:rPr>
+              <a:t>知識圖譜重建　</a:t>
+            </a:r>
+            <a:r>
+              <a:rPr sz="1500">
+                <a:solidFill>
+                  <a:srgbClr val="434343"/>
+                </a:solidFill>
+                <a:latin typeface="Microsoft JhengHei"/>
+                <a:ea typeface="Microsoft JhengHei"/>
+                <a:cs typeface="Microsoft JhengHei"/>
+              </a:rPr>
+              <a:t>每指標唯一節點，修好跨期間誤答</a:t>
+            </a:r>
+          </a:p>
+          <a:p>
+            <a:pPr>
+              <a:lnSpc>
+                <a:spcPct val="112000"/>
+              </a:lnSpc>
+              <a:spcAft>
+                <a:spcPts val="1300"/>
+              </a:spcAft>
+            </a:pPr>
+            <a:r>
+              <a:rPr sz="1300" b="1">
+                <a:solidFill>
+                  <a:srgbClr val="E8654E"/>
+                </a:solidFill>
+                <a:latin typeface="Microsoft JhengHei"/>
+                <a:ea typeface="Microsoft JhengHei"/>
+                <a:cs typeface="Microsoft JhengHei"/>
+              </a:rPr>
+              <a:t>●  </a:t>
+            </a:r>
+            <a:r>
+              <a:rPr sz="1500" b="1">
+                <a:solidFill>
+                  <a:srgbClr val="1E3A5F"/>
+                </a:solidFill>
+                <a:latin typeface="Microsoft JhengHei"/>
+                <a:ea typeface="Microsoft JhengHei"/>
+                <a:cs typeface="Microsoft JhengHei"/>
+              </a:rPr>
+              <a:t>網頁介面　</a:t>
+            </a:r>
+            <a:r>
+              <a:rPr sz="1500">
+                <a:solidFill>
+                  <a:srgbClr val="434343"/>
+                </a:solidFill>
+                <a:latin typeface="Microsoft JhengHei"/>
+                <a:ea typeface="Microsoft JhengHei"/>
+                <a:cs typeface="Microsoft JhengHei"/>
+              </a:rPr>
+              <a:t>呼叫 EAP Chat API，包成財報工具</a:t>
+            </a:r>
+          </a:p>
+          <a:p>
+            <a:pPr>
+              <a:lnSpc>
+                <a:spcPct val="112000"/>
+              </a:lnSpc>
+              <a:spcAft>
+                <a:spcPts val="1300"/>
+              </a:spcAft>
+            </a:pPr>
+            <a:r>
+              <a:rPr sz="1300" b="1">
+                <a:solidFill>
+                  <a:srgbClr val="E8654E"/>
+                </a:solidFill>
+                <a:latin typeface="Microsoft JhengHei"/>
+                <a:ea typeface="Microsoft JhengHei"/>
+                <a:cs typeface="Microsoft JhengHei"/>
+              </a:rPr>
+              <a:t>●  </a:t>
+            </a:r>
+            <a:r>
+              <a:rPr sz="1500" b="1">
+                <a:solidFill>
+                  <a:srgbClr val="1E3A5F"/>
+                </a:solidFill>
+                <a:latin typeface="Microsoft JhengHei"/>
+                <a:ea typeface="Microsoft JhengHei"/>
+                <a:cs typeface="Microsoft JhengHei"/>
+              </a:rPr>
+              <a:t>交叉驗證　</a:t>
+            </a:r>
+            <a:r>
+              <a:rPr sz="1500">
+                <a:solidFill>
+                  <a:srgbClr val="434343"/>
+                </a:solidFill>
+                <a:latin typeface="Microsoft JhengHei"/>
+                <a:ea typeface="Microsoft JhengHei"/>
+                <a:cs typeface="Microsoft JhengHei"/>
+              </a:rPr>
+              <a:t>EAP 與本地不符自動標紅、一鍵取正解</a:t>
+            </a:r>
+          </a:p>
+          <a:p>
+            <a:pPr>
+              <a:lnSpc>
+                <a:spcPct val="112000"/>
+              </a:lnSpc>
+              <a:spcAft>
+                <a:spcPts val="1300"/>
+              </a:spcAft>
+            </a:pPr>
+            <a:r>
+              <a:rPr sz="1300" b="1">
+                <a:solidFill>
+                  <a:srgbClr val="E8654E"/>
+                </a:solidFill>
+                <a:latin typeface="Microsoft JhengHei"/>
+                <a:ea typeface="Microsoft JhengHei"/>
+                <a:cs typeface="Microsoft JhengHei"/>
+              </a:rPr>
+              <a:t>●  </a:t>
+            </a:r>
+            <a:r>
+              <a:rPr sz="1500" b="1">
+                <a:solidFill>
+                  <a:srgbClr val="1E3A5F"/>
+                </a:solidFill>
+                <a:latin typeface="Microsoft JhengHei"/>
+                <a:ea typeface="Microsoft JhengHei"/>
+                <a:cs typeface="Microsoft JhengHei"/>
+              </a:rPr>
+              <a:t>一鍵切換　</a:t>
+            </a:r>
+            <a:r>
+              <a:rPr sz="1500">
+                <a:solidFill>
+                  <a:srgbClr val="434343"/>
+                </a:solidFill>
+                <a:latin typeface="Microsoft JhengHei"/>
+                <a:ea typeface="Microsoft JhengHei"/>
+                <a:cs typeface="Microsoft JhengHei"/>
+              </a:rPr>
+              <a:t>EAP 平台回答（主）↔ Gemini（輔）</a:t>
+            </a:r>
+          </a:p>
+        </p:txBody>
+      </p:sp>
+      <p:sp>
+        <p:nvSpPr>
+          <p:cNvPr id="11" name="Rounded Rectangle 10"/>
           <p:cNvSpPr/>
           <p:nvPr/>
         </p:nvSpPr>
         <p:spPr>
           <a:xfrm>
-            <a:off x="640080" y="2103120"/>
-            <a:ext cx="5394960" cy="3657600"/>
+            <a:off x="5989320" y="2057400"/>
+            <a:ext cx="5577840" cy="3749039"/>
           </a:xfrm>
           <a:prstGeom prst="roundRect">
             <a:avLst>
@@ -10853,9 +12655,9 @@
             </a:avLst>
           </a:prstGeom>
           <a:solidFill>
-            <a:srgbClr val="F6F8FB"/>
+            <a:srgbClr val="FFFFFF"/>
           </a:solidFill>
-          <a:ln w="12700">
+          <a:ln w="15240">
             <a:solidFill>
               <a:srgbClr val="D8DEE6"/>
             </a:solidFill>
@@ -10886,14 +12688,190 @@
       </p:sp>
       <p:sp>
         <p:nvSpPr>
-          <p:cNvPr id="11" name="TextBox 10"/>
+          <p:cNvPr id="12" name="Rectangle 11"/>
+          <p:cNvSpPr/>
+          <p:nvPr/>
+        </p:nvSpPr>
+        <p:spPr>
+          <a:xfrm>
+            <a:off x="5989320" y="2057400"/>
+            <a:ext cx="5577840" cy="457200"/>
+          </a:xfrm>
+          <a:prstGeom prst="rect">
+            <a:avLst/>
+          </a:prstGeom>
+          <a:solidFill>
+            <a:srgbClr val="1E3A5F"/>
+          </a:solidFill>
+          <a:ln>
+            <a:noFill/>
+          </a:ln>
+          <a:effectLst/>
+        </p:spPr>
+        <p:style>
+          <a:lnRef idx="1">
+            <a:schemeClr val="accent1"/>
+          </a:lnRef>
+          <a:fillRef idx="3">
+            <a:schemeClr val="accent1"/>
+          </a:fillRef>
+          <a:effectRef idx="2">
+            <a:schemeClr val="accent1"/>
+          </a:effectRef>
+          <a:fontRef idx="minor">
+            <a:schemeClr val="lt1"/>
+          </a:fontRef>
+        </p:style>
+        <p:txBody>
+          <a:bodyPr rtlCol="0" anchor="ctr"/>
+          <a:lstStyle/>
+          <a:p>
+            <a:pPr algn="ctr"/>
+          </a:p>
+        </p:txBody>
+      </p:sp>
+      <p:sp>
+        <p:nvSpPr>
+          <p:cNvPr id="13" name="Oval 12"/>
+          <p:cNvSpPr/>
+          <p:nvPr/>
+        </p:nvSpPr>
+        <p:spPr>
+          <a:xfrm>
+            <a:off x="6190488" y="2212848"/>
+            <a:ext cx="146304" cy="146304"/>
+          </a:xfrm>
+          <a:prstGeom prst="ellipse">
+            <a:avLst/>
+          </a:prstGeom>
+          <a:solidFill>
+            <a:srgbClr val="E8654E"/>
+          </a:solidFill>
+          <a:ln>
+            <a:noFill/>
+          </a:ln>
+          <a:effectLst/>
+        </p:spPr>
+        <p:style>
+          <a:lnRef idx="1">
+            <a:schemeClr val="accent1"/>
+          </a:lnRef>
+          <a:fillRef idx="3">
+            <a:schemeClr val="accent1"/>
+          </a:fillRef>
+          <a:effectRef idx="2">
+            <a:schemeClr val="accent1"/>
+          </a:effectRef>
+          <a:fontRef idx="minor">
+            <a:schemeClr val="lt1"/>
+          </a:fontRef>
+        </p:style>
+        <p:txBody>
+          <a:bodyPr rtlCol="0" anchor="ctr"/>
+          <a:lstStyle/>
+          <a:p>
+            <a:pPr algn="ctr"/>
+          </a:p>
+        </p:txBody>
+      </p:sp>
+      <p:sp>
+        <p:nvSpPr>
+          <p:cNvPr id="14" name="Oval 13"/>
+          <p:cNvSpPr/>
+          <p:nvPr/>
+        </p:nvSpPr>
+        <p:spPr>
+          <a:xfrm>
+            <a:off x="6446520" y="2212848"/>
+            <a:ext cx="146304" cy="146304"/>
+          </a:xfrm>
+          <a:prstGeom prst="ellipse">
+            <a:avLst/>
+          </a:prstGeom>
+          <a:solidFill>
+            <a:srgbClr val="D9A441"/>
+          </a:solidFill>
+          <a:ln>
+            <a:noFill/>
+          </a:ln>
+          <a:effectLst/>
+        </p:spPr>
+        <p:style>
+          <a:lnRef idx="1">
+            <a:schemeClr val="accent1"/>
+          </a:lnRef>
+          <a:fillRef idx="3">
+            <a:schemeClr val="accent1"/>
+          </a:fillRef>
+          <a:effectRef idx="2">
+            <a:schemeClr val="accent1"/>
+          </a:effectRef>
+          <a:fontRef idx="minor">
+            <a:schemeClr val="lt1"/>
+          </a:fontRef>
+        </p:style>
+        <p:txBody>
+          <a:bodyPr rtlCol="0" anchor="ctr"/>
+          <a:lstStyle/>
+          <a:p>
+            <a:pPr algn="ctr"/>
+          </a:p>
+        </p:txBody>
+      </p:sp>
+      <p:sp>
+        <p:nvSpPr>
+          <p:cNvPr id="15" name="Oval 14"/>
+          <p:cNvSpPr/>
+          <p:nvPr/>
+        </p:nvSpPr>
+        <p:spPr>
+          <a:xfrm>
+            <a:off x="6702552" y="2212848"/>
+            <a:ext cx="146304" cy="146304"/>
+          </a:xfrm>
+          <a:prstGeom prst="ellipse">
+            <a:avLst/>
+          </a:prstGeom>
+          <a:solidFill>
+            <a:srgbClr val="2E7D46"/>
+          </a:solidFill>
+          <a:ln>
+            <a:noFill/>
+          </a:ln>
+          <a:effectLst/>
+        </p:spPr>
+        <p:style>
+          <a:lnRef idx="1">
+            <a:schemeClr val="accent1"/>
+          </a:lnRef>
+          <a:fillRef idx="3">
+            <a:schemeClr val="accent1"/>
+          </a:fillRef>
+          <a:effectRef idx="2">
+            <a:schemeClr val="accent1"/>
+          </a:effectRef>
+          <a:fontRef idx="minor">
+            <a:schemeClr val="lt1"/>
+          </a:fontRef>
+        </p:style>
+        <p:txBody>
+          <a:bodyPr rtlCol="0" anchor="ctr"/>
+          <a:lstStyle/>
+          <a:p>
+            <a:pPr algn="ctr"/>
+          </a:p>
+        </p:txBody>
+      </p:sp>
+      <p:sp>
+        <p:nvSpPr>
+          <p:cNvPr id="16" name="TextBox 15"/>
           <p:cNvSpPr txBox="1"/>
           <p:nvPr/>
         </p:nvSpPr>
         <p:spPr>
           <a:xfrm>
-            <a:off x="914400" y="2331720"/>
-            <a:ext cx="4846320" cy="457200"/>
+            <a:off x="7086600" y="2130552"/>
+            <a:ext cx="4297679" cy="320040"/>
           </a:xfrm>
           <a:prstGeom prst="rect">
             <a:avLst/>
@@ -10901,7 +12879,7 @@
           <a:noFill/>
         </p:spPr>
         <p:txBody>
-          <a:bodyPr wrap="square" anchor="t" lIns="0" rIns="0" tIns="0" bIns="0">
+          <a:bodyPr wrap="square" anchor="ctr" lIns="0" rIns="0" tIns="0" bIns="0">
             <a:spAutoFit/>
           </a:bodyPr>
           <a:lstStyle/>
@@ -10918,75 +12896,29 @@
               </a:spcAft>
             </a:pPr>
             <a:r>
-              <a:rPr sz="1600" b="1">
-                <a:solidFill>
-                  <a:srgbClr val="1E3A5F"/>
-                </a:solidFill>
-                <a:latin typeface="Microsoft JhengHei"/>
-                <a:ea typeface="Microsoft JhengHei"/>
-                <a:cs typeface="Microsoft JhengHei"/>
-              </a:rPr>
-              <a:t>① 計算驗證（GraphRAG）</a:t>
-            </a:r>
-          </a:p>
-        </p:txBody>
-      </p:sp>
-      <p:sp>
-        <p:nvSpPr>
-          <p:cNvPr id="12" name="Rounded Rectangle 11"/>
-          <p:cNvSpPr/>
-          <p:nvPr/>
-        </p:nvSpPr>
-        <p:spPr>
-          <a:xfrm>
-            <a:off x="914400" y="2834640"/>
-            <a:ext cx="4846320" cy="594360"/>
-          </a:xfrm>
-          <a:prstGeom prst="roundRect">
-            <a:avLst>
-              <a:gd name="adj" fmla="val 8000"/>
-            </a:avLst>
-          </a:prstGeom>
-          <a:solidFill>
-            <a:srgbClr val="1E3A5F"/>
-          </a:solidFill>
-          <a:ln>
-            <a:noFill/>
-          </a:ln>
-          <a:effectLst/>
-        </p:spPr>
-        <p:style>
-          <a:lnRef idx="1">
-            <a:schemeClr val="accent1"/>
-          </a:lnRef>
-          <a:fillRef idx="3">
-            <a:schemeClr val="accent1"/>
-          </a:fillRef>
-          <a:effectRef idx="2">
-            <a:schemeClr val="accent1"/>
-          </a:effectRef>
-          <a:fontRef idx="minor">
-            <a:schemeClr val="lt1"/>
-          </a:fontRef>
-        </p:style>
-        <p:txBody>
-          <a:bodyPr rtlCol="0" anchor="ctr"/>
-          <a:lstStyle/>
-          <a:p>
-            <a:pPr algn="ctr"/>
-          </a:p>
-        </p:txBody>
-      </p:sp>
-      <p:sp>
-        <p:nvSpPr>
-          <p:cNvPr id="13" name="TextBox 12"/>
+              <a:rPr sz="1150" b="1">
+                <a:solidFill>
+                  <a:srgbClr val="FFFFFF"/>
+                </a:solidFill>
+                <a:latin typeface="Microsoft JhengHei"/>
+                <a:ea typeface="Microsoft JhengHei"/>
+                <a:cs typeface="Microsoft JhengHei"/>
+              </a:rPr>
+              <a:t>有你蒸好 · 財報分析</a:t>
+            </a:r>
+          </a:p>
+        </p:txBody>
+      </p:sp>
+      <p:sp>
+        <p:nvSpPr>
+          <p:cNvPr id="17" name="TextBox 16"/>
           <p:cNvSpPr txBox="1"/>
           <p:nvPr/>
         </p:nvSpPr>
         <p:spPr>
           <a:xfrm>
-            <a:off x="1097280" y="2880360"/>
-            <a:ext cx="4480560" cy="457200"/>
+            <a:off x="6355080" y="3429000"/>
+            <a:ext cx="4846320" cy="1097280"/>
           </a:xfrm>
           <a:prstGeom prst="rect">
             <a:avLst/>
@@ -10999,7 +12931,7 @@
           </a:bodyPr>
           <a:lstStyle/>
           <a:p>
-            <a:pPr algn="l">
+            <a:pPr algn="ctr">
               <a:lnSpc>
                 <a:spcPct val="100000"/>
               </a:lnSpc>
@@ -11007,46 +12939,23 @@
                 <a:spcPts val="0"/>
               </a:spcBef>
               <a:spcAft>
-                <a:spcPts val="400"/>
+                <a:spcPts val="800"/>
               </a:spcAft>
             </a:pPr>
             <a:r>
-              <a:rPr sz="1350" b="1">
-                <a:solidFill>
-                  <a:srgbClr val="FFFFFF"/>
-                </a:solidFill>
-                <a:latin typeface="Microsoft JhengHei"/>
-                <a:ea typeface="Microsoft JhengHei"/>
-                <a:cs typeface="Microsoft JhengHei"/>
-              </a:rPr>
-              <a:t>Q：中信金控的 ROE？</a:t>
-            </a:r>
-          </a:p>
-        </p:txBody>
-      </p:sp>
-      <p:sp>
-        <p:nvSpPr>
-          <p:cNvPr id="14" name="TextBox 13"/>
-          <p:cNvSpPr txBox="1"/>
-          <p:nvPr/>
-        </p:nvSpPr>
-        <p:spPr>
-          <a:xfrm>
-            <a:off x="914400" y="3566160"/>
-            <a:ext cx="4846320" cy="548640"/>
-          </a:xfrm>
-          <a:prstGeom prst="rect">
-            <a:avLst/>
-          </a:prstGeom>
-          <a:noFill/>
-        </p:spPr>
-        <p:txBody>
-          <a:bodyPr wrap="square" anchor="t" lIns="0" rIns="0" tIns="0" bIns="0">
-            <a:spAutoFit/>
-          </a:bodyPr>
-          <a:lstStyle/>
-          <a:p>
-            <a:pPr algn="l">
+              <a:rPr sz="1500" b="1">
+                <a:solidFill>
+                  <a:srgbClr val="1E3A5F"/>
+                </a:solidFill>
+                <a:latin typeface="Microsoft JhengHei"/>
+                <a:ea typeface="Microsoft JhengHei"/>
+                <a:cs typeface="Microsoft JhengHei"/>
+              </a:rPr>
+              <a:t>EAP 平台 ＋ 網頁介面</a:t>
+            </a:r>
+          </a:p>
+          <a:p>
+            <a:pPr algn="ctr">
               <a:lnSpc>
                 <a:spcPct val="100000"/>
               </a:lnSpc>
@@ -11054,510 +12963,26 @@
                 <a:spcPts val="0"/>
               </a:spcBef>
               <a:spcAft>
-                <a:spcPts val="400"/>
+                <a:spcPts val="800"/>
               </a:spcAft>
             </a:pPr>
             <a:r>
-              <a:rPr sz="1350" b="0">
-                <a:solidFill>
-                  <a:srgbClr val="434343"/>
-                </a:solidFill>
-                <a:latin typeface="Microsoft JhengHei"/>
-                <a:ea typeface="Microsoft JhengHei"/>
-                <a:cs typeface="Microsoft JhengHei"/>
-              </a:rPr>
-              <a:t>A：股東權益報酬率 = </a:t>
-            </a:r>
-            <a:r>
-              <a:rPr sz="1500" b="1">
-                <a:solidFill>
-                  <a:srgbClr val="1E3A5F"/>
-                </a:solidFill>
-                <a:latin typeface="Microsoft JhengHei"/>
-                <a:ea typeface="Microsoft JhengHei"/>
-                <a:cs typeface="Microsoft JhengHei"/>
-              </a:rPr>
-              <a:t>18.32%</a:t>
-            </a:r>
-          </a:p>
-        </p:txBody>
-      </p:sp>
-      <p:sp>
-        <p:nvSpPr>
-          <p:cNvPr id="15" name="Rounded Rectangle 14"/>
-          <p:cNvSpPr/>
-          <p:nvPr/>
-        </p:nvSpPr>
-        <p:spPr>
-          <a:xfrm>
-            <a:off x="914400" y="4206240"/>
-            <a:ext cx="4846320" cy="1280160"/>
-          </a:xfrm>
-          <a:prstGeom prst="roundRect">
-            <a:avLst>
-              <a:gd name="adj" fmla="val 8000"/>
-            </a:avLst>
-          </a:prstGeom>
-          <a:solidFill>
-            <a:srgbClr val="EAF6EF"/>
-          </a:solidFill>
-          <a:ln w="12700">
-            <a:solidFill>
-              <a:srgbClr val="C6E4D3"/>
-            </a:solidFill>
-          </a:ln>
-          <a:effectLst/>
-        </p:spPr>
-        <p:style>
-          <a:lnRef idx="1">
-            <a:schemeClr val="accent1"/>
-          </a:lnRef>
-          <a:fillRef idx="3">
-            <a:schemeClr val="accent1"/>
-          </a:fillRef>
-          <a:effectRef idx="2">
-            <a:schemeClr val="accent1"/>
-          </a:effectRef>
-          <a:fontRef idx="minor">
-            <a:schemeClr val="lt1"/>
-          </a:fontRef>
-        </p:style>
-        <p:txBody>
-          <a:bodyPr rtlCol="0" anchor="ctr"/>
-          <a:lstStyle/>
-          <a:p>
-            <a:pPr algn="ctr"/>
-          </a:p>
-        </p:txBody>
-      </p:sp>
-      <p:sp>
-        <p:nvSpPr>
-          <p:cNvPr id="16" name="TextBox 15"/>
-          <p:cNvSpPr txBox="1"/>
-          <p:nvPr/>
-        </p:nvSpPr>
-        <p:spPr>
-          <a:xfrm>
-            <a:off x="1097280" y="4389120"/>
-            <a:ext cx="4480560" cy="1005840"/>
-          </a:xfrm>
-          <a:prstGeom prst="rect">
-            <a:avLst/>
-          </a:prstGeom>
-          <a:noFill/>
-        </p:spPr>
-        <p:txBody>
-          <a:bodyPr wrap="square" anchor="t" lIns="0" rIns="0" tIns="0" bIns="0">
-            <a:spAutoFit/>
-          </a:bodyPr>
-          <a:lstStyle/>
-          <a:p>
-            <a:pPr algn="l">
-              <a:lnSpc>
-                <a:spcPct val="115000"/>
-              </a:lnSpc>
-              <a:spcBef>
-                <a:spcPts val="0"/>
-              </a:spcBef>
-              <a:spcAft>
-                <a:spcPts val="300"/>
-              </a:spcAft>
-            </a:pPr>
-            <a:r>
-              <a:rPr sz="1250" b="1">
-                <a:solidFill>
-                  <a:srgbClr val="2E7D46"/>
-                </a:solidFill>
-                <a:latin typeface="Microsoft JhengHei"/>
-                <a:ea typeface="Microsoft JhengHei"/>
-                <a:cs typeface="Microsoft JhengHei"/>
-              </a:rPr>
-              <a:t>✓ 公式驗證：自有資本 ÷ 股東權益，</a:t>
-            </a:r>
-          </a:p>
-          <a:p>
-            <a:pPr algn="l">
-              <a:lnSpc>
-                <a:spcPct val="115000"/>
-              </a:lnSpc>
-              <a:spcBef>
-                <a:spcPts val="0"/>
-              </a:spcBef>
-              <a:spcAft>
-                <a:spcPts val="300"/>
-              </a:spcAft>
-            </a:pPr>
-            <a:r>
-              <a:rPr sz="1250" b="0">
-                <a:solidFill>
-                  <a:srgbClr val="434343"/>
-                </a:solidFill>
-                <a:latin typeface="Microsoft JhengHei"/>
-                <a:ea typeface="Microsoft JhengHei"/>
-                <a:cs typeface="Microsoft JhengHei"/>
-              </a:rPr>
-              <a:t>非 LLM 生成，可信、可稽核。</a:t>
-            </a:r>
-          </a:p>
-        </p:txBody>
-      </p:sp>
-      <p:sp>
-        <p:nvSpPr>
-          <p:cNvPr id="17" name="Rounded Rectangle 16"/>
-          <p:cNvSpPr/>
-          <p:nvPr/>
-        </p:nvSpPr>
-        <p:spPr>
-          <a:xfrm>
-            <a:off x="6172200" y="2103120"/>
-            <a:ext cx="5376672" cy="3657600"/>
-          </a:xfrm>
-          <a:prstGeom prst="roundRect">
-            <a:avLst>
-              <a:gd name="adj" fmla="val 8000"/>
-            </a:avLst>
-          </a:prstGeom>
-          <a:solidFill>
-            <a:srgbClr val="F6F8FB"/>
-          </a:solidFill>
-          <a:ln w="12700">
-            <a:solidFill>
-              <a:srgbClr val="D8DEE6"/>
-            </a:solidFill>
-          </a:ln>
-          <a:effectLst/>
-        </p:spPr>
-        <p:style>
-          <a:lnRef idx="1">
-            <a:schemeClr val="accent1"/>
-          </a:lnRef>
-          <a:fillRef idx="3">
-            <a:schemeClr val="accent1"/>
-          </a:fillRef>
-          <a:effectRef idx="2">
-            <a:schemeClr val="accent1"/>
-          </a:effectRef>
-          <a:fontRef idx="minor">
-            <a:schemeClr val="lt1"/>
-          </a:fontRef>
-        </p:style>
-        <p:txBody>
-          <a:bodyPr rtlCol="0" anchor="ctr"/>
-          <a:lstStyle/>
-          <a:p>
-            <a:pPr algn="ctr"/>
+              <a:rPr sz="1200" b="0">
+                <a:solidFill>
+                  <a:srgbClr val="767C87"/>
+                </a:solidFill>
+                <a:latin typeface="Microsoft JhengHei"/>
+                <a:ea typeface="Microsoft JhengHei"/>
+                <a:cs typeface="Microsoft JhengHei"/>
+              </a:rPr>
+              <a:t>（貼 EAP 平台／網頁截圖，或現場 Demo）</a:t>
+            </a:r>
           </a:p>
         </p:txBody>
       </p:sp>
       <p:sp>
         <p:nvSpPr>
           <p:cNvPr id="18" name="TextBox 17"/>
-          <p:cNvSpPr txBox="1"/>
-          <p:nvPr/>
-        </p:nvSpPr>
-        <p:spPr>
-          <a:xfrm>
-            <a:off x="6446520" y="2331720"/>
-            <a:ext cx="4846320" cy="457200"/>
-          </a:xfrm>
-          <a:prstGeom prst="rect">
-            <a:avLst/>
-          </a:prstGeom>
-          <a:noFill/>
-        </p:spPr>
-        <p:txBody>
-          <a:bodyPr wrap="square" anchor="t" lIns="0" rIns="0" tIns="0" bIns="0">
-            <a:spAutoFit/>
-          </a:bodyPr>
-          <a:lstStyle/>
-          <a:p>
-            <a:pPr algn="l">
-              <a:lnSpc>
-                <a:spcPct val="100000"/>
-              </a:lnSpc>
-              <a:spcBef>
-                <a:spcPts val="0"/>
-              </a:spcBef>
-              <a:spcAft>
-                <a:spcPts val="400"/>
-              </a:spcAft>
-            </a:pPr>
-            <a:r>
-              <a:rPr sz="1600" b="1">
-                <a:solidFill>
-                  <a:srgbClr val="E8654E"/>
-                </a:solidFill>
-                <a:latin typeface="Microsoft JhengHei"/>
-                <a:ea typeface="Microsoft JhengHei"/>
-                <a:cs typeface="Microsoft JhengHei"/>
-              </a:rPr>
-              <a:t>② 檢索驗證（EAP／VectorRAG）</a:t>
-            </a:r>
-          </a:p>
-        </p:txBody>
-      </p:sp>
-      <p:sp>
-        <p:nvSpPr>
-          <p:cNvPr id="19" name="Rounded Rectangle 18"/>
-          <p:cNvSpPr/>
-          <p:nvPr/>
-        </p:nvSpPr>
-        <p:spPr>
-          <a:xfrm>
-            <a:off x="6446520" y="2834640"/>
-            <a:ext cx="4828032" cy="594360"/>
-          </a:xfrm>
-          <a:prstGeom prst="roundRect">
-            <a:avLst>
-              <a:gd name="adj" fmla="val 8000"/>
-            </a:avLst>
-          </a:prstGeom>
-          <a:solidFill>
-            <a:srgbClr val="E8654E"/>
-          </a:solidFill>
-          <a:ln>
-            <a:noFill/>
-          </a:ln>
-          <a:effectLst/>
-        </p:spPr>
-        <p:style>
-          <a:lnRef idx="1">
-            <a:schemeClr val="accent1"/>
-          </a:lnRef>
-          <a:fillRef idx="3">
-            <a:schemeClr val="accent1"/>
-          </a:fillRef>
-          <a:effectRef idx="2">
-            <a:schemeClr val="accent1"/>
-          </a:effectRef>
-          <a:fontRef idx="minor">
-            <a:schemeClr val="lt1"/>
-          </a:fontRef>
-        </p:style>
-        <p:txBody>
-          <a:bodyPr rtlCol="0" anchor="ctr"/>
-          <a:lstStyle/>
-          <a:p>
-            <a:pPr algn="ctr"/>
-          </a:p>
-        </p:txBody>
-      </p:sp>
-      <p:sp>
-        <p:nvSpPr>
-          <p:cNvPr id="20" name="TextBox 19"/>
-          <p:cNvSpPr txBox="1"/>
-          <p:nvPr/>
-        </p:nvSpPr>
-        <p:spPr>
-          <a:xfrm>
-            <a:off x="6629400" y="2880360"/>
-            <a:ext cx="4480560" cy="457200"/>
-          </a:xfrm>
-          <a:prstGeom prst="rect">
-            <a:avLst/>
-          </a:prstGeom>
-          <a:noFill/>
-        </p:spPr>
-        <p:txBody>
-          <a:bodyPr wrap="square" anchor="ctr" lIns="0" rIns="0" tIns="0" bIns="0">
-            <a:spAutoFit/>
-          </a:bodyPr>
-          <a:lstStyle/>
-          <a:p>
-            <a:pPr algn="l">
-              <a:lnSpc>
-                <a:spcPct val="100000"/>
-              </a:lnSpc>
-              <a:spcBef>
-                <a:spcPts val="0"/>
-              </a:spcBef>
-              <a:spcAft>
-                <a:spcPts val="400"/>
-              </a:spcAft>
-            </a:pPr>
-            <a:r>
-              <a:rPr sz="1350" b="1">
-                <a:solidFill>
-                  <a:srgbClr val="FFFFFF"/>
-                </a:solidFill>
-                <a:latin typeface="Microsoft JhengHei"/>
-                <a:ea typeface="Microsoft JhengHei"/>
-                <a:cs typeface="Microsoft JhengHei"/>
-              </a:rPr>
-              <a:t>Q：中信 2025Q2 發債計畫？</a:t>
-            </a:r>
-          </a:p>
-        </p:txBody>
-      </p:sp>
-      <p:sp>
-        <p:nvSpPr>
-          <p:cNvPr id="21" name="TextBox 20"/>
-          <p:cNvSpPr txBox="1"/>
-          <p:nvPr/>
-        </p:nvSpPr>
-        <p:spPr>
-          <a:xfrm>
-            <a:off x="6446520" y="3566160"/>
-            <a:ext cx="4846320" cy="914400"/>
-          </a:xfrm>
-          <a:prstGeom prst="rect">
-            <a:avLst/>
-          </a:prstGeom>
-          <a:noFill/>
-        </p:spPr>
-        <p:txBody>
-          <a:bodyPr wrap="square" anchor="t" lIns="0" rIns="0" tIns="0" bIns="0">
-            <a:spAutoFit/>
-          </a:bodyPr>
-          <a:lstStyle/>
-          <a:p>
-            <a:pPr algn="l">
-              <a:lnSpc>
-                <a:spcPct val="120000"/>
-              </a:lnSpc>
-              <a:spcBef>
-                <a:spcPts val="0"/>
-              </a:spcBef>
-              <a:spcAft>
-                <a:spcPts val="400"/>
-              </a:spcAft>
-            </a:pPr>
-            <a:r>
-              <a:rPr sz="1300" b="0">
-                <a:solidFill>
-                  <a:srgbClr val="434343"/>
-                </a:solidFill>
-                <a:latin typeface="Microsoft JhengHei"/>
-                <a:ea typeface="Microsoft JhengHei"/>
-                <a:cs typeface="Microsoft JhengHei"/>
-              </a:rPr>
-              <a:t>A：各子公司均向董事會申請發債額度，依市場狀況分批發行。</a:t>
-            </a:r>
-          </a:p>
-        </p:txBody>
-      </p:sp>
-      <p:sp>
-        <p:nvSpPr>
-          <p:cNvPr id="22" name="Rounded Rectangle 21"/>
-          <p:cNvSpPr/>
-          <p:nvPr/>
-        </p:nvSpPr>
-        <p:spPr>
-          <a:xfrm>
-            <a:off x="6446520" y="4709160"/>
-            <a:ext cx="4828032" cy="777240"/>
-          </a:xfrm>
-          <a:prstGeom prst="roundRect">
-            <a:avLst>
-              <a:gd name="adj" fmla="val 8000"/>
-            </a:avLst>
-          </a:prstGeom>
-          <a:solidFill>
-            <a:srgbClr val="FFFFFF"/>
-          </a:solidFill>
-          <a:ln w="12700">
-            <a:solidFill>
-              <a:srgbClr val="E1E4E8"/>
-            </a:solidFill>
-          </a:ln>
-          <a:effectLst/>
-        </p:spPr>
-        <p:style>
-          <a:lnRef idx="1">
-            <a:schemeClr val="accent1"/>
-          </a:lnRef>
-          <a:fillRef idx="3">
-            <a:schemeClr val="accent1"/>
-          </a:fillRef>
-          <a:effectRef idx="2">
-            <a:schemeClr val="accent1"/>
-          </a:effectRef>
-          <a:fontRef idx="minor">
-            <a:schemeClr val="lt1"/>
-          </a:fontRef>
-        </p:style>
-        <p:txBody>
-          <a:bodyPr rtlCol="0" anchor="ctr"/>
-          <a:lstStyle/>
-          <a:p>
-            <a:pPr algn="ctr"/>
-          </a:p>
-        </p:txBody>
-      </p:sp>
-      <p:sp>
-        <p:nvSpPr>
-          <p:cNvPr id="23" name="TextBox 22"/>
-          <p:cNvSpPr txBox="1"/>
-          <p:nvPr/>
-        </p:nvSpPr>
-        <p:spPr>
-          <a:xfrm>
-            <a:off x="6629400" y="4828032"/>
-            <a:ext cx="4480560" cy="548640"/>
-          </a:xfrm>
-          <a:prstGeom prst="rect">
-            <a:avLst/>
-          </a:prstGeom>
-          <a:noFill/>
-        </p:spPr>
-        <p:txBody>
-          <a:bodyPr wrap="square" anchor="t" lIns="0" rIns="0" tIns="0" bIns="0">
-            <a:spAutoFit/>
-          </a:bodyPr>
-          <a:lstStyle/>
-          <a:p>
-            <a:pPr algn="l">
-              <a:lnSpc>
-                <a:spcPct val="110000"/>
-              </a:lnSpc>
-              <a:spcBef>
-                <a:spcPts val="0"/>
-              </a:spcBef>
-              <a:spcAft>
-                <a:spcPts val="200"/>
-              </a:spcAft>
-            </a:pPr>
-            <a:r>
-              <a:rPr sz="1200" b="1">
-                <a:solidFill>
-                  <a:srgbClr val="E8654E"/>
-                </a:solidFill>
-                <a:latin typeface="Microsoft JhengHei"/>
-                <a:ea typeface="Microsoft JhengHei"/>
-                <a:cs typeface="Microsoft JhengHei"/>
-              </a:rPr>
-              <a:t>📄 來源：中信 2025Q2 法說會錄音 #4</a:t>
-            </a:r>
-          </a:p>
-          <a:p>
-            <a:pPr algn="l">
-              <a:lnSpc>
-                <a:spcPct val="110000"/>
-              </a:lnSpc>
-              <a:spcBef>
-                <a:spcPts val="0"/>
-              </a:spcBef>
-              <a:spcAft>
-                <a:spcPts val="200"/>
-              </a:spcAft>
-            </a:pPr>
-            <a:r>
-              <a:rPr sz="1150" b="0">
-                <a:solidFill>
-                  <a:srgbClr val="767C87"/>
-                </a:solidFill>
-                <a:latin typeface="Microsoft JhengHei"/>
-                <a:ea typeface="Microsoft JhengHei"/>
-                <a:cs typeface="Microsoft JhengHei"/>
-              </a:rPr>
-              <a:t>每則答案附出處，可回溯查證。</a:t>
-            </a:r>
-          </a:p>
-        </p:txBody>
-      </p:sp>
-      <p:sp>
-        <p:nvSpPr>
-          <p:cNvPr id="24" name="TextBox 23"/>
           <p:cNvSpPr txBox="1"/>
           <p:nvPr/>
         </p:nvSpPr>
@@ -11890,7 +13315,7 @@
                 <a:ea typeface="Microsoft JhengHei"/>
                 <a:cs typeface="Microsoft JhengHei"/>
               </a:rPr>
-              <a:t>第二次諮詢重點 ① · 實際介接 API 的畫面</a:t>
+              <a:t>第一次諮詢重點 ③ · QA 測試</a:t>
             </a:r>
           </a:p>
         </p:txBody>
@@ -11937,7 +13362,7 @@
                 <a:ea typeface="Microsoft JhengHei"/>
                 <a:cs typeface="Microsoft JhengHei"/>
               </a:rPr>
-              <a:t>實際介接 EAP Hybrid RAG Chat API</a:t>
+              <a:t>QA 測試：檢索＋計算驗證</a:t>
             </a:r>
           </a:p>
         </p:txBody>
@@ -11984,7 +13409,7 @@
                 <a:ea typeface="Microsoft JhengHei"/>
                 <a:cs typeface="Microsoft JhengHei"/>
               </a:rPr>
-              <a:t>把平台能力包裝成真正能用的產品</a:t>
+              <a:t>冷數據 → 溫決策：數字可驗證、說法有出處</a:t>
             </a:r>
           </a:p>
         </p:txBody>
@@ -11997,8 +13422,8 @@
         </p:nvSpPr>
         <p:spPr>
           <a:xfrm>
-            <a:off x="566928" y="2423160"/>
-            <a:ext cx="2487168" cy="2194560"/>
+            <a:off x="640080" y="2103120"/>
+            <a:ext cx="5394960" cy="3657600"/>
           </a:xfrm>
           <a:prstGeom prst="roundRect">
             <a:avLst>
@@ -12006,11 +13431,11 @@
             </a:avLst>
           </a:prstGeom>
           <a:solidFill>
-            <a:srgbClr val="FDECE8"/>
+            <a:srgbClr val="F6F8FB"/>
           </a:solidFill>
-          <a:ln w="19050">
+          <a:ln w="12700">
             <a:solidFill>
-              <a:srgbClr val="E8654E"/>
+              <a:srgbClr val="D8DEE6"/>
             </a:solidFill>
           </a:ln>
           <a:effectLst/>
@@ -12045,8 +13470,8 @@
         </p:nvSpPr>
         <p:spPr>
           <a:xfrm>
-            <a:off x="768096" y="2660904"/>
-            <a:ext cx="2084832" cy="640080"/>
+            <a:off x="914400" y="2331720"/>
+            <a:ext cx="4846320" cy="457200"/>
           </a:xfrm>
           <a:prstGeom prst="rect">
             <a:avLst/>
@@ -12071,122 +13496,37 @@
               </a:spcAft>
             </a:pPr>
             <a:r>
-              <a:rPr sz="1500" b="1">
-                <a:solidFill>
-                  <a:srgbClr val="E8654E"/>
-                </a:solidFill>
-                <a:latin typeface="Microsoft JhengHei"/>
-                <a:ea typeface="Microsoft JhengHei"/>
-                <a:cs typeface="Microsoft JhengHei"/>
-              </a:rPr>
-              <a:t>① 使用者提問</a:t>
-            </a:r>
-          </a:p>
-        </p:txBody>
-      </p:sp>
-      <p:sp>
-        <p:nvSpPr>
-          <p:cNvPr id="12" name="TextBox 11"/>
-          <p:cNvSpPr txBox="1"/>
-          <p:nvPr/>
-        </p:nvSpPr>
-        <p:spPr>
-          <a:xfrm>
-            <a:off x="786384" y="3337560"/>
-            <a:ext cx="2084832" cy="1097280"/>
-          </a:xfrm>
-          <a:prstGeom prst="rect">
-            <a:avLst/>
-          </a:prstGeom>
-          <a:noFill/>
-        </p:spPr>
-        <p:txBody>
-          <a:bodyPr wrap="square" lIns="0" rIns="0" tIns="0" bIns="0">
-            <a:spAutoFit/>
-          </a:bodyPr>
-          <a:lstStyle/>
-          <a:p>
-            <a:pPr>
-              <a:lnSpc>
-                <a:spcPct val="110000"/>
-              </a:lnSpc>
-              <a:spcAft>
-                <a:spcPts val="500"/>
-              </a:spcAft>
-            </a:pPr>
-            <a:r>
-              <a:rPr sz="1000" b="1">
-                <a:solidFill>
-                  <a:srgbClr val="E8654E"/>
-                </a:solidFill>
-                <a:latin typeface="Microsoft JhengHei"/>
-                <a:ea typeface="Microsoft JhengHei"/>
-                <a:cs typeface="Microsoft JhengHei"/>
-              </a:rPr>
-              <a:t>·  </a:t>
-            </a:r>
-            <a:r>
-              <a:rPr sz="1200">
-                <a:solidFill>
-                  <a:srgbClr val="434343"/>
-                </a:solidFill>
-                <a:latin typeface="Microsoft JhengHei"/>
-                <a:ea typeface="Microsoft JhengHei"/>
-                <a:cs typeface="Microsoft JhengHei"/>
-              </a:rPr>
-              <a:t>網頁輸入問題</a:t>
-            </a:r>
-          </a:p>
-          <a:p>
-            <a:pPr>
-              <a:lnSpc>
-                <a:spcPct val="110000"/>
-              </a:lnSpc>
-              <a:spcAft>
-                <a:spcPts val="500"/>
-              </a:spcAft>
-            </a:pPr>
-            <a:r>
-              <a:rPr sz="1000" b="1">
-                <a:solidFill>
-                  <a:srgbClr val="E8654E"/>
-                </a:solidFill>
-                <a:latin typeface="Microsoft JhengHei"/>
-                <a:ea typeface="Microsoft JhengHei"/>
-                <a:cs typeface="Microsoft JhengHei"/>
-              </a:rPr>
-              <a:t>·  </a:t>
-            </a:r>
-            <a:r>
-              <a:rPr sz="1200">
-                <a:solidFill>
-                  <a:srgbClr val="434343"/>
-                </a:solidFill>
-                <a:latin typeface="Microsoft JhengHei"/>
-                <a:ea typeface="Microsoft JhengHei"/>
-                <a:cs typeface="Microsoft JhengHei"/>
-              </a:rPr>
-              <a:t>勾選 EAP 回答</a:t>
-            </a:r>
-          </a:p>
-        </p:txBody>
-      </p:sp>
-      <p:sp>
-        <p:nvSpPr>
-          <p:cNvPr id="13" name="Right Arrow 12"/>
+              <a:rPr sz="1600" b="1">
+                <a:solidFill>
+                  <a:srgbClr val="1E3A5F"/>
+                </a:solidFill>
+                <a:latin typeface="Microsoft JhengHei"/>
+                <a:ea typeface="Microsoft JhengHei"/>
+                <a:cs typeface="Microsoft JhengHei"/>
+              </a:rPr>
+              <a:t>① 計算驗證（GraphRAG）</a:t>
+            </a:r>
+          </a:p>
+        </p:txBody>
+      </p:sp>
+      <p:sp>
+        <p:nvSpPr>
+          <p:cNvPr id="12" name="Rounded Rectangle 11"/>
           <p:cNvSpPr/>
           <p:nvPr/>
         </p:nvSpPr>
         <p:spPr>
           <a:xfrm>
-            <a:off x="3072384" y="3337559"/>
-            <a:ext cx="347472" cy="365760"/>
-          </a:xfrm>
-          <a:prstGeom prst="rightArrow">
-            <a:avLst/>
+            <a:off x="914400" y="2834640"/>
+            <a:ext cx="4846320" cy="594360"/>
+          </a:xfrm>
+          <a:prstGeom prst="roundRect">
+            <a:avLst>
+              <a:gd name="adj" fmla="val 8000"/>
+            </a:avLst>
           </a:prstGeom>
           <a:solidFill>
-            <a:srgbClr val="E8654E"/>
+            <a:srgbClr val="1E3A5F"/>
           </a:solidFill>
           <a:ln>
             <a:noFill/>
@@ -12217,62 +13557,14 @@
       </p:sp>
       <p:sp>
         <p:nvSpPr>
-          <p:cNvPr id="14" name="Rounded Rectangle 13"/>
-          <p:cNvSpPr/>
-          <p:nvPr/>
-        </p:nvSpPr>
-        <p:spPr>
-          <a:xfrm>
-            <a:off x="3438144" y="2423160"/>
-            <a:ext cx="2487168" cy="2194560"/>
-          </a:xfrm>
-          <a:prstGeom prst="roundRect">
-            <a:avLst>
-              <a:gd name="adj" fmla="val 8000"/>
-            </a:avLst>
-          </a:prstGeom>
-          <a:solidFill>
-            <a:srgbClr val="E8EDF4"/>
-          </a:solidFill>
-          <a:ln w="19050">
-            <a:solidFill>
-              <a:srgbClr val="1E3A5F"/>
-            </a:solidFill>
-          </a:ln>
-          <a:effectLst/>
-        </p:spPr>
-        <p:style>
-          <a:lnRef idx="1">
-            <a:schemeClr val="accent1"/>
-          </a:lnRef>
-          <a:fillRef idx="3">
-            <a:schemeClr val="accent1"/>
-          </a:fillRef>
-          <a:effectRef idx="2">
-            <a:schemeClr val="accent1"/>
-          </a:effectRef>
-          <a:fontRef idx="minor">
-            <a:schemeClr val="lt1"/>
-          </a:fontRef>
-        </p:style>
-        <p:txBody>
-          <a:bodyPr rtlCol="0" anchor="ctr"/>
-          <a:lstStyle/>
-          <a:p>
-            <a:pPr algn="ctr"/>
-          </a:p>
-        </p:txBody>
-      </p:sp>
-      <p:sp>
-        <p:nvSpPr>
-          <p:cNvPr id="15" name="TextBox 14"/>
+          <p:cNvPr id="13" name="TextBox 12"/>
           <p:cNvSpPr txBox="1"/>
           <p:nvPr/>
         </p:nvSpPr>
         <p:spPr>
           <a:xfrm>
-            <a:off x="3639312" y="2660904"/>
-            <a:ext cx="2084832" cy="640080"/>
+            <a:off x="1097280" y="2880360"/>
+            <a:ext cx="4480560" cy="457200"/>
           </a:xfrm>
           <a:prstGeom prst="rect">
             <a:avLst/>
@@ -12280,7 +13572,7 @@
           <a:noFill/>
         </p:spPr>
         <p:txBody>
-          <a:bodyPr wrap="square" anchor="t" lIns="0" rIns="0" tIns="0" bIns="0">
+          <a:bodyPr wrap="square" anchor="ctr" lIns="0" rIns="0" tIns="0" bIns="0">
             <a:spAutoFit/>
           </a:bodyPr>
           <a:lstStyle/>
@@ -12297,208 +13589,29 @@
               </a:spcAft>
             </a:pPr>
             <a:r>
-              <a:rPr sz="1500" b="1">
-                <a:solidFill>
-                  <a:srgbClr val="1E3A5F"/>
-                </a:solidFill>
-                <a:latin typeface="Microsoft JhengHei"/>
-                <a:ea typeface="Microsoft JhengHei"/>
-                <a:cs typeface="Microsoft JhengHei"/>
-              </a:rPr>
-              <a:t>② 呼叫 EAP API</a:t>
-            </a:r>
-          </a:p>
-        </p:txBody>
-      </p:sp>
-      <p:sp>
-        <p:nvSpPr>
-          <p:cNvPr id="16" name="TextBox 15"/>
+              <a:rPr sz="1350" b="1">
+                <a:solidFill>
+                  <a:srgbClr val="FFFFFF"/>
+                </a:solidFill>
+                <a:latin typeface="Microsoft JhengHei"/>
+                <a:ea typeface="Microsoft JhengHei"/>
+                <a:cs typeface="Microsoft JhengHei"/>
+              </a:rPr>
+              <a:t>Q：中信金控的 ROE？</a:t>
+            </a:r>
+          </a:p>
+        </p:txBody>
+      </p:sp>
+      <p:sp>
+        <p:nvSpPr>
+          <p:cNvPr id="14" name="TextBox 13"/>
           <p:cNvSpPr txBox="1"/>
           <p:nvPr/>
         </p:nvSpPr>
         <p:spPr>
           <a:xfrm>
-            <a:off x="3657600" y="3337560"/>
-            <a:ext cx="2084832" cy="1097280"/>
-          </a:xfrm>
-          <a:prstGeom prst="rect">
-            <a:avLst/>
-          </a:prstGeom>
-          <a:noFill/>
-        </p:spPr>
-        <p:txBody>
-          <a:bodyPr wrap="square" lIns="0" rIns="0" tIns="0" bIns="0">
-            <a:spAutoFit/>
-          </a:bodyPr>
-          <a:lstStyle/>
-          <a:p>
-            <a:pPr>
-              <a:lnSpc>
-                <a:spcPct val="110000"/>
-              </a:lnSpc>
-              <a:spcAft>
-                <a:spcPts val="500"/>
-              </a:spcAft>
-            </a:pPr>
-            <a:r>
-              <a:rPr sz="1000" b="1">
-                <a:solidFill>
-                  <a:srgbClr val="1E3A5F"/>
-                </a:solidFill>
-                <a:latin typeface="Microsoft JhengHei"/>
-                <a:ea typeface="Microsoft JhengHei"/>
-                <a:cs typeface="Microsoft JhengHei"/>
-              </a:rPr>
-              <a:t>·  </a:t>
-            </a:r>
-            <a:r>
-              <a:rPr sz="1200">
-                <a:solidFill>
-                  <a:srgbClr val="434343"/>
-                </a:solidFill>
-                <a:latin typeface="Microsoft JhengHei"/>
-                <a:ea typeface="Microsoft JhengHei"/>
-                <a:cs typeface="Microsoft JhengHei"/>
-              </a:rPr>
-              <a:t>POST /assistant/chat</a:t>
-            </a:r>
-          </a:p>
-          <a:p>
-            <a:pPr>
-              <a:lnSpc>
-                <a:spcPct val="110000"/>
-              </a:lnSpc>
-              <a:spcAft>
-                <a:spcPts val="500"/>
-              </a:spcAft>
-            </a:pPr>
-            <a:r>
-              <a:rPr sz="1000" b="1">
-                <a:solidFill>
-                  <a:srgbClr val="1E3A5F"/>
-                </a:solidFill>
-                <a:latin typeface="Microsoft JhengHei"/>
-                <a:ea typeface="Microsoft JhengHei"/>
-                <a:cs typeface="Microsoft JhengHei"/>
-              </a:rPr>
-              <a:t>·  </a:t>
-            </a:r>
-            <a:r>
-              <a:rPr sz="1200">
-                <a:solidFill>
-                  <a:srgbClr val="434343"/>
-                </a:solidFill>
-                <a:latin typeface="Microsoft JhengHei"/>
-                <a:ea typeface="Microsoft JhengHei"/>
-                <a:cs typeface="Microsoft JhengHei"/>
-              </a:rPr>
-              <a:t>帶專案 ID 與金鑰</a:t>
-            </a:r>
-          </a:p>
-        </p:txBody>
-      </p:sp>
-      <p:sp>
-        <p:nvSpPr>
-          <p:cNvPr id="17" name="Right Arrow 16"/>
-          <p:cNvSpPr/>
-          <p:nvPr/>
-        </p:nvSpPr>
-        <p:spPr>
-          <a:xfrm>
-            <a:off x="5943600" y="3337559"/>
-            <a:ext cx="347472" cy="365760"/>
-          </a:xfrm>
-          <a:prstGeom prst="rightArrow">
-            <a:avLst/>
-          </a:prstGeom>
-          <a:solidFill>
-            <a:srgbClr val="E8654E"/>
-          </a:solidFill>
-          <a:ln>
-            <a:noFill/>
-          </a:ln>
-          <a:effectLst/>
-        </p:spPr>
-        <p:style>
-          <a:lnRef idx="1">
-            <a:schemeClr val="accent1"/>
-          </a:lnRef>
-          <a:fillRef idx="3">
-            <a:schemeClr val="accent1"/>
-          </a:fillRef>
-          <a:effectRef idx="2">
-            <a:schemeClr val="accent1"/>
-          </a:effectRef>
-          <a:fontRef idx="minor">
-            <a:schemeClr val="lt1"/>
-          </a:fontRef>
-        </p:style>
-        <p:txBody>
-          <a:bodyPr rtlCol="0" anchor="ctr"/>
-          <a:lstStyle/>
-          <a:p>
-            <a:pPr algn="ctr"/>
-          </a:p>
-        </p:txBody>
-      </p:sp>
-      <p:sp>
-        <p:nvSpPr>
-          <p:cNvPr id="18" name="Rounded Rectangle 17"/>
-          <p:cNvSpPr/>
-          <p:nvPr/>
-        </p:nvSpPr>
-        <p:spPr>
-          <a:xfrm>
-            <a:off x="6309360" y="2423160"/>
-            <a:ext cx="2487168" cy="2194560"/>
-          </a:xfrm>
-          <a:prstGeom prst="roundRect">
-            <a:avLst>
-              <a:gd name="adj" fmla="val 8000"/>
-            </a:avLst>
-          </a:prstGeom>
-          <a:solidFill>
-            <a:srgbClr val="E8EDF4"/>
-          </a:solidFill>
-          <a:ln w="19050">
-            <a:solidFill>
-              <a:srgbClr val="1E3A5F"/>
-            </a:solidFill>
-          </a:ln>
-          <a:effectLst/>
-        </p:spPr>
-        <p:style>
-          <a:lnRef idx="1">
-            <a:schemeClr val="accent1"/>
-          </a:lnRef>
-          <a:fillRef idx="3">
-            <a:schemeClr val="accent1"/>
-          </a:fillRef>
-          <a:effectRef idx="2">
-            <a:schemeClr val="accent1"/>
-          </a:effectRef>
-          <a:fontRef idx="minor">
-            <a:schemeClr val="lt1"/>
-          </a:fontRef>
-        </p:style>
-        <p:txBody>
-          <a:bodyPr rtlCol="0" anchor="ctr"/>
-          <a:lstStyle/>
-          <a:p>
-            <a:pPr algn="ctr"/>
-          </a:p>
-        </p:txBody>
-      </p:sp>
-      <p:sp>
-        <p:nvSpPr>
-          <p:cNvPr id="19" name="TextBox 18"/>
-          <p:cNvSpPr txBox="1"/>
-          <p:nvPr/>
-        </p:nvSpPr>
-        <p:spPr>
-          <a:xfrm>
-            <a:off x="6510528" y="2660904"/>
-            <a:ext cx="2084832" cy="640080"/>
+            <a:off x="914400" y="3566160"/>
+            <a:ext cx="4846320" cy="548640"/>
           </a:xfrm>
           <a:prstGeom prst="rect">
             <a:avLst/>
@@ -12523,6 +13636,17 @@
               </a:spcAft>
             </a:pPr>
             <a:r>
+              <a:rPr sz="1350" b="0">
+                <a:solidFill>
+                  <a:srgbClr val="434343"/>
+                </a:solidFill>
+                <a:latin typeface="Microsoft JhengHei"/>
+                <a:ea typeface="Microsoft JhengHei"/>
+                <a:cs typeface="Microsoft JhengHei"/>
+              </a:rPr>
+              <a:t>A：股東權益報酬率 = </a:t>
+            </a:r>
+            <a:r>
               <a:rPr sz="1500" b="1">
                 <a:solidFill>
                   <a:srgbClr val="1E3A5F"/>
@@ -12531,117 +13655,34 @@
                 <a:ea typeface="Microsoft JhengHei"/>
                 <a:cs typeface="Microsoft JhengHei"/>
               </a:rPr>
-              <a:t>③ 平台 Hybrid RAG</a:t>
-            </a:r>
-          </a:p>
-        </p:txBody>
-      </p:sp>
-      <p:sp>
-        <p:nvSpPr>
-          <p:cNvPr id="20" name="TextBox 19"/>
-          <p:cNvSpPr txBox="1"/>
-          <p:nvPr/>
-        </p:nvSpPr>
-        <p:spPr>
-          <a:xfrm>
-            <a:off x="6528816" y="3337560"/>
-            <a:ext cx="2084832" cy="1097280"/>
-          </a:xfrm>
-          <a:prstGeom prst="rect">
-            <a:avLst/>
-          </a:prstGeom>
-          <a:noFill/>
-        </p:spPr>
-        <p:txBody>
-          <a:bodyPr wrap="square" lIns="0" rIns="0" tIns="0" bIns="0">
-            <a:spAutoFit/>
-          </a:bodyPr>
-          <a:lstStyle/>
-          <a:p>
-            <a:pPr>
-              <a:lnSpc>
-                <a:spcPct val="110000"/>
-              </a:lnSpc>
-              <a:spcAft>
-                <a:spcPts val="500"/>
-              </a:spcAft>
-            </a:pPr>
-            <a:r>
-              <a:rPr sz="1000" b="1">
-                <a:solidFill>
-                  <a:srgbClr val="1E3A5F"/>
-                </a:solidFill>
-                <a:latin typeface="Microsoft JhengHei"/>
-                <a:ea typeface="Microsoft JhengHei"/>
-                <a:cs typeface="Microsoft JhengHei"/>
-              </a:rPr>
-              <a:t>·  </a:t>
-            </a:r>
-            <a:r>
-              <a:rPr sz="1200">
-                <a:solidFill>
-                  <a:srgbClr val="434343"/>
-                </a:solidFill>
-                <a:latin typeface="Microsoft JhengHei"/>
-                <a:ea typeface="Microsoft JhengHei"/>
-                <a:cs typeface="Microsoft JhengHei"/>
-              </a:rPr>
-              <a:t>VectorRAG＋GraphRAG</a:t>
-            </a:r>
-          </a:p>
-          <a:p>
-            <a:pPr>
-              <a:lnSpc>
-                <a:spcPct val="110000"/>
-              </a:lnSpc>
-              <a:spcAft>
-                <a:spcPts val="500"/>
-              </a:spcAft>
-            </a:pPr>
-            <a:r>
-              <a:rPr sz="1000" b="1">
-                <a:solidFill>
-                  <a:srgbClr val="1E3A5F"/>
-                </a:solidFill>
-                <a:latin typeface="Microsoft JhengHei"/>
-                <a:ea typeface="Microsoft JhengHei"/>
-                <a:cs typeface="Microsoft JhengHei"/>
-              </a:rPr>
-              <a:t>·  </a:t>
-            </a:r>
-            <a:r>
-              <a:rPr sz="1200">
-                <a:solidFill>
-                  <a:srgbClr val="434343"/>
-                </a:solidFill>
-                <a:latin typeface="Microsoft JhengHei"/>
-                <a:ea typeface="Microsoft JhengHei"/>
-                <a:cs typeface="Microsoft JhengHei"/>
-              </a:rPr>
-              <a:t>跨公司查詢自動拆解</a:t>
-            </a:r>
-          </a:p>
-        </p:txBody>
-      </p:sp>
-      <p:sp>
-        <p:nvSpPr>
-          <p:cNvPr id="21" name="Right Arrow 20"/>
+              <a:t>18.32%</a:t>
+            </a:r>
+          </a:p>
+        </p:txBody>
+      </p:sp>
+      <p:sp>
+        <p:nvSpPr>
+          <p:cNvPr id="15" name="Rounded Rectangle 14"/>
           <p:cNvSpPr/>
           <p:nvPr/>
         </p:nvSpPr>
         <p:spPr>
           <a:xfrm>
-            <a:off x="8814816" y="3337559"/>
-            <a:ext cx="347472" cy="365760"/>
-          </a:xfrm>
-          <a:prstGeom prst="rightArrow">
-            <a:avLst/>
+            <a:off x="914400" y="4206240"/>
+            <a:ext cx="4846320" cy="1280160"/>
+          </a:xfrm>
+          <a:prstGeom prst="roundRect">
+            <a:avLst>
+              <a:gd name="adj" fmla="val 8000"/>
+            </a:avLst>
           </a:prstGeom>
           <a:solidFill>
-            <a:srgbClr val="E8654E"/>
+            <a:srgbClr val="EAF6EF"/>
           </a:solidFill>
-          <a:ln>
-            <a:noFill/>
+          <a:ln w="12700">
+            <a:solidFill>
+              <a:srgbClr val="C6E4D3"/>
+            </a:solidFill>
           </a:ln>
           <a:effectLst/>
         </p:spPr>
@@ -12669,14 +13710,85 @@
       </p:sp>
       <p:sp>
         <p:nvSpPr>
-          <p:cNvPr id="22" name="Rounded Rectangle 21"/>
+          <p:cNvPr id="16" name="TextBox 15"/>
+          <p:cNvSpPr txBox="1"/>
+          <p:nvPr/>
+        </p:nvSpPr>
+        <p:spPr>
+          <a:xfrm>
+            <a:off x="1097280" y="4389120"/>
+            <a:ext cx="4480560" cy="1005840"/>
+          </a:xfrm>
+          <a:prstGeom prst="rect">
+            <a:avLst/>
+          </a:prstGeom>
+          <a:noFill/>
+        </p:spPr>
+        <p:txBody>
+          <a:bodyPr wrap="square" anchor="t" lIns="0" rIns="0" tIns="0" bIns="0">
+            <a:spAutoFit/>
+          </a:bodyPr>
+          <a:lstStyle/>
+          <a:p>
+            <a:pPr algn="l">
+              <a:lnSpc>
+                <a:spcPct val="115000"/>
+              </a:lnSpc>
+              <a:spcBef>
+                <a:spcPts val="0"/>
+              </a:spcBef>
+              <a:spcAft>
+                <a:spcPts val="300"/>
+              </a:spcAft>
+            </a:pPr>
+            <a:r>
+              <a:rPr sz="1250" b="1">
+                <a:solidFill>
+                  <a:srgbClr val="2E7D46"/>
+                </a:solidFill>
+                <a:latin typeface="Microsoft JhengHei"/>
+                <a:ea typeface="Microsoft JhengHei"/>
+                <a:cs typeface="Microsoft JhengHei"/>
+              </a:rPr>
+              <a:t>✓ 公式驗證：自有資本 ÷ 股東權益，</a:t>
+            </a:r>
+          </a:p>
+          <a:p>
+            <a:pPr algn="l">
+              <a:lnSpc>
+                <a:spcPct val="115000"/>
+              </a:lnSpc>
+              <a:spcBef>
+                <a:spcPts val="0"/>
+              </a:spcBef>
+              <a:spcAft>
+                <a:spcPts val="300"/>
+              </a:spcAft>
+            </a:pPr>
+            <a:r>
+              <a:rPr sz="1250" b="0">
+                <a:solidFill>
+                  <a:srgbClr val="434343"/>
+                </a:solidFill>
+                <a:latin typeface="Microsoft JhengHei"/>
+                <a:ea typeface="Microsoft JhengHei"/>
+                <a:cs typeface="Microsoft JhengHei"/>
+              </a:rPr>
+              <a:t>非 LLM 生成，可信、可稽核。</a:t>
+            </a:r>
+          </a:p>
+        </p:txBody>
+      </p:sp>
+      <p:sp>
+        <p:nvSpPr>
+          <p:cNvPr id="17" name="Rounded Rectangle 16"/>
           <p:cNvSpPr/>
           <p:nvPr/>
         </p:nvSpPr>
         <p:spPr>
           <a:xfrm>
-            <a:off x="9180576" y="2423160"/>
-            <a:ext cx="2487168" cy="2194560"/>
+            <a:off x="6172200" y="2103120"/>
+            <a:ext cx="5376672" cy="3657600"/>
           </a:xfrm>
           <a:prstGeom prst="roundRect">
             <a:avLst>
@@ -12684,11 +13796,11 @@
             </a:avLst>
           </a:prstGeom>
           <a:solidFill>
-            <a:srgbClr val="FDECE8"/>
+            <a:srgbClr val="F6F8FB"/>
           </a:solidFill>
-          <a:ln w="19050">
+          <a:ln w="12700">
             <a:solidFill>
-              <a:srgbClr val="E8654E"/>
+              <a:srgbClr val="D8DEE6"/>
             </a:solidFill>
           </a:ln>
           <a:effectLst/>
@@ -12717,14 +13829,14 @@
       </p:sp>
       <p:sp>
         <p:nvSpPr>
-          <p:cNvPr id="23" name="TextBox 22"/>
+          <p:cNvPr id="18" name="TextBox 17"/>
           <p:cNvSpPr txBox="1"/>
           <p:nvPr/>
         </p:nvSpPr>
         <p:spPr>
           <a:xfrm>
-            <a:off x="9381744" y="2660904"/>
-            <a:ext cx="2084832" cy="640080"/>
+            <a:off x="6446520" y="2331720"/>
+            <a:ext cx="4846320" cy="457200"/>
           </a:xfrm>
           <a:prstGeom prst="rect">
             <a:avLst/>
@@ -12749,6 +13861,1472 @@
               </a:spcAft>
             </a:pPr>
             <a:r>
+              <a:rPr sz="1600" b="1">
+                <a:solidFill>
+                  <a:srgbClr val="E8654E"/>
+                </a:solidFill>
+                <a:latin typeface="Microsoft JhengHei"/>
+                <a:ea typeface="Microsoft JhengHei"/>
+                <a:cs typeface="Microsoft JhengHei"/>
+              </a:rPr>
+              <a:t>② 檢索驗證（EAP／VectorRAG）</a:t>
+            </a:r>
+          </a:p>
+        </p:txBody>
+      </p:sp>
+      <p:sp>
+        <p:nvSpPr>
+          <p:cNvPr id="19" name="Rounded Rectangle 18"/>
+          <p:cNvSpPr/>
+          <p:nvPr/>
+        </p:nvSpPr>
+        <p:spPr>
+          <a:xfrm>
+            <a:off x="6446520" y="2834640"/>
+            <a:ext cx="4828032" cy="594360"/>
+          </a:xfrm>
+          <a:prstGeom prst="roundRect">
+            <a:avLst>
+              <a:gd name="adj" fmla="val 8000"/>
+            </a:avLst>
+          </a:prstGeom>
+          <a:solidFill>
+            <a:srgbClr val="E8654E"/>
+          </a:solidFill>
+          <a:ln>
+            <a:noFill/>
+          </a:ln>
+          <a:effectLst/>
+        </p:spPr>
+        <p:style>
+          <a:lnRef idx="1">
+            <a:schemeClr val="accent1"/>
+          </a:lnRef>
+          <a:fillRef idx="3">
+            <a:schemeClr val="accent1"/>
+          </a:fillRef>
+          <a:effectRef idx="2">
+            <a:schemeClr val="accent1"/>
+          </a:effectRef>
+          <a:fontRef idx="minor">
+            <a:schemeClr val="lt1"/>
+          </a:fontRef>
+        </p:style>
+        <p:txBody>
+          <a:bodyPr rtlCol="0" anchor="ctr"/>
+          <a:lstStyle/>
+          <a:p>
+            <a:pPr algn="ctr"/>
+          </a:p>
+        </p:txBody>
+      </p:sp>
+      <p:sp>
+        <p:nvSpPr>
+          <p:cNvPr id="20" name="TextBox 19"/>
+          <p:cNvSpPr txBox="1"/>
+          <p:nvPr/>
+        </p:nvSpPr>
+        <p:spPr>
+          <a:xfrm>
+            <a:off x="6629400" y="2880360"/>
+            <a:ext cx="4480560" cy="457200"/>
+          </a:xfrm>
+          <a:prstGeom prst="rect">
+            <a:avLst/>
+          </a:prstGeom>
+          <a:noFill/>
+        </p:spPr>
+        <p:txBody>
+          <a:bodyPr wrap="square" anchor="ctr" lIns="0" rIns="0" tIns="0" bIns="0">
+            <a:spAutoFit/>
+          </a:bodyPr>
+          <a:lstStyle/>
+          <a:p>
+            <a:pPr algn="l">
+              <a:lnSpc>
+                <a:spcPct val="100000"/>
+              </a:lnSpc>
+              <a:spcBef>
+                <a:spcPts val="0"/>
+              </a:spcBef>
+              <a:spcAft>
+                <a:spcPts val="400"/>
+              </a:spcAft>
+            </a:pPr>
+            <a:r>
+              <a:rPr sz="1350" b="1">
+                <a:solidFill>
+                  <a:srgbClr val="FFFFFF"/>
+                </a:solidFill>
+                <a:latin typeface="Microsoft JhengHei"/>
+                <a:ea typeface="Microsoft JhengHei"/>
+                <a:cs typeface="Microsoft JhengHei"/>
+              </a:rPr>
+              <a:t>Q：中信 2025Q2 發債計畫？</a:t>
+            </a:r>
+          </a:p>
+        </p:txBody>
+      </p:sp>
+      <p:sp>
+        <p:nvSpPr>
+          <p:cNvPr id="21" name="TextBox 20"/>
+          <p:cNvSpPr txBox="1"/>
+          <p:nvPr/>
+        </p:nvSpPr>
+        <p:spPr>
+          <a:xfrm>
+            <a:off x="6446520" y="3566160"/>
+            <a:ext cx="4846320" cy="914400"/>
+          </a:xfrm>
+          <a:prstGeom prst="rect">
+            <a:avLst/>
+          </a:prstGeom>
+          <a:noFill/>
+        </p:spPr>
+        <p:txBody>
+          <a:bodyPr wrap="square" anchor="t" lIns="0" rIns="0" tIns="0" bIns="0">
+            <a:spAutoFit/>
+          </a:bodyPr>
+          <a:lstStyle/>
+          <a:p>
+            <a:pPr algn="l">
+              <a:lnSpc>
+                <a:spcPct val="120000"/>
+              </a:lnSpc>
+              <a:spcBef>
+                <a:spcPts val="0"/>
+              </a:spcBef>
+              <a:spcAft>
+                <a:spcPts val="400"/>
+              </a:spcAft>
+            </a:pPr>
+            <a:r>
+              <a:rPr sz="1300" b="0">
+                <a:solidFill>
+                  <a:srgbClr val="434343"/>
+                </a:solidFill>
+                <a:latin typeface="Microsoft JhengHei"/>
+                <a:ea typeface="Microsoft JhengHei"/>
+                <a:cs typeface="Microsoft JhengHei"/>
+              </a:rPr>
+              <a:t>A：各子公司均向董事會申請發債額度，依市場狀況分批發行。</a:t>
+            </a:r>
+          </a:p>
+        </p:txBody>
+      </p:sp>
+      <p:sp>
+        <p:nvSpPr>
+          <p:cNvPr id="22" name="Rounded Rectangle 21"/>
+          <p:cNvSpPr/>
+          <p:nvPr/>
+        </p:nvSpPr>
+        <p:spPr>
+          <a:xfrm>
+            <a:off x="6446520" y="4709160"/>
+            <a:ext cx="4828032" cy="777240"/>
+          </a:xfrm>
+          <a:prstGeom prst="roundRect">
+            <a:avLst>
+              <a:gd name="adj" fmla="val 8000"/>
+            </a:avLst>
+          </a:prstGeom>
+          <a:solidFill>
+            <a:srgbClr val="FFFFFF"/>
+          </a:solidFill>
+          <a:ln w="12700">
+            <a:solidFill>
+              <a:srgbClr val="E1E4E8"/>
+            </a:solidFill>
+          </a:ln>
+          <a:effectLst/>
+        </p:spPr>
+        <p:style>
+          <a:lnRef idx="1">
+            <a:schemeClr val="accent1"/>
+          </a:lnRef>
+          <a:fillRef idx="3">
+            <a:schemeClr val="accent1"/>
+          </a:fillRef>
+          <a:effectRef idx="2">
+            <a:schemeClr val="accent1"/>
+          </a:effectRef>
+          <a:fontRef idx="minor">
+            <a:schemeClr val="lt1"/>
+          </a:fontRef>
+        </p:style>
+        <p:txBody>
+          <a:bodyPr rtlCol="0" anchor="ctr"/>
+          <a:lstStyle/>
+          <a:p>
+            <a:pPr algn="ctr"/>
+          </a:p>
+        </p:txBody>
+      </p:sp>
+      <p:sp>
+        <p:nvSpPr>
+          <p:cNvPr id="23" name="TextBox 22"/>
+          <p:cNvSpPr txBox="1"/>
+          <p:nvPr/>
+        </p:nvSpPr>
+        <p:spPr>
+          <a:xfrm>
+            <a:off x="6629400" y="4828032"/>
+            <a:ext cx="4480560" cy="548640"/>
+          </a:xfrm>
+          <a:prstGeom prst="rect">
+            <a:avLst/>
+          </a:prstGeom>
+          <a:noFill/>
+        </p:spPr>
+        <p:txBody>
+          <a:bodyPr wrap="square" anchor="t" lIns="0" rIns="0" tIns="0" bIns="0">
+            <a:spAutoFit/>
+          </a:bodyPr>
+          <a:lstStyle/>
+          <a:p>
+            <a:pPr algn="l">
+              <a:lnSpc>
+                <a:spcPct val="110000"/>
+              </a:lnSpc>
+              <a:spcBef>
+                <a:spcPts val="0"/>
+              </a:spcBef>
+              <a:spcAft>
+                <a:spcPts val="200"/>
+              </a:spcAft>
+            </a:pPr>
+            <a:r>
+              <a:rPr sz="1200" b="1">
+                <a:solidFill>
+                  <a:srgbClr val="E8654E"/>
+                </a:solidFill>
+                <a:latin typeface="Microsoft JhengHei"/>
+                <a:ea typeface="Microsoft JhengHei"/>
+                <a:cs typeface="Microsoft JhengHei"/>
+              </a:rPr>
+              <a:t>📄 來源：中信 2025Q2 法說會錄音 #4</a:t>
+            </a:r>
+          </a:p>
+          <a:p>
+            <a:pPr algn="l">
+              <a:lnSpc>
+                <a:spcPct val="110000"/>
+              </a:lnSpc>
+              <a:spcBef>
+                <a:spcPts val="0"/>
+              </a:spcBef>
+              <a:spcAft>
+                <a:spcPts val="200"/>
+              </a:spcAft>
+            </a:pPr>
+            <a:r>
+              <a:rPr sz="1150" b="0">
+                <a:solidFill>
+                  <a:srgbClr val="767C87"/>
+                </a:solidFill>
+                <a:latin typeface="Microsoft JhengHei"/>
+                <a:ea typeface="Microsoft JhengHei"/>
+                <a:cs typeface="Microsoft JhengHei"/>
+              </a:rPr>
+              <a:t>每則答案附出處，可回溯查證。</a:t>
+            </a:r>
+          </a:p>
+        </p:txBody>
+      </p:sp>
+      <p:sp>
+        <p:nvSpPr>
+          <p:cNvPr id="24" name="TextBox 23"/>
+          <p:cNvSpPr txBox="1"/>
+          <p:nvPr/>
+        </p:nvSpPr>
+        <p:spPr>
+          <a:xfrm>
+            <a:off x="11094415" y="6400800"/>
+            <a:ext cx="731520" cy="274320"/>
+          </a:xfrm>
+          <a:prstGeom prst="rect">
+            <a:avLst/>
+          </a:prstGeom>
+          <a:noFill/>
+        </p:spPr>
+        <p:txBody>
+          <a:bodyPr wrap="square" anchor="t" lIns="0" rIns="0" tIns="0" bIns="0">
+            <a:spAutoFit/>
+          </a:bodyPr>
+          <a:lstStyle/>
+          <a:p>
+            <a:pPr algn="r">
+              <a:lnSpc>
+                <a:spcPct val="100000"/>
+              </a:lnSpc>
+              <a:spcBef>
+                <a:spcPts val="0"/>
+              </a:spcBef>
+              <a:spcAft>
+                <a:spcPts val="400"/>
+              </a:spcAft>
+            </a:pPr>
+            <a:r>
+              <a:rPr sz="1100" b="0">
+                <a:solidFill>
+                  <a:srgbClr val="767C87"/>
+                </a:solidFill>
+                <a:latin typeface="Microsoft JhengHei"/>
+                <a:ea typeface="Microsoft JhengHei"/>
+                <a:cs typeface="Microsoft JhengHei"/>
+              </a:rPr>
+              <a:t>07</a:t>
+            </a:r>
+          </a:p>
+        </p:txBody>
+      </p:sp>
+    </p:spTree>
+  </p:cSld>
+  <p:clrMapOvr>
+    <a:masterClrMapping/>
+  </p:clrMapOvr>
+</p:sld>
+</file>
+
+<file path=ppt/slides/slide8.xml><?xml version="1.0" encoding="utf-8"?>
+<p:sld xmlns:a="http://schemas.openxmlformats.org/drawingml/2006/main" xmlns:p="http://schemas.openxmlformats.org/presentationml/2006/main" xmlns:r="http://schemas.openxmlformats.org/officeDocument/2006/relationships">
+  <p:cSld>
+    <p:bg>
+      <p:bgPr>
+        <a:solidFill>
+          <a:srgbClr val="FFFFFF"/>
+        </a:solidFill>
+        <a:effectLst/>
+      </p:bgPr>
+    </p:bg>
+    <p:spTree>
+      <p:nvGrpSpPr>
+        <p:cNvPr id="1" name=""/>
+        <p:cNvGrpSpPr/>
+        <p:nvPr/>
+      </p:nvGrpSpPr>
+      <p:grpSpPr/>
+      <p:sp>
+        <p:nvSpPr>
+          <p:cNvPr id="2" name="Rectangle 1"/>
+          <p:cNvSpPr/>
+          <p:nvPr/>
+        </p:nvSpPr>
+        <p:spPr>
+          <a:xfrm rot="1080000">
+            <a:off x="10972800" y="-548640"/>
+            <a:ext cx="22860" cy="2926080"/>
+          </a:xfrm>
+          <a:prstGeom prst="rect">
+            <a:avLst/>
+          </a:prstGeom>
+          <a:solidFill>
+            <a:srgbClr val="F3D9D2"/>
+          </a:solidFill>
+          <a:ln>
+            <a:noFill/>
+          </a:ln>
+          <a:effectLst/>
+        </p:spPr>
+        <p:style>
+          <a:lnRef idx="1">
+            <a:schemeClr val="accent1"/>
+          </a:lnRef>
+          <a:fillRef idx="3">
+            <a:schemeClr val="accent1"/>
+          </a:fillRef>
+          <a:effectRef idx="2">
+            <a:schemeClr val="accent1"/>
+          </a:effectRef>
+          <a:fontRef idx="minor">
+            <a:schemeClr val="lt1"/>
+          </a:fontRef>
+        </p:style>
+        <p:txBody>
+          <a:bodyPr rtlCol="0" anchor="ctr"/>
+          <a:lstStyle/>
+          <a:p>
+            <a:pPr algn="ctr"/>
+          </a:p>
+        </p:txBody>
+      </p:sp>
+      <p:sp>
+        <p:nvSpPr>
+          <p:cNvPr id="3" name="Rectangle 2"/>
+          <p:cNvSpPr/>
+          <p:nvPr/>
+        </p:nvSpPr>
+        <p:spPr>
+          <a:xfrm rot="1800000">
+            <a:off x="10991088" y="-548640"/>
+            <a:ext cx="22860" cy="3063240"/>
+          </a:xfrm>
+          <a:prstGeom prst="rect">
+            <a:avLst/>
+          </a:prstGeom>
+          <a:solidFill>
+            <a:srgbClr val="F3D9D2"/>
+          </a:solidFill>
+          <a:ln>
+            <a:noFill/>
+          </a:ln>
+          <a:effectLst/>
+        </p:spPr>
+        <p:style>
+          <a:lnRef idx="1">
+            <a:schemeClr val="accent1"/>
+          </a:lnRef>
+          <a:fillRef idx="3">
+            <a:schemeClr val="accent1"/>
+          </a:fillRef>
+          <a:effectRef idx="2">
+            <a:schemeClr val="accent1"/>
+          </a:effectRef>
+          <a:fontRef idx="minor">
+            <a:schemeClr val="lt1"/>
+          </a:fontRef>
+        </p:style>
+        <p:txBody>
+          <a:bodyPr rtlCol="0" anchor="ctr"/>
+          <a:lstStyle/>
+          <a:p>
+            <a:pPr algn="ctr"/>
+          </a:p>
+        </p:txBody>
+      </p:sp>
+      <p:sp>
+        <p:nvSpPr>
+          <p:cNvPr id="4" name="Rectangle 3"/>
+          <p:cNvSpPr/>
+          <p:nvPr/>
+        </p:nvSpPr>
+        <p:spPr>
+          <a:xfrm rot="2520000">
+            <a:off x="11009376" y="-548640"/>
+            <a:ext cx="22860" cy="3200400"/>
+          </a:xfrm>
+          <a:prstGeom prst="rect">
+            <a:avLst/>
+          </a:prstGeom>
+          <a:solidFill>
+            <a:srgbClr val="F3D9D2"/>
+          </a:solidFill>
+          <a:ln>
+            <a:noFill/>
+          </a:ln>
+          <a:effectLst/>
+        </p:spPr>
+        <p:style>
+          <a:lnRef idx="1">
+            <a:schemeClr val="accent1"/>
+          </a:lnRef>
+          <a:fillRef idx="3">
+            <a:schemeClr val="accent1"/>
+          </a:fillRef>
+          <a:effectRef idx="2">
+            <a:schemeClr val="accent1"/>
+          </a:effectRef>
+          <a:fontRef idx="minor">
+            <a:schemeClr val="lt1"/>
+          </a:fontRef>
+        </p:style>
+        <p:txBody>
+          <a:bodyPr rtlCol="0" anchor="ctr"/>
+          <a:lstStyle/>
+          <a:p>
+            <a:pPr algn="ctr"/>
+          </a:p>
+        </p:txBody>
+      </p:sp>
+      <p:sp>
+        <p:nvSpPr>
+          <p:cNvPr id="5" name="Rectangle 4"/>
+          <p:cNvSpPr/>
+          <p:nvPr/>
+        </p:nvSpPr>
+        <p:spPr>
+          <a:xfrm rot="3240000">
+            <a:off x="11027664" y="-548640"/>
+            <a:ext cx="22860" cy="3337560"/>
+          </a:xfrm>
+          <a:prstGeom prst="rect">
+            <a:avLst/>
+          </a:prstGeom>
+          <a:solidFill>
+            <a:srgbClr val="F3D9D2"/>
+          </a:solidFill>
+          <a:ln>
+            <a:noFill/>
+          </a:ln>
+          <a:effectLst/>
+        </p:spPr>
+        <p:style>
+          <a:lnRef idx="1">
+            <a:schemeClr val="accent1"/>
+          </a:lnRef>
+          <a:fillRef idx="3">
+            <a:schemeClr val="accent1"/>
+          </a:fillRef>
+          <a:effectRef idx="2">
+            <a:schemeClr val="accent1"/>
+          </a:effectRef>
+          <a:fontRef idx="minor">
+            <a:schemeClr val="lt1"/>
+          </a:fontRef>
+        </p:style>
+        <p:txBody>
+          <a:bodyPr rtlCol="0" anchor="ctr"/>
+          <a:lstStyle/>
+          <a:p>
+            <a:pPr algn="ctr"/>
+          </a:p>
+        </p:txBody>
+      </p:sp>
+      <p:sp>
+        <p:nvSpPr>
+          <p:cNvPr id="6" name="Rectangle 5"/>
+          <p:cNvSpPr/>
+          <p:nvPr/>
+        </p:nvSpPr>
+        <p:spPr>
+          <a:xfrm rot="3960000">
+            <a:off x="11045952" y="-548640"/>
+            <a:ext cx="22860" cy="3474720"/>
+          </a:xfrm>
+          <a:prstGeom prst="rect">
+            <a:avLst/>
+          </a:prstGeom>
+          <a:solidFill>
+            <a:srgbClr val="F3D9D2"/>
+          </a:solidFill>
+          <a:ln>
+            <a:noFill/>
+          </a:ln>
+          <a:effectLst/>
+        </p:spPr>
+        <p:style>
+          <a:lnRef idx="1">
+            <a:schemeClr val="accent1"/>
+          </a:lnRef>
+          <a:fillRef idx="3">
+            <a:schemeClr val="accent1"/>
+          </a:fillRef>
+          <a:effectRef idx="2">
+            <a:schemeClr val="accent1"/>
+          </a:effectRef>
+          <a:fontRef idx="minor">
+            <a:schemeClr val="lt1"/>
+          </a:fontRef>
+        </p:style>
+        <p:txBody>
+          <a:bodyPr rtlCol="0" anchor="ctr"/>
+          <a:lstStyle/>
+          <a:p>
+            <a:pPr algn="ctr"/>
+          </a:p>
+        </p:txBody>
+      </p:sp>
+      <p:sp>
+        <p:nvSpPr>
+          <p:cNvPr id="7" name="TextBox 6"/>
+          <p:cNvSpPr txBox="1"/>
+          <p:nvPr/>
+        </p:nvSpPr>
+        <p:spPr>
+          <a:xfrm>
+            <a:off x="640080" y="457200"/>
+            <a:ext cx="10515600" cy="365760"/>
+          </a:xfrm>
+          <a:prstGeom prst="rect">
+            <a:avLst/>
+          </a:prstGeom>
+          <a:noFill/>
+        </p:spPr>
+        <p:txBody>
+          <a:bodyPr wrap="square" anchor="t" lIns="0" rIns="0" tIns="0" bIns="0">
+            <a:spAutoFit/>
+          </a:bodyPr>
+          <a:lstStyle/>
+          <a:p>
+            <a:pPr algn="l">
+              <a:lnSpc>
+                <a:spcPct val="100000"/>
+              </a:lnSpc>
+              <a:spcBef>
+                <a:spcPts val="0"/>
+              </a:spcBef>
+              <a:spcAft>
+                <a:spcPts val="400"/>
+              </a:spcAft>
+            </a:pPr>
+            <a:r>
+              <a:rPr sz="1350" b="1">
+                <a:solidFill>
+                  <a:srgbClr val="E8654E"/>
+                </a:solidFill>
+                <a:latin typeface="Microsoft JhengHei"/>
+                <a:ea typeface="Microsoft JhengHei"/>
+                <a:cs typeface="Microsoft JhengHei"/>
+              </a:rPr>
+              <a:t>第二次諮詢重點 ① · 實際介接 API 的畫面</a:t>
+            </a:r>
+          </a:p>
+        </p:txBody>
+      </p:sp>
+      <p:sp>
+        <p:nvSpPr>
+          <p:cNvPr id="8" name="TextBox 7"/>
+          <p:cNvSpPr txBox="1"/>
+          <p:nvPr/>
+        </p:nvSpPr>
+        <p:spPr>
+          <a:xfrm>
+            <a:off x="640080" y="804672"/>
+            <a:ext cx="10789920" cy="640080"/>
+          </a:xfrm>
+          <a:prstGeom prst="rect">
+            <a:avLst/>
+          </a:prstGeom>
+          <a:noFill/>
+        </p:spPr>
+        <p:txBody>
+          <a:bodyPr wrap="square" anchor="t" lIns="0" rIns="0" tIns="0" bIns="0">
+            <a:spAutoFit/>
+          </a:bodyPr>
+          <a:lstStyle/>
+          <a:p>
+            <a:pPr algn="l">
+              <a:lnSpc>
+                <a:spcPct val="100000"/>
+              </a:lnSpc>
+              <a:spcBef>
+                <a:spcPts val="0"/>
+              </a:spcBef>
+              <a:spcAft>
+                <a:spcPts val="400"/>
+              </a:spcAft>
+            </a:pPr>
+            <a:r>
+              <a:rPr sz="2900" b="1">
+                <a:solidFill>
+                  <a:srgbClr val="1E3A5F"/>
+                </a:solidFill>
+                <a:latin typeface="Microsoft JhengHei"/>
+                <a:ea typeface="Microsoft JhengHei"/>
+                <a:cs typeface="Microsoft JhengHei"/>
+              </a:rPr>
+              <a:t>實際介接 EAP Hybrid RAG Chat API</a:t>
+            </a:r>
+          </a:p>
+        </p:txBody>
+      </p:sp>
+      <p:sp>
+        <p:nvSpPr>
+          <p:cNvPr id="9" name="TextBox 8"/>
+          <p:cNvSpPr txBox="1"/>
+          <p:nvPr/>
+        </p:nvSpPr>
+        <p:spPr>
+          <a:xfrm>
+            <a:off x="640080" y="1463040"/>
+            <a:ext cx="11155680" cy="457200"/>
+          </a:xfrm>
+          <a:prstGeom prst="rect">
+            <a:avLst/>
+          </a:prstGeom>
+          <a:noFill/>
+        </p:spPr>
+        <p:txBody>
+          <a:bodyPr wrap="square" anchor="t" lIns="0" rIns="0" tIns="0" bIns="0">
+            <a:spAutoFit/>
+          </a:bodyPr>
+          <a:lstStyle/>
+          <a:p>
+            <a:pPr algn="l">
+              <a:lnSpc>
+                <a:spcPct val="100000"/>
+              </a:lnSpc>
+              <a:spcBef>
+                <a:spcPts val="0"/>
+              </a:spcBef>
+              <a:spcAft>
+                <a:spcPts val="400"/>
+              </a:spcAft>
+            </a:pPr>
+            <a:r>
+              <a:rPr sz="1450" b="0">
+                <a:solidFill>
+                  <a:srgbClr val="767C87"/>
+                </a:solidFill>
+                <a:latin typeface="Microsoft JhengHei"/>
+                <a:ea typeface="Microsoft JhengHei"/>
+                <a:cs typeface="Microsoft JhengHei"/>
+              </a:rPr>
+              <a:t>把平台能力包裝成真正能用的產品</a:t>
+            </a:r>
+          </a:p>
+        </p:txBody>
+      </p:sp>
+      <p:sp>
+        <p:nvSpPr>
+          <p:cNvPr id="10" name="Rounded Rectangle 9"/>
+          <p:cNvSpPr/>
+          <p:nvPr/>
+        </p:nvSpPr>
+        <p:spPr>
+          <a:xfrm>
+            <a:off x="566928" y="2423160"/>
+            <a:ext cx="2487168" cy="2194560"/>
+          </a:xfrm>
+          <a:prstGeom prst="roundRect">
+            <a:avLst>
+              <a:gd name="adj" fmla="val 8000"/>
+            </a:avLst>
+          </a:prstGeom>
+          <a:solidFill>
+            <a:srgbClr val="FDECE8"/>
+          </a:solidFill>
+          <a:ln w="19050">
+            <a:solidFill>
+              <a:srgbClr val="E8654E"/>
+            </a:solidFill>
+          </a:ln>
+          <a:effectLst/>
+        </p:spPr>
+        <p:style>
+          <a:lnRef idx="1">
+            <a:schemeClr val="accent1"/>
+          </a:lnRef>
+          <a:fillRef idx="3">
+            <a:schemeClr val="accent1"/>
+          </a:fillRef>
+          <a:effectRef idx="2">
+            <a:schemeClr val="accent1"/>
+          </a:effectRef>
+          <a:fontRef idx="minor">
+            <a:schemeClr val="lt1"/>
+          </a:fontRef>
+        </p:style>
+        <p:txBody>
+          <a:bodyPr rtlCol="0" anchor="ctr"/>
+          <a:lstStyle/>
+          <a:p>
+            <a:pPr algn="ctr"/>
+          </a:p>
+        </p:txBody>
+      </p:sp>
+      <p:sp>
+        <p:nvSpPr>
+          <p:cNvPr id="11" name="TextBox 10"/>
+          <p:cNvSpPr txBox="1"/>
+          <p:nvPr/>
+        </p:nvSpPr>
+        <p:spPr>
+          <a:xfrm>
+            <a:off x="768096" y="2660904"/>
+            <a:ext cx="2084832" cy="640080"/>
+          </a:xfrm>
+          <a:prstGeom prst="rect">
+            <a:avLst/>
+          </a:prstGeom>
+          <a:noFill/>
+        </p:spPr>
+        <p:txBody>
+          <a:bodyPr wrap="square" anchor="t" lIns="0" rIns="0" tIns="0" bIns="0">
+            <a:spAutoFit/>
+          </a:bodyPr>
+          <a:lstStyle/>
+          <a:p>
+            <a:pPr algn="l">
+              <a:lnSpc>
+                <a:spcPct val="100000"/>
+              </a:lnSpc>
+              <a:spcBef>
+                <a:spcPts val="0"/>
+              </a:spcBef>
+              <a:spcAft>
+                <a:spcPts val="400"/>
+              </a:spcAft>
+            </a:pPr>
+            <a:r>
+              <a:rPr sz="1500" b="1">
+                <a:solidFill>
+                  <a:srgbClr val="E8654E"/>
+                </a:solidFill>
+                <a:latin typeface="Microsoft JhengHei"/>
+                <a:ea typeface="Microsoft JhengHei"/>
+                <a:cs typeface="Microsoft JhengHei"/>
+              </a:rPr>
+              <a:t>① 使用者提問</a:t>
+            </a:r>
+          </a:p>
+        </p:txBody>
+      </p:sp>
+      <p:sp>
+        <p:nvSpPr>
+          <p:cNvPr id="12" name="TextBox 11"/>
+          <p:cNvSpPr txBox="1"/>
+          <p:nvPr/>
+        </p:nvSpPr>
+        <p:spPr>
+          <a:xfrm>
+            <a:off x="786384" y="3337560"/>
+            <a:ext cx="2084832" cy="1097280"/>
+          </a:xfrm>
+          <a:prstGeom prst="rect">
+            <a:avLst/>
+          </a:prstGeom>
+          <a:noFill/>
+        </p:spPr>
+        <p:txBody>
+          <a:bodyPr wrap="square" lIns="0" rIns="0" tIns="0" bIns="0">
+            <a:spAutoFit/>
+          </a:bodyPr>
+          <a:lstStyle/>
+          <a:p>
+            <a:pPr>
+              <a:lnSpc>
+                <a:spcPct val="110000"/>
+              </a:lnSpc>
+              <a:spcAft>
+                <a:spcPts val="500"/>
+              </a:spcAft>
+            </a:pPr>
+            <a:r>
+              <a:rPr sz="1000" b="1">
+                <a:solidFill>
+                  <a:srgbClr val="E8654E"/>
+                </a:solidFill>
+                <a:latin typeface="Microsoft JhengHei"/>
+                <a:ea typeface="Microsoft JhengHei"/>
+                <a:cs typeface="Microsoft JhengHei"/>
+              </a:rPr>
+              <a:t>·  </a:t>
+            </a:r>
+            <a:r>
+              <a:rPr sz="1200">
+                <a:solidFill>
+                  <a:srgbClr val="434343"/>
+                </a:solidFill>
+                <a:latin typeface="Microsoft JhengHei"/>
+                <a:ea typeface="Microsoft JhengHei"/>
+                <a:cs typeface="Microsoft JhengHei"/>
+              </a:rPr>
+              <a:t>網頁輸入問題</a:t>
+            </a:r>
+          </a:p>
+          <a:p>
+            <a:pPr>
+              <a:lnSpc>
+                <a:spcPct val="110000"/>
+              </a:lnSpc>
+              <a:spcAft>
+                <a:spcPts val="500"/>
+              </a:spcAft>
+            </a:pPr>
+            <a:r>
+              <a:rPr sz="1000" b="1">
+                <a:solidFill>
+                  <a:srgbClr val="E8654E"/>
+                </a:solidFill>
+                <a:latin typeface="Microsoft JhengHei"/>
+                <a:ea typeface="Microsoft JhengHei"/>
+                <a:cs typeface="Microsoft JhengHei"/>
+              </a:rPr>
+              <a:t>·  </a:t>
+            </a:r>
+            <a:r>
+              <a:rPr sz="1200">
+                <a:solidFill>
+                  <a:srgbClr val="434343"/>
+                </a:solidFill>
+                <a:latin typeface="Microsoft JhengHei"/>
+                <a:ea typeface="Microsoft JhengHei"/>
+                <a:cs typeface="Microsoft JhengHei"/>
+              </a:rPr>
+              <a:t>勾選 EAP 回答</a:t>
+            </a:r>
+          </a:p>
+        </p:txBody>
+      </p:sp>
+      <p:sp>
+        <p:nvSpPr>
+          <p:cNvPr id="13" name="Right Arrow 12"/>
+          <p:cNvSpPr/>
+          <p:nvPr/>
+        </p:nvSpPr>
+        <p:spPr>
+          <a:xfrm>
+            <a:off x="3072384" y="3337559"/>
+            <a:ext cx="347472" cy="365760"/>
+          </a:xfrm>
+          <a:prstGeom prst="rightArrow">
+            <a:avLst/>
+          </a:prstGeom>
+          <a:solidFill>
+            <a:srgbClr val="E8654E"/>
+          </a:solidFill>
+          <a:ln>
+            <a:noFill/>
+          </a:ln>
+          <a:effectLst/>
+        </p:spPr>
+        <p:style>
+          <a:lnRef idx="1">
+            <a:schemeClr val="accent1"/>
+          </a:lnRef>
+          <a:fillRef idx="3">
+            <a:schemeClr val="accent1"/>
+          </a:fillRef>
+          <a:effectRef idx="2">
+            <a:schemeClr val="accent1"/>
+          </a:effectRef>
+          <a:fontRef idx="minor">
+            <a:schemeClr val="lt1"/>
+          </a:fontRef>
+        </p:style>
+        <p:txBody>
+          <a:bodyPr rtlCol="0" anchor="ctr"/>
+          <a:lstStyle/>
+          <a:p>
+            <a:pPr algn="ctr"/>
+          </a:p>
+        </p:txBody>
+      </p:sp>
+      <p:sp>
+        <p:nvSpPr>
+          <p:cNvPr id="14" name="Rounded Rectangle 13"/>
+          <p:cNvSpPr/>
+          <p:nvPr/>
+        </p:nvSpPr>
+        <p:spPr>
+          <a:xfrm>
+            <a:off x="3438144" y="2423160"/>
+            <a:ext cx="2487168" cy="2194560"/>
+          </a:xfrm>
+          <a:prstGeom prst="roundRect">
+            <a:avLst>
+              <a:gd name="adj" fmla="val 8000"/>
+            </a:avLst>
+          </a:prstGeom>
+          <a:solidFill>
+            <a:srgbClr val="E8EDF4"/>
+          </a:solidFill>
+          <a:ln w="19050">
+            <a:solidFill>
+              <a:srgbClr val="1E3A5F"/>
+            </a:solidFill>
+          </a:ln>
+          <a:effectLst/>
+        </p:spPr>
+        <p:style>
+          <a:lnRef idx="1">
+            <a:schemeClr val="accent1"/>
+          </a:lnRef>
+          <a:fillRef idx="3">
+            <a:schemeClr val="accent1"/>
+          </a:fillRef>
+          <a:effectRef idx="2">
+            <a:schemeClr val="accent1"/>
+          </a:effectRef>
+          <a:fontRef idx="minor">
+            <a:schemeClr val="lt1"/>
+          </a:fontRef>
+        </p:style>
+        <p:txBody>
+          <a:bodyPr rtlCol="0" anchor="ctr"/>
+          <a:lstStyle/>
+          <a:p>
+            <a:pPr algn="ctr"/>
+          </a:p>
+        </p:txBody>
+      </p:sp>
+      <p:sp>
+        <p:nvSpPr>
+          <p:cNvPr id="15" name="TextBox 14"/>
+          <p:cNvSpPr txBox="1"/>
+          <p:nvPr/>
+        </p:nvSpPr>
+        <p:spPr>
+          <a:xfrm>
+            <a:off x="3639312" y="2660904"/>
+            <a:ext cx="2084832" cy="640080"/>
+          </a:xfrm>
+          <a:prstGeom prst="rect">
+            <a:avLst/>
+          </a:prstGeom>
+          <a:noFill/>
+        </p:spPr>
+        <p:txBody>
+          <a:bodyPr wrap="square" anchor="t" lIns="0" rIns="0" tIns="0" bIns="0">
+            <a:spAutoFit/>
+          </a:bodyPr>
+          <a:lstStyle/>
+          <a:p>
+            <a:pPr algn="l">
+              <a:lnSpc>
+                <a:spcPct val="100000"/>
+              </a:lnSpc>
+              <a:spcBef>
+                <a:spcPts val="0"/>
+              </a:spcBef>
+              <a:spcAft>
+                <a:spcPts val="400"/>
+              </a:spcAft>
+            </a:pPr>
+            <a:r>
+              <a:rPr sz="1500" b="1">
+                <a:solidFill>
+                  <a:srgbClr val="1E3A5F"/>
+                </a:solidFill>
+                <a:latin typeface="Microsoft JhengHei"/>
+                <a:ea typeface="Microsoft JhengHei"/>
+                <a:cs typeface="Microsoft JhengHei"/>
+              </a:rPr>
+              <a:t>② 呼叫 EAP API</a:t>
+            </a:r>
+          </a:p>
+        </p:txBody>
+      </p:sp>
+      <p:sp>
+        <p:nvSpPr>
+          <p:cNvPr id="16" name="TextBox 15"/>
+          <p:cNvSpPr txBox="1"/>
+          <p:nvPr/>
+        </p:nvSpPr>
+        <p:spPr>
+          <a:xfrm>
+            <a:off x="3657600" y="3337560"/>
+            <a:ext cx="2084832" cy="1097280"/>
+          </a:xfrm>
+          <a:prstGeom prst="rect">
+            <a:avLst/>
+          </a:prstGeom>
+          <a:noFill/>
+        </p:spPr>
+        <p:txBody>
+          <a:bodyPr wrap="square" lIns="0" rIns="0" tIns="0" bIns="0">
+            <a:spAutoFit/>
+          </a:bodyPr>
+          <a:lstStyle/>
+          <a:p>
+            <a:pPr>
+              <a:lnSpc>
+                <a:spcPct val="110000"/>
+              </a:lnSpc>
+              <a:spcAft>
+                <a:spcPts val="500"/>
+              </a:spcAft>
+            </a:pPr>
+            <a:r>
+              <a:rPr sz="1000" b="1">
+                <a:solidFill>
+                  <a:srgbClr val="1E3A5F"/>
+                </a:solidFill>
+                <a:latin typeface="Microsoft JhengHei"/>
+                <a:ea typeface="Microsoft JhengHei"/>
+                <a:cs typeface="Microsoft JhengHei"/>
+              </a:rPr>
+              <a:t>·  </a:t>
+            </a:r>
+            <a:r>
+              <a:rPr sz="1200">
+                <a:solidFill>
+                  <a:srgbClr val="434343"/>
+                </a:solidFill>
+                <a:latin typeface="Microsoft JhengHei"/>
+                <a:ea typeface="Microsoft JhengHei"/>
+                <a:cs typeface="Microsoft JhengHei"/>
+              </a:rPr>
+              <a:t>POST /assistant/chat</a:t>
+            </a:r>
+          </a:p>
+          <a:p>
+            <a:pPr>
+              <a:lnSpc>
+                <a:spcPct val="110000"/>
+              </a:lnSpc>
+              <a:spcAft>
+                <a:spcPts val="500"/>
+              </a:spcAft>
+            </a:pPr>
+            <a:r>
+              <a:rPr sz="1000" b="1">
+                <a:solidFill>
+                  <a:srgbClr val="1E3A5F"/>
+                </a:solidFill>
+                <a:latin typeface="Microsoft JhengHei"/>
+                <a:ea typeface="Microsoft JhengHei"/>
+                <a:cs typeface="Microsoft JhengHei"/>
+              </a:rPr>
+              <a:t>·  </a:t>
+            </a:r>
+            <a:r>
+              <a:rPr sz="1200">
+                <a:solidFill>
+                  <a:srgbClr val="434343"/>
+                </a:solidFill>
+                <a:latin typeface="Microsoft JhengHei"/>
+                <a:ea typeface="Microsoft JhengHei"/>
+                <a:cs typeface="Microsoft JhengHei"/>
+              </a:rPr>
+              <a:t>帶專案 ID 與金鑰</a:t>
+            </a:r>
+          </a:p>
+        </p:txBody>
+      </p:sp>
+      <p:sp>
+        <p:nvSpPr>
+          <p:cNvPr id="17" name="Right Arrow 16"/>
+          <p:cNvSpPr/>
+          <p:nvPr/>
+        </p:nvSpPr>
+        <p:spPr>
+          <a:xfrm>
+            <a:off x="5943600" y="3337559"/>
+            <a:ext cx="347472" cy="365760"/>
+          </a:xfrm>
+          <a:prstGeom prst="rightArrow">
+            <a:avLst/>
+          </a:prstGeom>
+          <a:solidFill>
+            <a:srgbClr val="E8654E"/>
+          </a:solidFill>
+          <a:ln>
+            <a:noFill/>
+          </a:ln>
+          <a:effectLst/>
+        </p:spPr>
+        <p:style>
+          <a:lnRef idx="1">
+            <a:schemeClr val="accent1"/>
+          </a:lnRef>
+          <a:fillRef idx="3">
+            <a:schemeClr val="accent1"/>
+          </a:fillRef>
+          <a:effectRef idx="2">
+            <a:schemeClr val="accent1"/>
+          </a:effectRef>
+          <a:fontRef idx="minor">
+            <a:schemeClr val="lt1"/>
+          </a:fontRef>
+        </p:style>
+        <p:txBody>
+          <a:bodyPr rtlCol="0" anchor="ctr"/>
+          <a:lstStyle/>
+          <a:p>
+            <a:pPr algn="ctr"/>
+          </a:p>
+        </p:txBody>
+      </p:sp>
+      <p:sp>
+        <p:nvSpPr>
+          <p:cNvPr id="18" name="Rounded Rectangle 17"/>
+          <p:cNvSpPr/>
+          <p:nvPr/>
+        </p:nvSpPr>
+        <p:spPr>
+          <a:xfrm>
+            <a:off x="6309360" y="2423160"/>
+            <a:ext cx="2487168" cy="2194560"/>
+          </a:xfrm>
+          <a:prstGeom prst="roundRect">
+            <a:avLst>
+              <a:gd name="adj" fmla="val 8000"/>
+            </a:avLst>
+          </a:prstGeom>
+          <a:solidFill>
+            <a:srgbClr val="E8EDF4"/>
+          </a:solidFill>
+          <a:ln w="19050">
+            <a:solidFill>
+              <a:srgbClr val="1E3A5F"/>
+            </a:solidFill>
+          </a:ln>
+          <a:effectLst/>
+        </p:spPr>
+        <p:style>
+          <a:lnRef idx="1">
+            <a:schemeClr val="accent1"/>
+          </a:lnRef>
+          <a:fillRef idx="3">
+            <a:schemeClr val="accent1"/>
+          </a:fillRef>
+          <a:effectRef idx="2">
+            <a:schemeClr val="accent1"/>
+          </a:effectRef>
+          <a:fontRef idx="minor">
+            <a:schemeClr val="lt1"/>
+          </a:fontRef>
+        </p:style>
+        <p:txBody>
+          <a:bodyPr rtlCol="0" anchor="ctr"/>
+          <a:lstStyle/>
+          <a:p>
+            <a:pPr algn="ctr"/>
+          </a:p>
+        </p:txBody>
+      </p:sp>
+      <p:sp>
+        <p:nvSpPr>
+          <p:cNvPr id="19" name="TextBox 18"/>
+          <p:cNvSpPr txBox="1"/>
+          <p:nvPr/>
+        </p:nvSpPr>
+        <p:spPr>
+          <a:xfrm>
+            <a:off x="6510528" y="2660904"/>
+            <a:ext cx="2084832" cy="640080"/>
+          </a:xfrm>
+          <a:prstGeom prst="rect">
+            <a:avLst/>
+          </a:prstGeom>
+          <a:noFill/>
+        </p:spPr>
+        <p:txBody>
+          <a:bodyPr wrap="square" anchor="t" lIns="0" rIns="0" tIns="0" bIns="0">
+            <a:spAutoFit/>
+          </a:bodyPr>
+          <a:lstStyle/>
+          <a:p>
+            <a:pPr algn="l">
+              <a:lnSpc>
+                <a:spcPct val="100000"/>
+              </a:lnSpc>
+              <a:spcBef>
+                <a:spcPts val="0"/>
+              </a:spcBef>
+              <a:spcAft>
+                <a:spcPts val="400"/>
+              </a:spcAft>
+            </a:pPr>
+            <a:r>
+              <a:rPr sz="1500" b="1">
+                <a:solidFill>
+                  <a:srgbClr val="1E3A5F"/>
+                </a:solidFill>
+                <a:latin typeface="Microsoft JhengHei"/>
+                <a:ea typeface="Microsoft JhengHei"/>
+                <a:cs typeface="Microsoft JhengHei"/>
+              </a:rPr>
+              <a:t>③ 平台 Hybrid RAG</a:t>
+            </a:r>
+          </a:p>
+        </p:txBody>
+      </p:sp>
+      <p:sp>
+        <p:nvSpPr>
+          <p:cNvPr id="20" name="TextBox 19"/>
+          <p:cNvSpPr txBox="1"/>
+          <p:nvPr/>
+        </p:nvSpPr>
+        <p:spPr>
+          <a:xfrm>
+            <a:off x="6528816" y="3337560"/>
+            <a:ext cx="2084832" cy="1097280"/>
+          </a:xfrm>
+          <a:prstGeom prst="rect">
+            <a:avLst/>
+          </a:prstGeom>
+          <a:noFill/>
+        </p:spPr>
+        <p:txBody>
+          <a:bodyPr wrap="square" lIns="0" rIns="0" tIns="0" bIns="0">
+            <a:spAutoFit/>
+          </a:bodyPr>
+          <a:lstStyle/>
+          <a:p>
+            <a:pPr>
+              <a:lnSpc>
+                <a:spcPct val="110000"/>
+              </a:lnSpc>
+              <a:spcAft>
+                <a:spcPts val="500"/>
+              </a:spcAft>
+            </a:pPr>
+            <a:r>
+              <a:rPr sz="1000" b="1">
+                <a:solidFill>
+                  <a:srgbClr val="1E3A5F"/>
+                </a:solidFill>
+                <a:latin typeface="Microsoft JhengHei"/>
+                <a:ea typeface="Microsoft JhengHei"/>
+                <a:cs typeface="Microsoft JhengHei"/>
+              </a:rPr>
+              <a:t>·  </a:t>
+            </a:r>
+            <a:r>
+              <a:rPr sz="1200">
+                <a:solidFill>
+                  <a:srgbClr val="434343"/>
+                </a:solidFill>
+                <a:latin typeface="Microsoft JhengHei"/>
+                <a:ea typeface="Microsoft JhengHei"/>
+                <a:cs typeface="Microsoft JhengHei"/>
+              </a:rPr>
+              <a:t>VectorRAG＋GraphRAG</a:t>
+            </a:r>
+          </a:p>
+          <a:p>
+            <a:pPr>
+              <a:lnSpc>
+                <a:spcPct val="110000"/>
+              </a:lnSpc>
+              <a:spcAft>
+                <a:spcPts val="500"/>
+              </a:spcAft>
+            </a:pPr>
+            <a:r>
+              <a:rPr sz="1000" b="1">
+                <a:solidFill>
+                  <a:srgbClr val="1E3A5F"/>
+                </a:solidFill>
+                <a:latin typeface="Microsoft JhengHei"/>
+                <a:ea typeface="Microsoft JhengHei"/>
+                <a:cs typeface="Microsoft JhengHei"/>
+              </a:rPr>
+              <a:t>·  </a:t>
+            </a:r>
+            <a:r>
+              <a:rPr sz="1200">
+                <a:solidFill>
+                  <a:srgbClr val="434343"/>
+                </a:solidFill>
+                <a:latin typeface="Microsoft JhengHei"/>
+                <a:ea typeface="Microsoft JhengHei"/>
+                <a:cs typeface="Microsoft JhengHei"/>
+              </a:rPr>
+              <a:t>跨公司查詢自動拆解</a:t>
+            </a:r>
+          </a:p>
+        </p:txBody>
+      </p:sp>
+      <p:sp>
+        <p:nvSpPr>
+          <p:cNvPr id="21" name="Right Arrow 20"/>
+          <p:cNvSpPr/>
+          <p:nvPr/>
+        </p:nvSpPr>
+        <p:spPr>
+          <a:xfrm>
+            <a:off x="8814816" y="3337559"/>
+            <a:ext cx="347472" cy="365760"/>
+          </a:xfrm>
+          <a:prstGeom prst="rightArrow">
+            <a:avLst/>
+          </a:prstGeom>
+          <a:solidFill>
+            <a:srgbClr val="E8654E"/>
+          </a:solidFill>
+          <a:ln>
+            <a:noFill/>
+          </a:ln>
+          <a:effectLst/>
+        </p:spPr>
+        <p:style>
+          <a:lnRef idx="1">
+            <a:schemeClr val="accent1"/>
+          </a:lnRef>
+          <a:fillRef idx="3">
+            <a:schemeClr val="accent1"/>
+          </a:fillRef>
+          <a:effectRef idx="2">
+            <a:schemeClr val="accent1"/>
+          </a:effectRef>
+          <a:fontRef idx="minor">
+            <a:schemeClr val="lt1"/>
+          </a:fontRef>
+        </p:style>
+        <p:txBody>
+          <a:bodyPr rtlCol="0" anchor="ctr"/>
+          <a:lstStyle/>
+          <a:p>
+            <a:pPr algn="ctr"/>
+          </a:p>
+        </p:txBody>
+      </p:sp>
+      <p:sp>
+        <p:nvSpPr>
+          <p:cNvPr id="22" name="Rounded Rectangle 21"/>
+          <p:cNvSpPr/>
+          <p:nvPr/>
+        </p:nvSpPr>
+        <p:spPr>
+          <a:xfrm>
+            <a:off x="9180576" y="2423160"/>
+            <a:ext cx="2487168" cy="2194560"/>
+          </a:xfrm>
+          <a:prstGeom prst="roundRect">
+            <a:avLst>
+              <a:gd name="adj" fmla="val 8000"/>
+            </a:avLst>
+          </a:prstGeom>
+          <a:solidFill>
+            <a:srgbClr val="FDECE8"/>
+          </a:solidFill>
+          <a:ln w="19050">
+            <a:solidFill>
+              <a:srgbClr val="E8654E"/>
+            </a:solidFill>
+          </a:ln>
+          <a:effectLst/>
+        </p:spPr>
+        <p:style>
+          <a:lnRef idx="1">
+            <a:schemeClr val="accent1"/>
+          </a:lnRef>
+          <a:fillRef idx="3">
+            <a:schemeClr val="accent1"/>
+          </a:fillRef>
+          <a:effectRef idx="2">
+            <a:schemeClr val="accent1"/>
+          </a:effectRef>
+          <a:fontRef idx="minor">
+            <a:schemeClr val="lt1"/>
+          </a:fontRef>
+        </p:style>
+        <p:txBody>
+          <a:bodyPr rtlCol="0" anchor="ctr"/>
+          <a:lstStyle/>
+          <a:p>
+            <a:pPr algn="ctr"/>
+          </a:p>
+        </p:txBody>
+      </p:sp>
+      <p:sp>
+        <p:nvSpPr>
+          <p:cNvPr id="23" name="TextBox 22"/>
+          <p:cNvSpPr txBox="1"/>
+          <p:nvPr/>
+        </p:nvSpPr>
+        <p:spPr>
+          <a:xfrm>
+            <a:off x="9381744" y="2660904"/>
+            <a:ext cx="2084832" cy="640080"/>
+          </a:xfrm>
+          <a:prstGeom prst="rect">
+            <a:avLst/>
+          </a:prstGeom>
+          <a:noFill/>
+        </p:spPr>
+        <p:txBody>
+          <a:bodyPr wrap="square" anchor="t" lIns="0" rIns="0" tIns="0" bIns="0">
+            <a:spAutoFit/>
+          </a:bodyPr>
+          <a:lstStyle/>
+          <a:p>
+            <a:pPr algn="l">
+              <a:lnSpc>
+                <a:spcPct val="100000"/>
+              </a:lnSpc>
+              <a:spcBef>
+                <a:spcPts val="0"/>
+              </a:spcBef>
+              <a:spcAft>
+                <a:spcPts val="400"/>
+              </a:spcAft>
+            </a:pPr>
+            <a:r>
               <a:rPr sz="1500" b="1">
                 <a:solidFill>
                   <a:srgbClr val="E8654E"/>
@@ -12949,7 +15527,7 @@
                 <a:ea typeface="Microsoft JhengHei"/>
                 <a:cs typeface="Microsoft JhengHei"/>
               </a:rPr>
-              <a:t>07</a:t>
+              <a:t>08</a:t>
             </a:r>
           </a:p>
         </p:txBody>
@@ -12962,7 +15540,7 @@
 </p:sld>
 </file>
 
-<file path=ppt/slides/slide8.xml><?xml version="1.0" encoding="utf-8"?>
+<file path=ppt/slides/slide9.xml><?xml version="1.0" encoding="utf-8"?>
 <p:sld xmlns:a="http://schemas.openxmlformats.org/drawingml/2006/main" xmlns:p="http://schemas.openxmlformats.org/presentationml/2006/main" xmlns:r="http://schemas.openxmlformats.org/officeDocument/2006/relationships">
   <p:cSld>
     <p:bg>
@@ -14779,1231 +17357,6 @@
       <p:sp>
         <p:nvSpPr>
           <p:cNvPr id="39" name="TextBox 38"/>
-          <p:cNvSpPr txBox="1"/>
-          <p:nvPr/>
-        </p:nvSpPr>
-        <p:spPr>
-          <a:xfrm>
-            <a:off x="11094415" y="6400800"/>
-            <a:ext cx="731520" cy="274320"/>
-          </a:xfrm>
-          <a:prstGeom prst="rect">
-            <a:avLst/>
-          </a:prstGeom>
-          <a:noFill/>
-        </p:spPr>
-        <p:txBody>
-          <a:bodyPr wrap="square" anchor="t" lIns="0" rIns="0" tIns="0" bIns="0">
-            <a:spAutoFit/>
-          </a:bodyPr>
-          <a:lstStyle/>
-          <a:p>
-            <a:pPr algn="r">
-              <a:lnSpc>
-                <a:spcPct val="100000"/>
-              </a:lnSpc>
-              <a:spcBef>
-                <a:spcPts val="0"/>
-              </a:spcBef>
-              <a:spcAft>
-                <a:spcPts val="400"/>
-              </a:spcAft>
-            </a:pPr>
-            <a:r>
-              <a:rPr sz="1100" b="0">
-                <a:solidFill>
-                  <a:srgbClr val="767C87"/>
-                </a:solidFill>
-                <a:latin typeface="Microsoft JhengHei"/>
-                <a:ea typeface="Microsoft JhengHei"/>
-                <a:cs typeface="Microsoft JhengHei"/>
-              </a:rPr>
-              <a:t>08</a:t>
-            </a:r>
-          </a:p>
-        </p:txBody>
-      </p:sp>
-    </p:spTree>
-  </p:cSld>
-  <p:clrMapOvr>
-    <a:masterClrMapping/>
-  </p:clrMapOvr>
-</p:sld>
-</file>
-
-<file path=ppt/slides/slide9.xml><?xml version="1.0" encoding="utf-8"?>
-<p:sld xmlns:a="http://schemas.openxmlformats.org/drawingml/2006/main" xmlns:p="http://schemas.openxmlformats.org/presentationml/2006/main" xmlns:r="http://schemas.openxmlformats.org/officeDocument/2006/relationships">
-  <p:cSld>
-    <p:bg>
-      <p:bgPr>
-        <a:solidFill>
-          <a:srgbClr val="FFFFFF"/>
-        </a:solidFill>
-        <a:effectLst/>
-      </p:bgPr>
-    </p:bg>
-    <p:spTree>
-      <p:nvGrpSpPr>
-        <p:cNvPr id="1" name=""/>
-        <p:cNvGrpSpPr/>
-        <p:nvPr/>
-      </p:nvGrpSpPr>
-      <p:grpSpPr/>
-      <p:sp>
-        <p:nvSpPr>
-          <p:cNvPr id="2" name="Rectangle 1"/>
-          <p:cNvSpPr/>
-          <p:nvPr/>
-        </p:nvSpPr>
-        <p:spPr>
-          <a:xfrm rot="1080000">
-            <a:off x="10972800" y="-548640"/>
-            <a:ext cx="22860" cy="2926080"/>
-          </a:xfrm>
-          <a:prstGeom prst="rect">
-            <a:avLst/>
-          </a:prstGeom>
-          <a:solidFill>
-            <a:srgbClr val="F3D9D2"/>
-          </a:solidFill>
-          <a:ln>
-            <a:noFill/>
-          </a:ln>
-          <a:effectLst/>
-        </p:spPr>
-        <p:style>
-          <a:lnRef idx="1">
-            <a:schemeClr val="accent1"/>
-          </a:lnRef>
-          <a:fillRef idx="3">
-            <a:schemeClr val="accent1"/>
-          </a:fillRef>
-          <a:effectRef idx="2">
-            <a:schemeClr val="accent1"/>
-          </a:effectRef>
-          <a:fontRef idx="minor">
-            <a:schemeClr val="lt1"/>
-          </a:fontRef>
-        </p:style>
-        <p:txBody>
-          <a:bodyPr rtlCol="0" anchor="ctr"/>
-          <a:lstStyle/>
-          <a:p>
-            <a:pPr algn="ctr"/>
-          </a:p>
-        </p:txBody>
-      </p:sp>
-      <p:sp>
-        <p:nvSpPr>
-          <p:cNvPr id="3" name="Rectangle 2"/>
-          <p:cNvSpPr/>
-          <p:nvPr/>
-        </p:nvSpPr>
-        <p:spPr>
-          <a:xfrm rot="1800000">
-            <a:off x="10991088" y="-548640"/>
-            <a:ext cx="22860" cy="3063240"/>
-          </a:xfrm>
-          <a:prstGeom prst="rect">
-            <a:avLst/>
-          </a:prstGeom>
-          <a:solidFill>
-            <a:srgbClr val="F3D9D2"/>
-          </a:solidFill>
-          <a:ln>
-            <a:noFill/>
-          </a:ln>
-          <a:effectLst/>
-        </p:spPr>
-        <p:style>
-          <a:lnRef idx="1">
-            <a:schemeClr val="accent1"/>
-          </a:lnRef>
-          <a:fillRef idx="3">
-            <a:schemeClr val="accent1"/>
-          </a:fillRef>
-          <a:effectRef idx="2">
-            <a:schemeClr val="accent1"/>
-          </a:effectRef>
-          <a:fontRef idx="minor">
-            <a:schemeClr val="lt1"/>
-          </a:fontRef>
-        </p:style>
-        <p:txBody>
-          <a:bodyPr rtlCol="0" anchor="ctr"/>
-          <a:lstStyle/>
-          <a:p>
-            <a:pPr algn="ctr"/>
-          </a:p>
-        </p:txBody>
-      </p:sp>
-      <p:sp>
-        <p:nvSpPr>
-          <p:cNvPr id="4" name="Rectangle 3"/>
-          <p:cNvSpPr/>
-          <p:nvPr/>
-        </p:nvSpPr>
-        <p:spPr>
-          <a:xfrm rot="2520000">
-            <a:off x="11009376" y="-548640"/>
-            <a:ext cx="22860" cy="3200400"/>
-          </a:xfrm>
-          <a:prstGeom prst="rect">
-            <a:avLst/>
-          </a:prstGeom>
-          <a:solidFill>
-            <a:srgbClr val="F3D9D2"/>
-          </a:solidFill>
-          <a:ln>
-            <a:noFill/>
-          </a:ln>
-          <a:effectLst/>
-        </p:spPr>
-        <p:style>
-          <a:lnRef idx="1">
-            <a:schemeClr val="accent1"/>
-          </a:lnRef>
-          <a:fillRef idx="3">
-            <a:schemeClr val="accent1"/>
-          </a:fillRef>
-          <a:effectRef idx="2">
-            <a:schemeClr val="accent1"/>
-          </a:effectRef>
-          <a:fontRef idx="minor">
-            <a:schemeClr val="lt1"/>
-          </a:fontRef>
-        </p:style>
-        <p:txBody>
-          <a:bodyPr rtlCol="0" anchor="ctr"/>
-          <a:lstStyle/>
-          <a:p>
-            <a:pPr algn="ctr"/>
-          </a:p>
-        </p:txBody>
-      </p:sp>
-      <p:sp>
-        <p:nvSpPr>
-          <p:cNvPr id="5" name="Rectangle 4"/>
-          <p:cNvSpPr/>
-          <p:nvPr/>
-        </p:nvSpPr>
-        <p:spPr>
-          <a:xfrm rot="3240000">
-            <a:off x="11027664" y="-548640"/>
-            <a:ext cx="22860" cy="3337560"/>
-          </a:xfrm>
-          <a:prstGeom prst="rect">
-            <a:avLst/>
-          </a:prstGeom>
-          <a:solidFill>
-            <a:srgbClr val="F3D9D2"/>
-          </a:solidFill>
-          <a:ln>
-            <a:noFill/>
-          </a:ln>
-          <a:effectLst/>
-        </p:spPr>
-        <p:style>
-          <a:lnRef idx="1">
-            <a:schemeClr val="accent1"/>
-          </a:lnRef>
-          <a:fillRef idx="3">
-            <a:schemeClr val="accent1"/>
-          </a:fillRef>
-          <a:effectRef idx="2">
-            <a:schemeClr val="accent1"/>
-          </a:effectRef>
-          <a:fontRef idx="minor">
-            <a:schemeClr val="lt1"/>
-          </a:fontRef>
-        </p:style>
-        <p:txBody>
-          <a:bodyPr rtlCol="0" anchor="ctr"/>
-          <a:lstStyle/>
-          <a:p>
-            <a:pPr algn="ctr"/>
-          </a:p>
-        </p:txBody>
-      </p:sp>
-      <p:sp>
-        <p:nvSpPr>
-          <p:cNvPr id="6" name="Rectangle 5"/>
-          <p:cNvSpPr/>
-          <p:nvPr/>
-        </p:nvSpPr>
-        <p:spPr>
-          <a:xfrm rot="3960000">
-            <a:off x="11045952" y="-548640"/>
-            <a:ext cx="22860" cy="3474720"/>
-          </a:xfrm>
-          <a:prstGeom prst="rect">
-            <a:avLst/>
-          </a:prstGeom>
-          <a:solidFill>
-            <a:srgbClr val="F3D9D2"/>
-          </a:solidFill>
-          <a:ln>
-            <a:noFill/>
-          </a:ln>
-          <a:effectLst/>
-        </p:spPr>
-        <p:style>
-          <a:lnRef idx="1">
-            <a:schemeClr val="accent1"/>
-          </a:lnRef>
-          <a:fillRef idx="3">
-            <a:schemeClr val="accent1"/>
-          </a:fillRef>
-          <a:effectRef idx="2">
-            <a:schemeClr val="accent1"/>
-          </a:effectRef>
-          <a:fontRef idx="minor">
-            <a:schemeClr val="lt1"/>
-          </a:fontRef>
-        </p:style>
-        <p:txBody>
-          <a:bodyPr rtlCol="0" anchor="ctr"/>
-          <a:lstStyle/>
-          <a:p>
-            <a:pPr algn="ctr"/>
-          </a:p>
-        </p:txBody>
-      </p:sp>
-      <p:sp>
-        <p:nvSpPr>
-          <p:cNvPr id="7" name="TextBox 6"/>
-          <p:cNvSpPr txBox="1"/>
-          <p:nvPr/>
-        </p:nvSpPr>
-        <p:spPr>
-          <a:xfrm>
-            <a:off x="640080" y="457200"/>
-            <a:ext cx="10515600" cy="365760"/>
-          </a:xfrm>
-          <a:prstGeom prst="rect">
-            <a:avLst/>
-          </a:prstGeom>
-          <a:noFill/>
-        </p:spPr>
-        <p:txBody>
-          <a:bodyPr wrap="square" anchor="t" lIns="0" rIns="0" tIns="0" bIns="0">
-            <a:spAutoFit/>
-          </a:bodyPr>
-          <a:lstStyle/>
-          <a:p>
-            <a:pPr algn="l">
-              <a:lnSpc>
-                <a:spcPct val="100000"/>
-              </a:lnSpc>
-              <a:spcBef>
-                <a:spcPts val="0"/>
-              </a:spcBef>
-              <a:spcAft>
-                <a:spcPts val="400"/>
-              </a:spcAft>
-            </a:pPr>
-            <a:r>
-              <a:rPr sz="1350" b="1">
-                <a:solidFill>
-                  <a:srgbClr val="E8654E"/>
-                </a:solidFill>
-                <a:latin typeface="Microsoft JhengHei"/>
-                <a:ea typeface="Microsoft JhengHei"/>
-                <a:cs typeface="Microsoft JhengHei"/>
-              </a:rPr>
-              <a:t>第二次諮詢重點 ③ · 產品／應用介面 Demo</a:t>
-            </a:r>
-          </a:p>
-        </p:txBody>
-      </p:sp>
-      <p:sp>
-        <p:nvSpPr>
-          <p:cNvPr id="8" name="TextBox 7"/>
-          <p:cNvSpPr txBox="1"/>
-          <p:nvPr/>
-        </p:nvSpPr>
-        <p:spPr>
-          <a:xfrm>
-            <a:off x="640080" y="804672"/>
-            <a:ext cx="10789920" cy="640080"/>
-          </a:xfrm>
-          <a:prstGeom prst="rect">
-            <a:avLst/>
-          </a:prstGeom>
-          <a:noFill/>
-        </p:spPr>
-        <p:txBody>
-          <a:bodyPr wrap="square" anchor="t" lIns="0" rIns="0" tIns="0" bIns="0">
-            <a:spAutoFit/>
-          </a:bodyPr>
-          <a:lstStyle/>
-          <a:p>
-            <a:pPr algn="l">
-              <a:lnSpc>
-                <a:spcPct val="100000"/>
-              </a:lnSpc>
-              <a:spcBef>
-                <a:spcPts val="0"/>
-              </a:spcBef>
-              <a:spcAft>
-                <a:spcPts val="400"/>
-              </a:spcAft>
-            </a:pPr>
-            <a:r>
-              <a:rPr sz="2900" b="1">
-                <a:solidFill>
-                  <a:srgbClr val="1E3A5F"/>
-                </a:solidFill>
-                <a:latin typeface="Microsoft JhengHei"/>
-                <a:ea typeface="Microsoft JhengHei"/>
-                <a:cs typeface="Microsoft JhengHei"/>
-              </a:rPr>
-              <a:t>產品／應用介面 Demo</a:t>
-            </a:r>
-          </a:p>
-        </p:txBody>
-      </p:sp>
-      <p:sp>
-        <p:nvSpPr>
-          <p:cNvPr id="9" name="TextBox 8"/>
-          <p:cNvSpPr txBox="1"/>
-          <p:nvPr/>
-        </p:nvSpPr>
-        <p:spPr>
-          <a:xfrm>
-            <a:off x="640080" y="1463040"/>
-            <a:ext cx="11155680" cy="457200"/>
-          </a:xfrm>
-          <a:prstGeom prst="rect">
-            <a:avLst/>
-          </a:prstGeom>
-          <a:noFill/>
-        </p:spPr>
-        <p:txBody>
-          <a:bodyPr wrap="square" anchor="t" lIns="0" rIns="0" tIns="0" bIns="0">
-            <a:spAutoFit/>
-          </a:bodyPr>
-          <a:lstStyle/>
-          <a:p>
-            <a:pPr algn="l">
-              <a:lnSpc>
-                <a:spcPct val="100000"/>
-              </a:lnSpc>
-              <a:spcBef>
-                <a:spcPts val="0"/>
-              </a:spcBef>
-              <a:spcAft>
-                <a:spcPts val="400"/>
-              </a:spcAft>
-            </a:pPr>
-            <a:r>
-              <a:rPr sz="1450" b="0">
-                <a:solidFill>
-                  <a:srgbClr val="767C87"/>
-                </a:solidFill>
-                <a:latin typeface="Microsoft JhengHei"/>
-                <a:ea typeface="Microsoft JhengHei"/>
-                <a:cs typeface="Microsoft JhengHei"/>
-              </a:rPr>
-              <a:t>專為目標受眾設計的最終互動畫面</a:t>
-            </a:r>
-          </a:p>
-        </p:txBody>
-      </p:sp>
-      <p:sp>
-        <p:nvSpPr>
-          <p:cNvPr id="10" name="Rounded Rectangle 9"/>
-          <p:cNvSpPr/>
-          <p:nvPr/>
-        </p:nvSpPr>
-        <p:spPr>
-          <a:xfrm>
-            <a:off x="640080" y="2103120"/>
-            <a:ext cx="5349240" cy="1417320"/>
-          </a:xfrm>
-          <a:prstGeom prst="roundRect">
-            <a:avLst>
-              <a:gd name="adj" fmla="val 8000"/>
-            </a:avLst>
-          </a:prstGeom>
-          <a:solidFill>
-            <a:srgbClr val="F6F8FB"/>
-          </a:solidFill>
-          <a:ln w="12700">
-            <a:solidFill>
-              <a:srgbClr val="D8DEE6"/>
-            </a:solidFill>
-          </a:ln>
-          <a:effectLst/>
-        </p:spPr>
-        <p:style>
-          <a:lnRef idx="1">
-            <a:schemeClr val="accent1"/>
-          </a:lnRef>
-          <a:fillRef idx="3">
-            <a:schemeClr val="accent1"/>
-          </a:fillRef>
-          <a:effectRef idx="2">
-            <a:schemeClr val="accent1"/>
-          </a:effectRef>
-          <a:fontRef idx="minor">
-            <a:schemeClr val="lt1"/>
-          </a:fontRef>
-        </p:style>
-        <p:txBody>
-          <a:bodyPr rtlCol="0" anchor="ctr"/>
-          <a:lstStyle/>
-          <a:p>
-            <a:pPr algn="ctr"/>
-          </a:p>
-        </p:txBody>
-      </p:sp>
-      <p:sp>
-        <p:nvSpPr>
-          <p:cNvPr id="11" name="Rectangle 10"/>
-          <p:cNvSpPr/>
-          <p:nvPr/>
-        </p:nvSpPr>
-        <p:spPr>
-          <a:xfrm>
-            <a:off x="640080" y="2103120"/>
-            <a:ext cx="109728" cy="1417320"/>
-          </a:xfrm>
-          <a:prstGeom prst="rect">
-            <a:avLst/>
-          </a:prstGeom>
-          <a:solidFill>
-            <a:srgbClr val="E8654E"/>
-          </a:solidFill>
-          <a:ln>
-            <a:noFill/>
-          </a:ln>
-          <a:effectLst/>
-        </p:spPr>
-        <p:style>
-          <a:lnRef idx="1">
-            <a:schemeClr val="accent1"/>
-          </a:lnRef>
-          <a:fillRef idx="3">
-            <a:schemeClr val="accent1"/>
-          </a:fillRef>
-          <a:effectRef idx="2">
-            <a:schemeClr val="accent1"/>
-          </a:effectRef>
-          <a:fontRef idx="minor">
-            <a:schemeClr val="lt1"/>
-          </a:fontRef>
-        </p:style>
-        <p:txBody>
-          <a:bodyPr rtlCol="0" anchor="ctr"/>
-          <a:lstStyle/>
-          <a:p>
-            <a:pPr algn="ctr"/>
-          </a:p>
-        </p:txBody>
-      </p:sp>
-      <p:sp>
-        <p:nvSpPr>
-          <p:cNvPr id="12" name="TextBox 11"/>
-          <p:cNvSpPr txBox="1"/>
-          <p:nvPr/>
-        </p:nvSpPr>
-        <p:spPr>
-          <a:xfrm>
-            <a:off x="960119" y="2359152"/>
-            <a:ext cx="4846320" cy="457200"/>
-          </a:xfrm>
-          <a:prstGeom prst="rect">
-            <a:avLst/>
-          </a:prstGeom>
-          <a:noFill/>
-        </p:spPr>
-        <p:txBody>
-          <a:bodyPr wrap="square" anchor="t" lIns="0" rIns="0" tIns="0" bIns="0">
-            <a:spAutoFit/>
-          </a:bodyPr>
-          <a:lstStyle/>
-          <a:p>
-            <a:pPr algn="l">
-              <a:lnSpc>
-                <a:spcPct val="100000"/>
-              </a:lnSpc>
-              <a:spcBef>
-                <a:spcPts val="0"/>
-              </a:spcBef>
-              <a:spcAft>
-                <a:spcPts val="400"/>
-              </a:spcAft>
-            </a:pPr>
-            <a:r>
-              <a:rPr sz="1600" b="1">
-                <a:solidFill>
-                  <a:srgbClr val="1E3A5F"/>
-                </a:solidFill>
-                <a:latin typeface="Microsoft JhengHei"/>
-                <a:ea typeface="Microsoft JhengHei"/>
-                <a:cs typeface="Microsoft JhengHei"/>
-              </a:rPr>
-              <a:t>分析儀表板　</a:t>
-            </a:r>
-          </a:p>
-        </p:txBody>
-      </p:sp>
-      <p:sp>
-        <p:nvSpPr>
-          <p:cNvPr id="13" name="TextBox 12"/>
-          <p:cNvSpPr txBox="1"/>
-          <p:nvPr/>
-        </p:nvSpPr>
-        <p:spPr>
-          <a:xfrm>
-            <a:off x="960119" y="2852927"/>
-            <a:ext cx="4846320" cy="548640"/>
-          </a:xfrm>
-          <a:prstGeom prst="rect">
-            <a:avLst/>
-          </a:prstGeom>
-          <a:noFill/>
-        </p:spPr>
-        <p:txBody>
-          <a:bodyPr wrap="square" anchor="t" lIns="0" rIns="0" tIns="0" bIns="0">
-            <a:spAutoFit/>
-          </a:bodyPr>
-          <a:lstStyle/>
-          <a:p>
-            <a:pPr algn="l">
-              <a:lnSpc>
-                <a:spcPct val="115000"/>
-              </a:lnSpc>
-              <a:spcBef>
-                <a:spcPts val="0"/>
-              </a:spcBef>
-              <a:spcAft>
-                <a:spcPts val="400"/>
-              </a:spcAft>
-            </a:pPr>
-            <a:r>
-              <a:rPr sz="1350" b="0">
-                <a:solidFill>
-                  <a:srgbClr val="434343"/>
-                </a:solidFill>
-                <a:latin typeface="Microsoft JhengHei"/>
-                <a:ea typeface="Microsoft JhengHei"/>
-                <a:cs typeface="Microsoft JhengHei"/>
-              </a:rPr>
-              <a:t>核心指標、分組、趨勢、AI 觀點總結</a:t>
-            </a:r>
-          </a:p>
-        </p:txBody>
-      </p:sp>
-      <p:sp>
-        <p:nvSpPr>
-          <p:cNvPr id="14" name="Rounded Rectangle 13"/>
-          <p:cNvSpPr/>
-          <p:nvPr/>
-        </p:nvSpPr>
-        <p:spPr>
-          <a:xfrm>
-            <a:off x="6172200" y="2103120"/>
-            <a:ext cx="5349240" cy="1417320"/>
-          </a:xfrm>
-          <a:prstGeom prst="roundRect">
-            <a:avLst>
-              <a:gd name="adj" fmla="val 8000"/>
-            </a:avLst>
-          </a:prstGeom>
-          <a:solidFill>
-            <a:srgbClr val="F6F8FB"/>
-          </a:solidFill>
-          <a:ln w="12700">
-            <a:solidFill>
-              <a:srgbClr val="D8DEE6"/>
-            </a:solidFill>
-          </a:ln>
-          <a:effectLst/>
-        </p:spPr>
-        <p:style>
-          <a:lnRef idx="1">
-            <a:schemeClr val="accent1"/>
-          </a:lnRef>
-          <a:fillRef idx="3">
-            <a:schemeClr val="accent1"/>
-          </a:fillRef>
-          <a:effectRef idx="2">
-            <a:schemeClr val="accent1"/>
-          </a:effectRef>
-          <a:fontRef idx="minor">
-            <a:schemeClr val="lt1"/>
-          </a:fontRef>
-        </p:style>
-        <p:txBody>
-          <a:bodyPr rtlCol="0" anchor="ctr"/>
-          <a:lstStyle/>
-          <a:p>
-            <a:pPr algn="ctr"/>
-          </a:p>
-        </p:txBody>
-      </p:sp>
-      <p:sp>
-        <p:nvSpPr>
-          <p:cNvPr id="15" name="Rectangle 14"/>
-          <p:cNvSpPr/>
-          <p:nvPr/>
-        </p:nvSpPr>
-        <p:spPr>
-          <a:xfrm>
-            <a:off x="6172200" y="2103120"/>
-            <a:ext cx="109728" cy="1417320"/>
-          </a:xfrm>
-          <a:prstGeom prst="rect">
-            <a:avLst/>
-          </a:prstGeom>
-          <a:solidFill>
-            <a:srgbClr val="E8654E"/>
-          </a:solidFill>
-          <a:ln>
-            <a:noFill/>
-          </a:ln>
-          <a:effectLst/>
-        </p:spPr>
-        <p:style>
-          <a:lnRef idx="1">
-            <a:schemeClr val="accent1"/>
-          </a:lnRef>
-          <a:fillRef idx="3">
-            <a:schemeClr val="accent1"/>
-          </a:fillRef>
-          <a:effectRef idx="2">
-            <a:schemeClr val="accent1"/>
-          </a:effectRef>
-          <a:fontRef idx="minor">
-            <a:schemeClr val="lt1"/>
-          </a:fontRef>
-        </p:style>
-        <p:txBody>
-          <a:bodyPr rtlCol="0" anchor="ctr"/>
-          <a:lstStyle/>
-          <a:p>
-            <a:pPr algn="ctr"/>
-          </a:p>
-        </p:txBody>
-      </p:sp>
-      <p:sp>
-        <p:nvSpPr>
-          <p:cNvPr id="16" name="TextBox 15"/>
-          <p:cNvSpPr txBox="1"/>
-          <p:nvPr/>
-        </p:nvSpPr>
-        <p:spPr>
-          <a:xfrm>
-            <a:off x="6492240" y="2359152"/>
-            <a:ext cx="4846320" cy="457200"/>
-          </a:xfrm>
-          <a:prstGeom prst="rect">
-            <a:avLst/>
-          </a:prstGeom>
-          <a:noFill/>
-        </p:spPr>
-        <p:txBody>
-          <a:bodyPr wrap="square" anchor="t" lIns="0" rIns="0" tIns="0" bIns="0">
-            <a:spAutoFit/>
-          </a:bodyPr>
-          <a:lstStyle/>
-          <a:p>
-            <a:pPr algn="l">
-              <a:lnSpc>
-                <a:spcPct val="100000"/>
-              </a:lnSpc>
-              <a:spcBef>
-                <a:spcPts val="0"/>
-              </a:spcBef>
-              <a:spcAft>
-                <a:spcPts val="400"/>
-              </a:spcAft>
-            </a:pPr>
-            <a:r>
-              <a:rPr sz="1600" b="1">
-                <a:solidFill>
-                  <a:srgbClr val="1E3A5F"/>
-                </a:solidFill>
-                <a:latin typeface="Microsoft JhengHei"/>
-                <a:ea typeface="Microsoft JhengHei"/>
-                <a:cs typeface="Microsoft JhengHei"/>
-              </a:rPr>
-              <a:t>跨機構比較　</a:t>
-            </a:r>
-          </a:p>
-        </p:txBody>
-      </p:sp>
-      <p:sp>
-        <p:nvSpPr>
-          <p:cNvPr id="17" name="TextBox 16"/>
-          <p:cNvSpPr txBox="1"/>
-          <p:nvPr/>
-        </p:nvSpPr>
-        <p:spPr>
-          <a:xfrm>
-            <a:off x="6492240" y="2852927"/>
-            <a:ext cx="4846320" cy="548640"/>
-          </a:xfrm>
-          <a:prstGeom prst="rect">
-            <a:avLst/>
-          </a:prstGeom>
-          <a:noFill/>
-        </p:spPr>
-        <p:txBody>
-          <a:bodyPr wrap="square" anchor="t" lIns="0" rIns="0" tIns="0" bIns="0">
-            <a:spAutoFit/>
-          </a:bodyPr>
-          <a:lstStyle/>
-          <a:p>
-            <a:pPr algn="l">
-              <a:lnSpc>
-                <a:spcPct val="115000"/>
-              </a:lnSpc>
-              <a:spcBef>
-                <a:spcPts val="0"/>
-              </a:spcBef>
-              <a:spcAft>
-                <a:spcPts val="400"/>
-              </a:spcAft>
-            </a:pPr>
-            <a:r>
-              <a:rPr sz="1350" b="0">
-                <a:solidFill>
-                  <a:srgbClr val="434343"/>
-                </a:solidFill>
-                <a:latin typeface="Microsoft JhengHei"/>
-                <a:ea typeface="Microsoft JhengHei"/>
-                <a:cs typeface="Microsoft JhengHei"/>
-              </a:rPr>
-              <a:t>億元對齊、標準比率對照、雙序列圖</a:t>
-            </a:r>
-          </a:p>
-        </p:txBody>
-      </p:sp>
-      <p:sp>
-        <p:nvSpPr>
-          <p:cNvPr id="18" name="Rounded Rectangle 17"/>
-          <p:cNvSpPr/>
-          <p:nvPr/>
-        </p:nvSpPr>
-        <p:spPr>
-          <a:xfrm>
-            <a:off x="640080" y="3703320"/>
-            <a:ext cx="5349240" cy="1417320"/>
-          </a:xfrm>
-          <a:prstGeom prst="roundRect">
-            <a:avLst>
-              <a:gd name="adj" fmla="val 8000"/>
-            </a:avLst>
-          </a:prstGeom>
-          <a:solidFill>
-            <a:srgbClr val="F6F8FB"/>
-          </a:solidFill>
-          <a:ln w="12700">
-            <a:solidFill>
-              <a:srgbClr val="D8DEE6"/>
-            </a:solidFill>
-          </a:ln>
-          <a:effectLst/>
-        </p:spPr>
-        <p:style>
-          <a:lnRef idx="1">
-            <a:schemeClr val="accent1"/>
-          </a:lnRef>
-          <a:fillRef idx="3">
-            <a:schemeClr val="accent1"/>
-          </a:fillRef>
-          <a:effectRef idx="2">
-            <a:schemeClr val="accent1"/>
-          </a:effectRef>
-          <a:fontRef idx="minor">
-            <a:schemeClr val="lt1"/>
-          </a:fontRef>
-        </p:style>
-        <p:txBody>
-          <a:bodyPr rtlCol="0" anchor="ctr"/>
-          <a:lstStyle/>
-          <a:p>
-            <a:pPr algn="ctr"/>
-          </a:p>
-        </p:txBody>
-      </p:sp>
-      <p:sp>
-        <p:nvSpPr>
-          <p:cNvPr id="19" name="Rectangle 18"/>
-          <p:cNvSpPr/>
-          <p:nvPr/>
-        </p:nvSpPr>
-        <p:spPr>
-          <a:xfrm>
-            <a:off x="640080" y="3703320"/>
-            <a:ext cx="109728" cy="1417320"/>
-          </a:xfrm>
-          <a:prstGeom prst="rect">
-            <a:avLst/>
-          </a:prstGeom>
-          <a:solidFill>
-            <a:srgbClr val="E8654E"/>
-          </a:solidFill>
-          <a:ln>
-            <a:noFill/>
-          </a:ln>
-          <a:effectLst/>
-        </p:spPr>
-        <p:style>
-          <a:lnRef idx="1">
-            <a:schemeClr val="accent1"/>
-          </a:lnRef>
-          <a:fillRef idx="3">
-            <a:schemeClr val="accent1"/>
-          </a:fillRef>
-          <a:effectRef idx="2">
-            <a:schemeClr val="accent1"/>
-          </a:effectRef>
-          <a:fontRef idx="minor">
-            <a:schemeClr val="lt1"/>
-          </a:fontRef>
-        </p:style>
-        <p:txBody>
-          <a:bodyPr rtlCol="0" anchor="ctr"/>
-          <a:lstStyle/>
-          <a:p>
-            <a:pPr algn="ctr"/>
-          </a:p>
-        </p:txBody>
-      </p:sp>
-      <p:sp>
-        <p:nvSpPr>
-          <p:cNvPr id="20" name="TextBox 19"/>
-          <p:cNvSpPr txBox="1"/>
-          <p:nvPr/>
-        </p:nvSpPr>
-        <p:spPr>
-          <a:xfrm>
-            <a:off x="960119" y="3959352"/>
-            <a:ext cx="4846320" cy="457200"/>
-          </a:xfrm>
-          <a:prstGeom prst="rect">
-            <a:avLst/>
-          </a:prstGeom>
-          <a:noFill/>
-        </p:spPr>
-        <p:txBody>
-          <a:bodyPr wrap="square" anchor="t" lIns="0" rIns="0" tIns="0" bIns="0">
-            <a:spAutoFit/>
-          </a:bodyPr>
-          <a:lstStyle/>
-          <a:p>
-            <a:pPr algn="l">
-              <a:lnSpc>
-                <a:spcPct val="100000"/>
-              </a:lnSpc>
-              <a:spcBef>
-                <a:spcPts val="0"/>
-              </a:spcBef>
-              <a:spcAft>
-                <a:spcPts val="400"/>
-              </a:spcAft>
-            </a:pPr>
-            <a:r>
-              <a:rPr sz="1600" b="1">
-                <a:solidFill>
-                  <a:srgbClr val="1E3A5F"/>
-                </a:solidFill>
-                <a:latin typeface="Microsoft JhengHei"/>
-                <a:ea typeface="Microsoft JhengHei"/>
-                <a:cs typeface="Microsoft JhengHei"/>
-              </a:rPr>
-              <a:t>問答與報告　</a:t>
-            </a:r>
-          </a:p>
-        </p:txBody>
-      </p:sp>
-      <p:sp>
-        <p:nvSpPr>
-          <p:cNvPr id="21" name="TextBox 20"/>
-          <p:cNvSpPr txBox="1"/>
-          <p:nvPr/>
-        </p:nvSpPr>
-        <p:spPr>
-          <a:xfrm>
-            <a:off x="960119" y="4453128"/>
-            <a:ext cx="4846320" cy="548640"/>
-          </a:xfrm>
-          <a:prstGeom prst="rect">
-            <a:avLst/>
-          </a:prstGeom>
-          <a:noFill/>
-        </p:spPr>
-        <p:txBody>
-          <a:bodyPr wrap="square" anchor="t" lIns="0" rIns="0" tIns="0" bIns="0">
-            <a:spAutoFit/>
-          </a:bodyPr>
-          <a:lstStyle/>
-          <a:p>
-            <a:pPr algn="l">
-              <a:lnSpc>
-                <a:spcPct val="115000"/>
-              </a:lnSpc>
-              <a:spcBef>
-                <a:spcPts val="0"/>
-              </a:spcBef>
-              <a:spcAft>
-                <a:spcPts val="400"/>
-              </a:spcAft>
-            </a:pPr>
-            <a:r>
-              <a:rPr sz="1350" b="0">
-                <a:solidFill>
-                  <a:srgbClr val="434343"/>
-                </a:solidFill>
-                <a:latin typeface="Microsoft JhengHei"/>
-                <a:ea typeface="Microsoft JhengHei"/>
-                <a:cs typeface="Microsoft JhengHei"/>
-              </a:rPr>
-              <a:t>EAP Hybrid RAG 對話、附圖、一鍵 Word</a:t>
-            </a:r>
-          </a:p>
-        </p:txBody>
-      </p:sp>
-      <p:sp>
-        <p:nvSpPr>
-          <p:cNvPr id="22" name="Rounded Rectangle 21"/>
-          <p:cNvSpPr/>
-          <p:nvPr/>
-        </p:nvSpPr>
-        <p:spPr>
-          <a:xfrm>
-            <a:off x="6172200" y="3703320"/>
-            <a:ext cx="5349240" cy="1417320"/>
-          </a:xfrm>
-          <a:prstGeom prst="roundRect">
-            <a:avLst>
-              <a:gd name="adj" fmla="val 8000"/>
-            </a:avLst>
-          </a:prstGeom>
-          <a:solidFill>
-            <a:srgbClr val="F6F8FB"/>
-          </a:solidFill>
-          <a:ln w="12700">
-            <a:solidFill>
-              <a:srgbClr val="D8DEE6"/>
-            </a:solidFill>
-          </a:ln>
-          <a:effectLst/>
-        </p:spPr>
-        <p:style>
-          <a:lnRef idx="1">
-            <a:schemeClr val="accent1"/>
-          </a:lnRef>
-          <a:fillRef idx="3">
-            <a:schemeClr val="accent1"/>
-          </a:fillRef>
-          <a:effectRef idx="2">
-            <a:schemeClr val="accent1"/>
-          </a:effectRef>
-          <a:fontRef idx="minor">
-            <a:schemeClr val="lt1"/>
-          </a:fontRef>
-        </p:style>
-        <p:txBody>
-          <a:bodyPr rtlCol="0" anchor="ctr"/>
-          <a:lstStyle/>
-          <a:p>
-            <a:pPr algn="ctr"/>
-          </a:p>
-        </p:txBody>
-      </p:sp>
-      <p:sp>
-        <p:nvSpPr>
-          <p:cNvPr id="23" name="Rectangle 22"/>
-          <p:cNvSpPr/>
-          <p:nvPr/>
-        </p:nvSpPr>
-        <p:spPr>
-          <a:xfrm>
-            <a:off x="6172200" y="3703320"/>
-            <a:ext cx="109728" cy="1417320"/>
-          </a:xfrm>
-          <a:prstGeom prst="rect">
-            <a:avLst/>
-          </a:prstGeom>
-          <a:solidFill>
-            <a:srgbClr val="E8654E"/>
-          </a:solidFill>
-          <a:ln>
-            <a:noFill/>
-          </a:ln>
-          <a:effectLst/>
-        </p:spPr>
-        <p:style>
-          <a:lnRef idx="1">
-            <a:schemeClr val="accent1"/>
-          </a:lnRef>
-          <a:fillRef idx="3">
-            <a:schemeClr val="accent1"/>
-          </a:fillRef>
-          <a:effectRef idx="2">
-            <a:schemeClr val="accent1"/>
-          </a:effectRef>
-          <a:fontRef idx="minor">
-            <a:schemeClr val="lt1"/>
-          </a:fontRef>
-        </p:style>
-        <p:txBody>
-          <a:bodyPr rtlCol="0" anchor="ctr"/>
-          <a:lstStyle/>
-          <a:p>
-            <a:pPr algn="ctr"/>
-          </a:p>
-        </p:txBody>
-      </p:sp>
-      <p:sp>
-        <p:nvSpPr>
-          <p:cNvPr id="24" name="TextBox 23"/>
-          <p:cNvSpPr txBox="1"/>
-          <p:nvPr/>
-        </p:nvSpPr>
-        <p:spPr>
-          <a:xfrm>
-            <a:off x="6492240" y="3959352"/>
-            <a:ext cx="4846320" cy="457200"/>
-          </a:xfrm>
-          <a:prstGeom prst="rect">
-            <a:avLst/>
-          </a:prstGeom>
-          <a:noFill/>
-        </p:spPr>
-        <p:txBody>
-          <a:bodyPr wrap="square" anchor="t" lIns="0" rIns="0" tIns="0" bIns="0">
-            <a:spAutoFit/>
-          </a:bodyPr>
-          <a:lstStyle/>
-          <a:p>
-            <a:pPr algn="l">
-              <a:lnSpc>
-                <a:spcPct val="100000"/>
-              </a:lnSpc>
-              <a:spcBef>
-                <a:spcPts val="0"/>
-              </a:spcBef>
-              <a:spcAft>
-                <a:spcPts val="400"/>
-              </a:spcAft>
-            </a:pPr>
-            <a:r>
-              <a:rPr sz="1600" b="1">
-                <a:solidFill>
-                  <a:srgbClr val="1E3A5F"/>
-                </a:solidFill>
-                <a:latin typeface="Microsoft JhengHei"/>
-                <a:ea typeface="Microsoft JhengHei"/>
-                <a:cs typeface="Microsoft JhengHei"/>
-              </a:rPr>
-              <a:t>資料來源／上傳　</a:t>
-            </a:r>
-          </a:p>
-        </p:txBody>
-      </p:sp>
-      <p:sp>
-        <p:nvSpPr>
-          <p:cNvPr id="25" name="TextBox 24"/>
-          <p:cNvSpPr txBox="1"/>
-          <p:nvPr/>
-        </p:nvSpPr>
-        <p:spPr>
-          <a:xfrm>
-            <a:off x="6492240" y="4453128"/>
-            <a:ext cx="4846320" cy="548640"/>
-          </a:xfrm>
-          <a:prstGeom prst="rect">
-            <a:avLst/>
-          </a:prstGeom>
-          <a:noFill/>
-        </p:spPr>
-        <p:txBody>
-          <a:bodyPr wrap="square" anchor="t" lIns="0" rIns="0" tIns="0" bIns="0">
-            <a:spAutoFit/>
-          </a:bodyPr>
-          <a:lstStyle/>
-          <a:p>
-            <a:pPr algn="l">
-              <a:lnSpc>
-                <a:spcPct val="115000"/>
-              </a:lnSpc>
-              <a:spcBef>
-                <a:spcPts val="0"/>
-              </a:spcBef>
-              <a:spcAft>
-                <a:spcPts val="400"/>
-              </a:spcAft>
-            </a:pPr>
-            <a:r>
-              <a:rPr sz="1350" b="0">
-                <a:solidFill>
-                  <a:srgbClr val="434343"/>
-                </a:solidFill>
-                <a:latin typeface="Microsoft JhengHei"/>
-                <a:ea typeface="Microsoft JhengHei"/>
-                <a:cs typeface="Microsoft JhengHei"/>
-              </a:rPr>
-              <a:t>收錄概況、逐字稿、PDF/錄音上傳</a:t>
-            </a:r>
-          </a:p>
-        </p:txBody>
-      </p:sp>
-      <p:sp>
-        <p:nvSpPr>
-          <p:cNvPr id="26" name="TextBox 25"/>
-          <p:cNvSpPr txBox="1"/>
-          <p:nvPr/>
-        </p:nvSpPr>
-        <p:spPr>
-          <a:xfrm>
-            <a:off x="640080" y="5760720"/>
-            <a:ext cx="10972800" cy="457200"/>
-          </a:xfrm>
-          <a:prstGeom prst="rect">
-            <a:avLst/>
-          </a:prstGeom>
-          <a:noFill/>
-        </p:spPr>
-        <p:txBody>
-          <a:bodyPr wrap="square" anchor="t" lIns="0" rIns="0" tIns="0" bIns="0">
-            <a:spAutoFit/>
-          </a:bodyPr>
-          <a:lstStyle/>
-          <a:p>
-            <a:pPr algn="l">
-              <a:lnSpc>
-                <a:spcPct val="100000"/>
-              </a:lnSpc>
-              <a:spcBef>
-                <a:spcPts val="0"/>
-              </a:spcBef>
-              <a:spcAft>
-                <a:spcPts val="400"/>
-              </a:spcAft>
-            </a:pPr>
-            <a:r>
-              <a:rPr sz="1300" b="1">
-                <a:solidFill>
-                  <a:srgbClr val="E8654E"/>
-                </a:solidFill>
-                <a:latin typeface="Microsoft JhengHei"/>
-                <a:ea typeface="Microsoft JhengHei"/>
-                <a:cs typeface="Microsoft JhengHei"/>
-              </a:rPr>
-              <a:t>建議：此頁貼實機截圖＋紅框圈重點＋編號說明，或現場實機操作。</a:t>
-            </a:r>
-          </a:p>
-        </p:txBody>
-      </p:sp>
-      <p:sp>
-        <p:nvSpPr>
-          <p:cNvPr id="27" name="TextBox 26"/>
           <p:cNvSpPr txBox="1"/>
           <p:nvPr/>
         </p:nvSpPr>

--- a/顧問簡報_升級版.pptx
+++ b/顧問簡報_升級版.pptx
@@ -8483,7 +8483,7 @@
                 <a:ea typeface="Microsoft JhengHei"/>
                 <a:cs typeface="Microsoft JhengHei"/>
               </a:rPr>
-              <a:t>1,176</a:t>
+              <a:t>1,255</a:t>
             </a:r>
           </a:p>
         </p:txBody>
@@ -8667,7 +8667,7 @@
                 <a:ea typeface="Microsoft JhengHei"/>
                 <a:cs typeface="Microsoft JhengHei"/>
               </a:rPr>
-              <a:t>313</a:t>
+              <a:t>360</a:t>
             </a:r>
           </a:p>
         </p:txBody>
@@ -9771,7 +9771,7 @@
                 <a:ea typeface="Microsoft JhengHei"/>
                 <a:cs typeface="Microsoft JhengHei"/>
               </a:rPr>
-              <a:t>·  1,176 筆策展資料重匯</a:t>
+              <a:t>·  1,255 筆策展資料重匯</a:t>
             </a:r>
             <a:r>
               <a:rPr sz="1200">
@@ -9997,7 +9997,7 @@
                 <a:ea typeface="Microsoft JhengHei"/>
                 <a:cs typeface="Microsoft JhengHei"/>
               </a:rPr>
-              <a:t>·  單位涵蓋率 86%→97%</a:t>
+              <a:t>·  單位涵蓋率 86%→99.3%</a:t>
             </a:r>
             <a:r>
               <a:rPr sz="1200">
@@ -10055,7 +10055,7 @@
                 <a:ea typeface="Microsoft JhengHei"/>
                 <a:cs typeface="Microsoft JhengHei"/>
               </a:rPr>
-              <a:t>重建後圖譜 1,186 節點／2,352 關連。同一指標不同期各自正確，檢索不再跨期誤配——這是 RAG 答案品質的根本前提。</a:t>
+              <a:t>重建後圖譜 1,266 節點／2,512 關連。同一指標不同期各自正確，檢索不再跨期誤配；並稽核出 92 筆「億元／十億元」量級誤判與 13 筆跨年度假成長率——這是 RAG 答案品質的根本前提。</a:t>
             </a:r>
             <a:r>
               <a:rPr sz="1500" b="0">
@@ -12622,7 +12622,7 @@
                 <a:ea typeface="Microsoft JhengHei"/>
                 <a:cs typeface="Microsoft JhengHei"/>
               </a:rPr>
-              <a:t>一鍵切換　</a:t>
+              <a:t>Vector RAG 補強　</a:t>
             </a:r>
             <a:r>
               <a:rPr sz="1500">
@@ -12633,7 +12633,7 @@
                 <a:ea typeface="Microsoft JhengHei"/>
                 <a:cs typeface="Microsoft JhengHei"/>
               </a:rPr>
-              <a:t>EAP 平台回答（主）↔ Gemini（輔）</a:t>
+              <a:t>EAP 查無資料時用本地逐字稿補上，來源標示清楚</a:t>
             </a:r>
           </a:p>
         </p:txBody>

--- a/顧問簡報_升級版.pptx
+++ b/顧問簡報_升級版.pptx
@@ -4219,7 +4219,7 @@
                 <a:ea typeface="Microsoft JhengHei"/>
                 <a:cs typeface="Microsoft JhengHei"/>
               </a:rPr>
-              <a:t>核心指標、分組、趨勢、AI 觀點總結</a:t>
+              <a:t>核心指標、分組、趨勢、AI 觀點總結；支援觸控與鍵盤操作</a:t>
             </a:r>
           </a:p>
         </p:txBody>
@@ -4591,7 +4591,7 @@
                 <a:ea typeface="Microsoft JhengHei"/>
                 <a:cs typeface="Microsoft JhengHei"/>
               </a:rPr>
-              <a:t>EAP Hybrid RAG 對話、附圖、一鍵 Word</a:t>
+              <a:t>EAP Hybrid RAG 逐字串流、附圖、一鍵 Word</a:t>
             </a:r>
           </a:p>
         </p:txBody>
@@ -12536,7 +12536,7 @@
                 <a:ea typeface="Microsoft JhengHei"/>
                 <a:cs typeface="Microsoft JhengHei"/>
               </a:rPr>
-              <a:t>網頁介面　</a:t>
+              <a:t>逐字串流　</a:t>
             </a:r>
             <a:r>
               <a:rPr sz="1500">
@@ -12547,7 +12547,7 @@
                 <a:ea typeface="Microsoft JhengHei"/>
                 <a:cs typeface="Microsoft JhengHei"/>
               </a:rPr>
-              <a:t>呼叫 EAP Chat API，包成財報工具</a:t>
+              <a:t>SSE 串流輸出，先報進度再逐字顯示，等待有回饋</a:t>
             </a:r>
           </a:p>
           <a:p>
@@ -15390,7 +15390,7 @@
                 <a:ea typeface="Microsoft JhengHei"/>
                 <a:cs typeface="Microsoft JhengHei"/>
               </a:rPr>
-              <a:t>Markdown 渲染</a:t>
+              <a:t>SSE 逐字串流</a:t>
             </a:r>
           </a:p>
           <a:p>
@@ -15422,7 +15422,7 @@
                 <a:ea typeface="Microsoft JhengHei"/>
                 <a:cs typeface="Microsoft JhengHei"/>
               </a:rPr>
-              <a:t>圖表由 Graph RAG 補上</a:t>
+              <a:t>圖表由 Graph RAG 補上、心跳維持連線</a:t>
             </a:r>
           </a:p>
         </p:txBody>

--- a/顧問簡報_升級版.pptx
+++ b/顧問簡報_升級版.pptx
@@ -13750,7 +13750,7 @@
                 <a:ea typeface="Microsoft JhengHei"/>
                 <a:cs typeface="Microsoft JhengHei"/>
               </a:rPr>
-              <a:t>✓ 公式驗證：自有資本 ÷ 股東權益，</a:t>
+              <a:t>✓ 公式驗證：稅後淨利 ÷ 股東權益，</a:t>
             </a:r>
           </a:p>
           <a:p>
@@ -14128,7 +14128,7 @@
                 <a:ea typeface="Microsoft JhengHei"/>
                 <a:cs typeface="Microsoft JhengHei"/>
               </a:rPr>
-              <a:t>每則答案附出處，可回溯查證。</a:t>
+              <a:t>每則答案附出處；交叉核對抓到平台換算差 10 倍並標紅。</a:t>
             </a:r>
           </a:p>
         </p:txBody>

--- a/顧問簡報_升級版.pptx
+++ b/顧問簡報_升級版.pptx
@@ -13504,7 +13504,7 @@
                 <a:ea typeface="Microsoft JhengHei"/>
                 <a:cs typeface="Microsoft JhengHei"/>
               </a:rPr>
-              <a:t>① 計算驗證（GraphRAG）</a:t>
+              <a:t>① 計算驗證（本地指標庫）</a:t>
             </a:r>
           </a:p>
         </p:txBody>
@@ -15422,7 +15422,7 @@
                 <a:ea typeface="Microsoft JhengHei"/>
                 <a:cs typeface="Microsoft JhengHei"/>
               </a:rPr>
-              <a:t>圖表由 Graph RAG 補上、心跳維持連線</a:t>
+              <a:t>圖表由本地指標庫補上、心跳維持連線</a:t>
             </a:r>
           </a:p>
         </p:txBody>

--- a/顧問簡報_升級版.pptx
+++ b/顧問簡報_升級版.pptx
@@ -12636,6 +12636,92 @@
               <a:t>EAP 查無資料時用本地逐字稿補上，來源標示清楚</a:t>
             </a:r>
           </a:p>
+          <a:p>
+            <a:pPr>
+              <a:lnSpc>
+                <a:spcPct val="112000"/>
+              </a:lnSpc>
+              <a:spcAft>
+                <a:spcPts val="1300"/>
+              </a:spcAft>
+            </a:pPr>
+            <a:r>
+              <a:rPr sz="1300" b="1">
+                <a:solidFill>
+                  <a:srgbClr val="E8654E"/>
+                </a:solidFill>
+                <a:latin typeface="Microsoft JhengHei"/>
+                <a:ea typeface="Microsoft JhengHei"/>
+                <a:cs typeface="Microsoft JhengHei"/>
+              </a:rPr>
+              <a:t>●  無效比較攔截　平台拿全年累計比首季時標示，本地計算直接不給</a:t>
+            </a:r>
+            <a:r>
+              <a:rPr sz="1500" b="1">
+                <a:solidFill>
+                  <a:srgbClr val="1E3A5F"/>
+                </a:solidFill>
+                <a:latin typeface="Microsoft JhengHei"/>
+                <a:ea typeface="Microsoft JhengHei"/>
+                <a:cs typeface="Microsoft JhengHei"/>
+              </a:rPr>
+              <a:t/>
+            </a:r>
+            <a:r>
+              <a:rPr sz="1500">
+                <a:solidFill>
+                  <a:srgbClr val="434343"/>
+                </a:solidFill>
+                <a:latin typeface="Microsoft JhengHei"/>
+                <a:ea typeface="Microsoft JhengHei"/>
+                <a:cs typeface="Microsoft JhengHei"/>
+              </a:rPr>
+              <a:t/>
+            </a:r>
+          </a:p>
+          <a:p>
+            <a:pPr>
+              <a:lnSpc>
+                <a:spcPct val="112000"/>
+              </a:lnSpc>
+              <a:spcAft>
+                <a:spcPts val="1300"/>
+              </a:spcAft>
+            </a:pPr>
+            <a:r>
+              <a:rPr sz="1300" b="1">
+                <a:solidFill>
+                  <a:srgbClr val="E8654E"/>
+                </a:solidFill>
+                <a:latin typeface="Microsoft JhengHei"/>
+                <a:ea typeface="Microsoft JhengHei"/>
+                <a:cs typeface="Microsoft JhengHei"/>
+              </a:rPr>
+              <a:t>●  部分驗證揭露　驗過幾筆、哪幾筆本地沒有，畫面上分得清楚</a:t>
+            </a:r>
+            <a:r>
+              <a:rPr sz="1500" b="1">
+                <a:solidFill>
+                  <a:srgbClr val="1E3A5F"/>
+                </a:solidFill>
+                <a:latin typeface="Microsoft JhengHei"/>
+                <a:ea typeface="Microsoft JhengHei"/>
+                <a:cs typeface="Microsoft JhengHei"/>
+              </a:rPr>
+              <a:t/>
+            </a:r>
+            <a:r>
+              <a:rPr sz="1500">
+                <a:solidFill>
+                  <a:srgbClr val="434343"/>
+                </a:solidFill>
+                <a:latin typeface="Microsoft JhengHei"/>
+                <a:ea typeface="Microsoft JhengHei"/>
+                <a:cs typeface="Microsoft JhengHei"/>
+              </a:rPr>
+              <a:t/>
+            </a:r>
+          </a:p>
         </p:txBody>
       </p:sp>
       <p:sp>
@@ -14128,7 +14214,7 @@
                 <a:ea typeface="Microsoft JhengHei"/>
                 <a:cs typeface="Microsoft JhengHei"/>
               </a:rPr>
-              <a:t>每則答案附出處；交叉核對抓到平台換算差 10 倍並標紅。</a:t>
+              <a:t>每則答案附出處；攔下 10 倍換算錯與累計跨季亂比。</a:t>
             </a:r>
           </a:p>
         </p:txBody>
